--- a/WasteWise_AI_Presentation.pptx
+++ b/WasteWise_AI_Presentation.pptx
@@ -5,20 +5,18 @@
     <p:sldMasterId id="2147483648" r:id="rId1"/>
   </p:sldMasterIdLst>
   <p:sldIdLst>
-    <p:sldId id="256" r:id="rId7"/>
-    <p:sldId id="257" r:id="rId8"/>
-    <p:sldId id="258" r:id="rId9"/>
-    <p:sldId id="259" r:id="rId10"/>
-    <p:sldId id="260" r:id="rId11"/>
-    <p:sldId id="261" r:id="rId12"/>
-    <p:sldId id="262" r:id="rId13"/>
-    <p:sldId id="263" r:id="rId14"/>
-    <p:sldId id="264" r:id="rId15"/>
-    <p:sldId id="265" r:id="rId16"/>
-    <p:sldId id="266" r:id="rId17"/>
-    <p:sldId id="267" r:id="rId18"/>
+    <p:sldId id="256" r:id="rId2"/>
+    <p:sldId id="257" r:id="rId3"/>
+    <p:sldId id="258" r:id="rId4"/>
+    <p:sldId id="259" r:id="rId5"/>
+    <p:sldId id="260" r:id="rId6"/>
+    <p:sldId id="261" r:id="rId7"/>
+    <p:sldId id="262" r:id="rId8"/>
+    <p:sldId id="263" r:id="rId9"/>
+    <p:sldId id="264" r:id="rId10"/>
+    <p:sldId id="265" r:id="rId11"/>
   </p:sldIdLst>
-  <p:sldSz cx="12191695" cy="6858000" type="screen4x3"/>
+  <p:sldSz cx="12192000" cy="6858000"/>
   <p:notesSz cx="6858000" cy="9144000"/>
   <p:defaultTextStyle>
     <a:defPPr>
@@ -115,6 +113,22 @@
       </a:defRPr>
     </a:lvl9pPr>
   </p:defaultTextStyle>
+  <p:extLst>
+    <p:ext uri="{EFAFB233-063F-42B5-8137-9DF3F51BA10A}">
+      <p15:sldGuideLst xmlns:p15="http://schemas.microsoft.com/office/powerpoint/2012/main">
+        <p15:guide id="1" orient="horz" pos="2160">
+          <p15:clr>
+            <a:srgbClr val="A4A3A4"/>
+          </p15:clr>
+        </p15:guide>
+        <p15:guide id="2" pos="2880">
+          <p15:clr>
+            <a:srgbClr val="A4A3A4"/>
+          </p15:clr>
+        </p15:guide>
+      </p15:sldGuideLst>
+    </p:ext>
+  </p:extLst>
 </p:presentation>
 </file>
 
@@ -156,10 +170,9 @@
           <a:lstStyle/>
           <a:p>
             <a:r>
-              <a:rPr lang="en-US" smtClean="0"/>
+              <a:rPr lang="en-US"/>
               <a:t>Click to edit Master title style</a:t>
             </a:r>
-            <a:endParaRPr lang="en-US"/>
           </a:p>
         </p:txBody>
       </p:sp>
@@ -275,10 +288,9 @@
           </a:lstStyle>
           <a:p>
             <a:r>
-              <a:rPr lang="en-US" smtClean="0"/>
+              <a:rPr lang="en-US"/>
               <a:t>Click to edit Master subtitle style</a:t>
             </a:r>
-            <a:endParaRPr lang="en-US"/>
           </a:p>
         </p:txBody>
       </p:sp>
@@ -299,7 +311,7 @@
           <a:p>
             <a:fld id="{5BCAD085-E8A6-8845-BD4E-CB4CCA059FC4}" type="datetimeFigureOut">
               <a:rPr lang="en-US" smtClean="0"/>
-              <a:t>1/27/13</a:t>
+              <a:t>9/15/2026</a:t>
             </a:fld>
             <a:endParaRPr lang="en-US"/>
           </a:p>
@@ -393,10 +405,9 @@
           <a:lstStyle/>
           <a:p>
             <a:r>
-              <a:rPr lang="en-US" smtClean="0"/>
+              <a:rPr lang="en-US"/>
               <a:t>Click to edit Master title style</a:t>
             </a:r>
-            <a:endParaRPr lang="en-US"/>
           </a:p>
         </p:txBody>
       </p:sp>
@@ -417,38 +428,37 @@
           <a:p>
             <a:pPr lvl="0"/>
             <a:r>
-              <a:rPr lang="en-US" smtClean="0"/>
+              <a:rPr lang="en-US"/>
               <a:t>Click to edit Master text styles</a:t>
             </a:r>
           </a:p>
           <a:p>
             <a:pPr lvl="1"/>
             <a:r>
-              <a:rPr lang="en-US" smtClean="0"/>
+              <a:rPr lang="en-US"/>
               <a:t>Second level</a:t>
             </a:r>
           </a:p>
           <a:p>
             <a:pPr lvl="2"/>
             <a:r>
-              <a:rPr lang="en-US" smtClean="0"/>
+              <a:rPr lang="en-US"/>
               <a:t>Third level</a:t>
             </a:r>
           </a:p>
           <a:p>
             <a:pPr lvl="3"/>
             <a:r>
-              <a:rPr lang="en-US" smtClean="0"/>
+              <a:rPr lang="en-US"/>
               <a:t>Fourth level</a:t>
             </a:r>
           </a:p>
           <a:p>
             <a:pPr lvl="4"/>
             <a:r>
-              <a:rPr lang="en-US" smtClean="0"/>
+              <a:rPr lang="en-US"/>
               <a:t>Fifth level</a:t>
             </a:r>
-            <a:endParaRPr lang="en-US"/>
           </a:p>
         </p:txBody>
       </p:sp>
@@ -469,7 +479,7 @@
           <a:p>
             <a:fld id="{5BCAD085-E8A6-8845-BD4E-CB4CCA059FC4}" type="datetimeFigureOut">
               <a:rPr lang="en-US" smtClean="0"/>
-              <a:t>1/27/13</a:t>
+              <a:t>9/15/2026</a:t>
             </a:fld>
             <a:endParaRPr lang="en-US"/>
           </a:p>
@@ -568,10 +578,9 @@
           <a:lstStyle/>
           <a:p>
             <a:r>
-              <a:rPr lang="en-US" smtClean="0"/>
+              <a:rPr lang="en-US"/>
               <a:t>Click to edit Master title style</a:t>
             </a:r>
-            <a:endParaRPr lang="en-US"/>
           </a:p>
         </p:txBody>
       </p:sp>
@@ -597,38 +606,37 @@
           <a:p>
             <a:pPr lvl="0"/>
             <a:r>
-              <a:rPr lang="en-US" smtClean="0"/>
+              <a:rPr lang="en-US"/>
               <a:t>Click to edit Master text styles</a:t>
             </a:r>
           </a:p>
           <a:p>
             <a:pPr lvl="1"/>
             <a:r>
-              <a:rPr lang="en-US" smtClean="0"/>
+              <a:rPr lang="en-US"/>
               <a:t>Second level</a:t>
             </a:r>
           </a:p>
           <a:p>
             <a:pPr lvl="2"/>
             <a:r>
-              <a:rPr lang="en-US" smtClean="0"/>
+              <a:rPr lang="en-US"/>
               <a:t>Third level</a:t>
             </a:r>
           </a:p>
           <a:p>
             <a:pPr lvl="3"/>
             <a:r>
-              <a:rPr lang="en-US" smtClean="0"/>
+              <a:rPr lang="en-US"/>
               <a:t>Fourth level</a:t>
             </a:r>
           </a:p>
           <a:p>
             <a:pPr lvl="4"/>
             <a:r>
-              <a:rPr lang="en-US" smtClean="0"/>
+              <a:rPr lang="en-US"/>
               <a:t>Fifth level</a:t>
             </a:r>
-            <a:endParaRPr lang="en-US"/>
           </a:p>
         </p:txBody>
       </p:sp>
@@ -649,7 +657,7 @@
           <a:p>
             <a:fld id="{5BCAD085-E8A6-8845-BD4E-CB4CCA059FC4}" type="datetimeFigureOut">
               <a:rPr lang="en-US" smtClean="0"/>
-              <a:t>1/27/13</a:t>
+              <a:t>9/15/2026</a:t>
             </a:fld>
             <a:endParaRPr lang="en-US"/>
           </a:p>
@@ -743,10 +751,9 @@
           <a:lstStyle/>
           <a:p>
             <a:r>
-              <a:rPr lang="en-US" smtClean="0"/>
+              <a:rPr lang="en-US"/>
               <a:t>Click to edit Master title style</a:t>
             </a:r>
-            <a:endParaRPr lang="en-US"/>
           </a:p>
         </p:txBody>
       </p:sp>
@@ -767,38 +774,37 @@
           <a:p>
             <a:pPr lvl="0"/>
             <a:r>
-              <a:rPr lang="en-US" smtClean="0"/>
+              <a:rPr lang="en-US"/>
               <a:t>Click to edit Master text styles</a:t>
             </a:r>
           </a:p>
           <a:p>
             <a:pPr lvl="1"/>
             <a:r>
-              <a:rPr lang="en-US" smtClean="0"/>
+              <a:rPr lang="en-US"/>
               <a:t>Second level</a:t>
             </a:r>
           </a:p>
           <a:p>
             <a:pPr lvl="2"/>
             <a:r>
-              <a:rPr lang="en-US" smtClean="0"/>
+              <a:rPr lang="en-US"/>
               <a:t>Third level</a:t>
             </a:r>
           </a:p>
           <a:p>
             <a:pPr lvl="3"/>
             <a:r>
-              <a:rPr lang="en-US" smtClean="0"/>
+              <a:rPr lang="en-US"/>
               <a:t>Fourth level</a:t>
             </a:r>
           </a:p>
           <a:p>
             <a:pPr lvl="4"/>
             <a:r>
-              <a:rPr lang="en-US" smtClean="0"/>
+              <a:rPr lang="en-US"/>
               <a:t>Fifth level</a:t>
             </a:r>
-            <a:endParaRPr lang="en-US"/>
           </a:p>
         </p:txBody>
       </p:sp>
@@ -819,7 +825,7 @@
           <a:p>
             <a:fld id="{5BCAD085-E8A6-8845-BD4E-CB4CCA059FC4}" type="datetimeFigureOut">
               <a:rPr lang="en-US" smtClean="0"/>
-              <a:t>1/27/13</a:t>
+              <a:t>9/15/2026</a:t>
             </a:fld>
             <a:endParaRPr lang="en-US"/>
           </a:p>
@@ -922,10 +928,9 @@
           </a:lstStyle>
           <a:p>
             <a:r>
-              <a:rPr lang="en-US" smtClean="0"/>
+              <a:rPr lang="en-US"/>
               <a:t>Click to edit Master title style</a:t>
             </a:r>
-            <a:endParaRPr lang="en-US"/>
           </a:p>
         </p:txBody>
       </p:sp>
@@ -1042,7 +1047,7 @@
           <a:p>
             <a:pPr lvl="0"/>
             <a:r>
-              <a:rPr lang="en-US" smtClean="0"/>
+              <a:rPr lang="en-US"/>
               <a:t>Click to edit Master text styles</a:t>
             </a:r>
           </a:p>
@@ -1065,7 +1070,7 @@
           <a:p>
             <a:fld id="{5BCAD085-E8A6-8845-BD4E-CB4CCA059FC4}" type="datetimeFigureOut">
               <a:rPr lang="en-US" smtClean="0"/>
-              <a:t>1/27/13</a:t>
+              <a:t>9/15/2026</a:t>
             </a:fld>
             <a:endParaRPr lang="en-US"/>
           </a:p>
@@ -1159,10 +1164,9 @@
           <a:lstStyle/>
           <a:p>
             <a:r>
-              <a:rPr lang="en-US" smtClean="0"/>
+              <a:rPr lang="en-US"/>
               <a:t>Click to edit Master title style</a:t>
             </a:r>
-            <a:endParaRPr lang="en-US"/>
           </a:p>
         </p:txBody>
       </p:sp>
@@ -1216,38 +1220,37 @@
           <a:p>
             <a:pPr lvl="0"/>
             <a:r>
-              <a:rPr lang="en-US" smtClean="0"/>
+              <a:rPr lang="en-US"/>
               <a:t>Click to edit Master text styles</a:t>
             </a:r>
           </a:p>
           <a:p>
             <a:pPr lvl="1"/>
             <a:r>
-              <a:rPr lang="en-US" smtClean="0"/>
+              <a:rPr lang="en-US"/>
               <a:t>Second level</a:t>
             </a:r>
           </a:p>
           <a:p>
             <a:pPr lvl="2"/>
             <a:r>
-              <a:rPr lang="en-US" smtClean="0"/>
+              <a:rPr lang="en-US"/>
               <a:t>Third level</a:t>
             </a:r>
           </a:p>
           <a:p>
             <a:pPr lvl="3"/>
             <a:r>
-              <a:rPr lang="en-US" smtClean="0"/>
+              <a:rPr lang="en-US"/>
               <a:t>Fourth level</a:t>
             </a:r>
           </a:p>
           <a:p>
             <a:pPr lvl="4"/>
             <a:r>
-              <a:rPr lang="en-US" smtClean="0"/>
+              <a:rPr lang="en-US"/>
               <a:t>Fifth level</a:t>
             </a:r>
-            <a:endParaRPr lang="en-US"/>
           </a:p>
         </p:txBody>
       </p:sp>
@@ -1301,38 +1304,37 @@
           <a:p>
             <a:pPr lvl="0"/>
             <a:r>
-              <a:rPr lang="en-US" smtClean="0"/>
+              <a:rPr lang="en-US"/>
               <a:t>Click to edit Master text styles</a:t>
             </a:r>
           </a:p>
           <a:p>
             <a:pPr lvl="1"/>
             <a:r>
-              <a:rPr lang="en-US" smtClean="0"/>
+              <a:rPr lang="en-US"/>
               <a:t>Second level</a:t>
             </a:r>
           </a:p>
           <a:p>
             <a:pPr lvl="2"/>
             <a:r>
-              <a:rPr lang="en-US" smtClean="0"/>
+              <a:rPr lang="en-US"/>
               <a:t>Third level</a:t>
             </a:r>
           </a:p>
           <a:p>
             <a:pPr lvl="3"/>
             <a:r>
-              <a:rPr lang="en-US" smtClean="0"/>
+              <a:rPr lang="en-US"/>
               <a:t>Fourth level</a:t>
             </a:r>
           </a:p>
           <a:p>
             <a:pPr lvl="4"/>
             <a:r>
-              <a:rPr lang="en-US" smtClean="0"/>
+              <a:rPr lang="en-US"/>
               <a:t>Fifth level</a:t>
             </a:r>
-            <a:endParaRPr lang="en-US"/>
           </a:p>
         </p:txBody>
       </p:sp>
@@ -1353,7 +1355,7 @@
           <a:p>
             <a:fld id="{5BCAD085-E8A6-8845-BD4E-CB4CCA059FC4}" type="datetimeFigureOut">
               <a:rPr lang="en-US" smtClean="0"/>
-              <a:t>1/27/13</a:t>
+              <a:t>9/15/2026</a:t>
             </a:fld>
             <a:endParaRPr lang="en-US"/>
           </a:p>
@@ -1451,10 +1453,9 @@
           </a:lstStyle>
           <a:p>
             <a:r>
-              <a:rPr lang="en-US" smtClean="0"/>
+              <a:rPr lang="en-US"/>
               <a:t>Click to edit Master title style</a:t>
             </a:r>
-            <a:endParaRPr lang="en-US"/>
           </a:p>
         </p:txBody>
       </p:sp>
@@ -1517,7 +1518,7 @@
           <a:p>
             <a:pPr lvl="0"/>
             <a:r>
-              <a:rPr lang="en-US" smtClean="0"/>
+              <a:rPr lang="en-US"/>
               <a:t>Click to edit Master text styles</a:t>
             </a:r>
           </a:p>
@@ -1573,38 +1574,37 @@
           <a:p>
             <a:pPr lvl="0"/>
             <a:r>
-              <a:rPr lang="en-US" smtClean="0"/>
+              <a:rPr lang="en-US"/>
               <a:t>Click to edit Master text styles</a:t>
             </a:r>
           </a:p>
           <a:p>
             <a:pPr lvl="1"/>
             <a:r>
-              <a:rPr lang="en-US" smtClean="0"/>
+              <a:rPr lang="en-US"/>
               <a:t>Second level</a:t>
             </a:r>
           </a:p>
           <a:p>
             <a:pPr lvl="2"/>
             <a:r>
-              <a:rPr lang="en-US" smtClean="0"/>
+              <a:rPr lang="en-US"/>
               <a:t>Third level</a:t>
             </a:r>
           </a:p>
           <a:p>
             <a:pPr lvl="3"/>
             <a:r>
-              <a:rPr lang="en-US" smtClean="0"/>
+              <a:rPr lang="en-US"/>
               <a:t>Fourth level</a:t>
             </a:r>
           </a:p>
           <a:p>
             <a:pPr lvl="4"/>
             <a:r>
-              <a:rPr lang="en-US" smtClean="0"/>
+              <a:rPr lang="en-US"/>
               <a:t>Fifth level</a:t>
             </a:r>
-            <a:endParaRPr lang="en-US"/>
           </a:p>
         </p:txBody>
       </p:sp>
@@ -1667,7 +1667,7 @@
           <a:p>
             <a:pPr lvl="0"/>
             <a:r>
-              <a:rPr lang="en-US" smtClean="0"/>
+              <a:rPr lang="en-US"/>
               <a:t>Click to edit Master text styles</a:t>
             </a:r>
           </a:p>
@@ -1723,38 +1723,37 @@
           <a:p>
             <a:pPr lvl="0"/>
             <a:r>
-              <a:rPr lang="en-US" smtClean="0"/>
+              <a:rPr lang="en-US"/>
               <a:t>Click to edit Master text styles</a:t>
             </a:r>
           </a:p>
           <a:p>
             <a:pPr lvl="1"/>
             <a:r>
-              <a:rPr lang="en-US" smtClean="0"/>
+              <a:rPr lang="en-US"/>
               <a:t>Second level</a:t>
             </a:r>
           </a:p>
           <a:p>
             <a:pPr lvl="2"/>
             <a:r>
-              <a:rPr lang="en-US" smtClean="0"/>
+              <a:rPr lang="en-US"/>
               <a:t>Third level</a:t>
             </a:r>
           </a:p>
           <a:p>
             <a:pPr lvl="3"/>
             <a:r>
-              <a:rPr lang="en-US" smtClean="0"/>
+              <a:rPr lang="en-US"/>
               <a:t>Fourth level</a:t>
             </a:r>
           </a:p>
           <a:p>
             <a:pPr lvl="4"/>
             <a:r>
-              <a:rPr lang="en-US" smtClean="0"/>
+              <a:rPr lang="en-US"/>
               <a:t>Fifth level</a:t>
             </a:r>
-            <a:endParaRPr lang="en-US"/>
           </a:p>
         </p:txBody>
       </p:sp>
@@ -1775,7 +1774,7 @@
           <a:p>
             <a:fld id="{5BCAD085-E8A6-8845-BD4E-CB4CCA059FC4}" type="datetimeFigureOut">
               <a:rPr lang="en-US" smtClean="0"/>
-              <a:t>1/27/13</a:t>
+              <a:t>9/15/2026</a:t>
             </a:fld>
             <a:endParaRPr lang="en-US"/>
           </a:p>
@@ -1869,10 +1868,9 @@
           <a:lstStyle/>
           <a:p>
             <a:r>
-              <a:rPr lang="en-US" smtClean="0"/>
+              <a:rPr lang="en-US"/>
               <a:t>Click to edit Master title style</a:t>
             </a:r>
-            <a:endParaRPr lang="en-US"/>
           </a:p>
         </p:txBody>
       </p:sp>
@@ -1893,7 +1891,7 @@
           <a:p>
             <a:fld id="{5BCAD085-E8A6-8845-BD4E-CB4CCA059FC4}" type="datetimeFigureOut">
               <a:rPr lang="en-US" smtClean="0"/>
-              <a:t>1/27/13</a:t>
+              <a:t>9/15/2026</a:t>
             </a:fld>
             <a:endParaRPr lang="en-US"/>
           </a:p>
@@ -1988,7 +1986,7 @@
           <a:p>
             <a:fld id="{5BCAD085-E8A6-8845-BD4E-CB4CCA059FC4}" type="datetimeFigureOut">
               <a:rPr lang="en-US" smtClean="0"/>
-              <a:t>1/27/13</a:t>
+              <a:t>9/15/2026</a:t>
             </a:fld>
             <a:endParaRPr lang="en-US"/>
           </a:p>
@@ -2091,10 +2089,9 @@
           </a:lstStyle>
           <a:p>
             <a:r>
-              <a:rPr lang="en-US" smtClean="0"/>
+              <a:rPr lang="en-US"/>
               <a:t>Click to edit Master title style</a:t>
             </a:r>
-            <a:endParaRPr lang="en-US"/>
           </a:p>
         </p:txBody>
       </p:sp>
@@ -2148,38 +2145,37 @@
           <a:p>
             <a:pPr lvl="0"/>
             <a:r>
-              <a:rPr lang="en-US" smtClean="0"/>
+              <a:rPr lang="en-US"/>
               <a:t>Click to edit Master text styles</a:t>
             </a:r>
           </a:p>
           <a:p>
             <a:pPr lvl="1"/>
             <a:r>
-              <a:rPr lang="en-US" smtClean="0"/>
+              <a:rPr lang="en-US"/>
               <a:t>Second level</a:t>
             </a:r>
           </a:p>
           <a:p>
             <a:pPr lvl="2"/>
             <a:r>
-              <a:rPr lang="en-US" smtClean="0"/>
+              <a:rPr lang="en-US"/>
               <a:t>Third level</a:t>
             </a:r>
           </a:p>
           <a:p>
             <a:pPr lvl="3"/>
             <a:r>
-              <a:rPr lang="en-US" smtClean="0"/>
+              <a:rPr lang="en-US"/>
               <a:t>Fourth level</a:t>
             </a:r>
           </a:p>
           <a:p>
             <a:pPr lvl="4"/>
             <a:r>
-              <a:rPr lang="en-US" smtClean="0"/>
+              <a:rPr lang="en-US"/>
               <a:t>Fifth level</a:t>
             </a:r>
-            <a:endParaRPr lang="en-US"/>
           </a:p>
         </p:txBody>
       </p:sp>
@@ -2242,7 +2238,7 @@
           <a:p>
             <a:pPr lvl="0"/>
             <a:r>
-              <a:rPr lang="en-US" smtClean="0"/>
+              <a:rPr lang="en-US"/>
               <a:t>Click to edit Master text styles</a:t>
             </a:r>
           </a:p>
@@ -2265,7 +2261,7 @@
           <a:p>
             <a:fld id="{5BCAD085-E8A6-8845-BD4E-CB4CCA059FC4}" type="datetimeFigureOut">
               <a:rPr lang="en-US" smtClean="0"/>
-              <a:t>1/27/13</a:t>
+              <a:t>9/15/2026</a:t>
             </a:fld>
             <a:endParaRPr lang="en-US"/>
           </a:p>
@@ -2368,10 +2364,9 @@
           </a:lstStyle>
           <a:p>
             <a:r>
-              <a:rPr lang="en-US" smtClean="0"/>
+              <a:rPr lang="en-US"/>
               <a:t>Click to edit Master title style</a:t>
             </a:r>
-            <a:endParaRPr lang="en-US"/>
           </a:p>
         </p:txBody>
       </p:sp>
@@ -2495,7 +2490,7 @@
           <a:p>
             <a:pPr lvl="0"/>
             <a:r>
-              <a:rPr lang="en-US" smtClean="0"/>
+              <a:rPr lang="en-US"/>
               <a:t>Click to edit Master text styles</a:t>
             </a:r>
           </a:p>
@@ -2518,7 +2513,7 @@
           <a:p>
             <a:fld id="{5BCAD085-E8A6-8845-BD4E-CB4CCA059FC4}" type="datetimeFigureOut">
               <a:rPr lang="en-US" smtClean="0"/>
-              <a:t>1/27/13</a:t>
+              <a:t>9/15/2026</a:t>
             </a:fld>
             <a:endParaRPr lang="en-US"/>
           </a:p>
@@ -2627,10 +2622,9 @@
           <a:lstStyle/>
           <a:p>
             <a:r>
-              <a:rPr lang="en-US" smtClean="0"/>
+              <a:rPr lang="en-US"/>
               <a:t>Click to edit Master title style</a:t>
             </a:r>
-            <a:endParaRPr lang="en-US"/>
           </a:p>
         </p:txBody>
       </p:sp>
@@ -2661,38 +2655,37 @@
           <a:p>
             <a:pPr lvl="0"/>
             <a:r>
-              <a:rPr lang="en-US" smtClean="0"/>
+              <a:rPr lang="en-US"/>
               <a:t>Click to edit Master text styles</a:t>
             </a:r>
           </a:p>
           <a:p>
             <a:pPr lvl="1"/>
             <a:r>
-              <a:rPr lang="en-US" smtClean="0"/>
+              <a:rPr lang="en-US"/>
               <a:t>Second level</a:t>
             </a:r>
           </a:p>
           <a:p>
             <a:pPr lvl="2"/>
             <a:r>
-              <a:rPr lang="en-US" smtClean="0"/>
+              <a:rPr lang="en-US"/>
               <a:t>Third level</a:t>
             </a:r>
           </a:p>
           <a:p>
             <a:pPr lvl="3"/>
             <a:r>
-              <a:rPr lang="en-US" smtClean="0"/>
+              <a:rPr lang="en-US"/>
               <a:t>Fourth level</a:t>
             </a:r>
           </a:p>
           <a:p>
             <a:pPr lvl="4"/>
             <a:r>
-              <a:rPr lang="en-US" smtClean="0"/>
+              <a:rPr lang="en-US"/>
               <a:t>Fifth level</a:t>
             </a:r>
-            <a:endParaRPr lang="en-US"/>
           </a:p>
         </p:txBody>
       </p:sp>
@@ -2731,7 +2724,7 @@
           <a:p>
             <a:fld id="{5BCAD085-E8A6-8845-BD4E-CB4CCA059FC4}" type="datetimeFigureOut">
               <a:rPr lang="en-US" smtClean="0"/>
-              <a:t>1/27/13</a:t>
+              <a:t>9/15/2026</a:t>
             </a:fld>
             <a:endParaRPr lang="en-US"/>
           </a:p>
@@ -3090,7 +3083,7 @@
 </file>
 
 <file path=ppt/slides/slide1.xml><?xml version="1.0" encoding="utf-8"?>
-<p:sld xmlns:a="http://schemas.openxmlformats.org/drawingml/2006/main" xmlns:p="http://schemas.openxmlformats.org/presentationml/2006/main" xmlns:r="http://schemas.openxmlformats.org/officeDocument/2006/relationships">
+<p:sld xmlns:a="http://schemas.openxmlformats.org/drawingml/2006/main" xmlns:r="http://schemas.openxmlformats.org/officeDocument/2006/relationships" xmlns:p="http://schemas.openxmlformats.org/presentationml/2006/main">
   <p:cSld>
     <p:bg>
       <p:bgPr>
@@ -3106,7 +3099,14 @@
         <p:cNvGrpSpPr/>
         <p:nvPr/>
       </p:nvGrpSpPr>
-      <p:grpSpPr/>
+      <p:grpSpPr>
+        <a:xfrm>
+          <a:off x="0" y="0"/>
+          <a:ext cx="0" cy="0"/>
+          <a:chOff x="0" y="0"/>
+          <a:chExt cx="0" cy="0"/>
+        </a:xfrm>
+      </p:grpSpPr>
       <p:sp>
         <p:nvSpPr>
           <p:cNvPr id="2" name="Rectangle 1"/>
@@ -3147,6 +3147,7 @@
           <a:lstStyle/>
           <a:p>
             <a:pPr algn="ctr"/>
+            <a:endParaRPr/>
           </a:p>
         </p:txBody>
       </p:sp>
@@ -3159,7 +3160,7 @@
         <p:spPr>
           <a:xfrm>
             <a:off x="1097280" y="1097280"/>
-            <a:ext cx="9966960" cy="4572000"/>
+            <a:ext cx="9966960" cy="4389120"/>
           </a:xfrm>
           <a:prstGeom prst="rect">
             <a:avLst/>
@@ -3174,11 +3175,11 @@
           <a:p>
             <a:pPr>
               <a:spcAft>
-                <a:spcPts val="2000"/>
+                <a:spcPts val="1800"/>
               </a:spcAft>
-              <a:defRPr sz="1300" b="1">
-                <a:solidFill>
-                  <a:srgbClr val="323232"/>
+              <a:defRPr sz="1200" b="1">
+                <a:solidFill>
+                  <a:srgbClr val="3C3C3C"/>
                 </a:solidFill>
                 <a:latin typeface="Arial"/>
               </a:defRPr>
@@ -3190,9 +3191,9 @@
           <a:p>
             <a:pPr>
               <a:spcAft>
-                <a:spcPts val="1500"/>
+                <a:spcPts val="1400"/>
               </a:spcAft>
-              <a:defRPr sz="3200" b="1">
+              <a:defRPr sz="3000" b="1">
                 <a:solidFill>
                   <a:srgbClr val="000000"/>
                 </a:solidFill>
@@ -3206,11 +3207,11 @@
           <a:p>
             <a:pPr>
               <a:spcAft>
-                <a:spcPts val="4000"/>
+                <a:spcPts val="3600"/>
               </a:spcAft>
-              <a:defRPr sz="1600">
-                <a:solidFill>
-                  <a:srgbClr val="323232"/>
+              <a:defRPr sz="1500">
+                <a:solidFill>
+                  <a:srgbClr val="3C3C3C"/>
                 </a:solidFill>
                 <a:latin typeface="Arial"/>
               </a:defRPr>
@@ -3229,7 +3230,7 @@
         </p:nvSpPr>
         <p:spPr>
           <a:xfrm>
-            <a:off x="1097280" y="3931920"/>
+            <a:off x="1097280" y="3840480"/>
             <a:ext cx="9966960" cy="18288"/>
           </a:xfrm>
           <a:prstGeom prst="rect">
@@ -3263,6 +3264,7 @@
           <a:lstStyle/>
           <a:p>
             <a:pPr algn="ctr"/>
+            <a:endParaRPr/>
           </a:p>
         </p:txBody>
       </p:sp>
@@ -3274,8 +3276,8 @@
         </p:nvSpPr>
         <p:spPr>
           <a:xfrm>
-            <a:off x="1097280" y="4206240"/>
-            <a:ext cx="9966960" cy="1828800"/>
+            <a:off x="1097280" y="4114800"/>
+            <a:ext cx="9966960" cy="1920240"/>
           </a:xfrm>
           <a:prstGeom prst="rect">
             <a:avLst/>
@@ -3308,9 +3310,9 @@
               <a:spcAft>
                 <a:spcPts val="600"/>
               </a:spcAft>
-              <a:defRPr sz="1300">
-                <a:solidFill>
-                  <a:srgbClr val="323232"/>
+              <a:defRPr sz="1200">
+                <a:solidFill>
+                  <a:srgbClr val="3C3C3C"/>
                 </a:solidFill>
                 <a:latin typeface="Arial"/>
               </a:defRPr>
@@ -3323,7 +3325,7 @@
             <a:pPr>
               <a:defRPr sz="1200" i="1">
                 <a:solidFill>
-                  <a:srgbClr val="323232"/>
+                  <a:srgbClr val="3C3C3C"/>
                 </a:solidFill>
                 <a:latin typeface="Arial"/>
               </a:defRPr>
@@ -3343,7 +3345,7 @@
 </file>
 
 <file path=ppt/slides/slide10.xml><?xml version="1.0" encoding="utf-8"?>
-<p:sld xmlns:a="http://schemas.openxmlformats.org/drawingml/2006/main" xmlns:p="http://schemas.openxmlformats.org/presentationml/2006/main" xmlns:r="http://schemas.openxmlformats.org/officeDocument/2006/relationships">
+<p:sld xmlns:a="http://schemas.openxmlformats.org/drawingml/2006/main" xmlns:r="http://schemas.openxmlformats.org/officeDocument/2006/relationships" xmlns:p="http://schemas.openxmlformats.org/presentationml/2006/main">
   <p:cSld>
     <p:bg>
       <p:bgPr>
@@ -3359,7 +3361,14 @@
         <p:cNvGrpSpPr/>
         <p:nvPr/>
       </p:nvGrpSpPr>
-      <p:grpSpPr/>
+      <p:grpSpPr>
+        <a:xfrm>
+          <a:off x="0" y="0"/>
+          <a:ext cx="0" cy="0"/>
+          <a:chOff x="0" y="0"/>
+          <a:chExt cx="0" cy="0"/>
+        </a:xfrm>
+      </p:grpSpPr>
       <p:sp>
         <p:nvSpPr>
           <p:cNvPr id="2" name="TextBox 1"/>
@@ -3385,13 +3394,13 @@
             <a:pPr>
               <a:defRPr sz="1000" b="1">
                 <a:solidFill>
-                  <a:srgbClr val="323232"/>
-                </a:solidFill>
-                <a:latin typeface="Arial"/>
-              </a:defRPr>
-            </a:pPr>
-            <a:r>
-              <a:t>FUTURE ROADMAP &amp; MILESTONES</a:t>
+                  <a:srgbClr val="3C3C3C"/>
+                </a:solidFill>
+                <a:latin typeface="Arial"/>
+              </a:defRPr>
+            </a:pPr>
+            <a:r>
+              <a:t>ACADEMIC &amp; TECHNICAL LITERATURE</a:t>
             </a:r>
           </a:p>
         </p:txBody>
@@ -3404,8 +3413,8 @@
         </p:nvSpPr>
         <p:spPr>
           <a:xfrm>
-            <a:off x="731520" y="640080"/>
-            <a:ext cx="10698480" cy="731520"/>
+            <a:off x="731520" y="589788"/>
+            <a:ext cx="10698480" cy="685800"/>
           </a:xfrm>
           <a:prstGeom prst="rect">
             <a:avLst/>
@@ -3427,7 +3436,7 @@
               </a:defRPr>
             </a:pPr>
             <a:r>
-              <a:t>Work Plan for Next Review</a:t>
+              <a:t>References</a:t>
             </a:r>
           </a:p>
         </p:txBody>
@@ -3474,6 +3483,1615 @@
           <a:lstStyle/>
           <a:p>
             <a:pPr algn="ctr"/>
+            <a:endParaRPr/>
+          </a:p>
+        </p:txBody>
+      </p:sp>
+      <p:sp>
+        <p:nvSpPr>
+          <p:cNvPr id="5" name="Rectangle 4"/>
+          <p:cNvSpPr/>
+          <p:nvPr/>
+        </p:nvSpPr>
+        <p:spPr>
+          <a:xfrm>
+            <a:off x="731520" y="1636776"/>
+            <a:ext cx="10728655" cy="4663440"/>
+          </a:xfrm>
+          <a:prstGeom prst="rect">
+            <a:avLst/>
+          </a:prstGeom>
+          <a:solidFill>
+            <a:srgbClr val="FFFFFF"/>
+          </a:solidFill>
+          <a:ln w="12700">
+            <a:solidFill>
+              <a:srgbClr val="000000"/>
+            </a:solidFill>
+          </a:ln>
+        </p:spPr>
+        <p:style>
+          <a:lnRef idx="1">
+            <a:schemeClr val="accent1"/>
+          </a:lnRef>
+          <a:fillRef idx="3">
+            <a:schemeClr val="accent1"/>
+          </a:fillRef>
+          <a:effectRef idx="2">
+            <a:schemeClr val="accent1"/>
+          </a:effectRef>
+          <a:fontRef idx="minor">
+            <a:schemeClr val="lt1"/>
+          </a:fontRef>
+        </p:style>
+        <p:txBody>
+          <a:bodyPr rtlCol="0" anchor="ctr"/>
+          <a:lstStyle/>
+          <a:p>
+            <a:pPr algn="ctr"/>
+            <a:endParaRPr/>
+          </a:p>
+        </p:txBody>
+      </p:sp>
+      <p:sp>
+        <p:nvSpPr>
+          <p:cNvPr id="6" name="TextBox 5"/>
+          <p:cNvSpPr txBox="1"/>
+          <p:nvPr/>
+        </p:nvSpPr>
+        <p:spPr>
+          <a:xfrm>
+            <a:off x="914400" y="1783080"/>
+            <a:ext cx="10332720" cy="2164695"/>
+          </a:xfrm>
+          <a:prstGeom prst="rect">
+            <a:avLst/>
+          </a:prstGeom>
+          <a:noFill/>
+        </p:spPr>
+        <p:txBody>
+          <a:bodyPr wrap="square">
+            <a:spAutoFit/>
+          </a:bodyPr>
+          <a:lstStyle/>
+          <a:p>
+            <a:pPr>
+              <a:spcAft>
+                <a:spcPts val="800"/>
+              </a:spcAft>
+              <a:defRPr sz="1100">
+                <a:solidFill>
+                  <a:srgbClr val="3C3C3C"/>
+                </a:solidFill>
+                <a:latin typeface="Arial"/>
+              </a:defRPr>
+            </a:pPr>
+            <a:r>
+              <a:rPr dirty="0"/>
+              <a:t>[1] UN FAO, "Food Wastage Footprint: Impacts on Natural Resources," Technical Report, Rome, 2021.</a:t>
+            </a:r>
+          </a:p>
+          <a:p>
+            <a:pPr>
+              <a:spcAft>
+                <a:spcPts val="800"/>
+              </a:spcAft>
+              <a:defRPr sz="1100">
+                <a:solidFill>
+                  <a:srgbClr val="3C3C3C"/>
+                </a:solidFill>
+                <a:latin typeface="Arial"/>
+              </a:defRPr>
+            </a:pPr>
+            <a:r>
+              <a:rPr dirty="0"/>
+              <a:t>[2] M. Eriksson et al., "Food waste in educational catering: Quantities &amp; prevention," Res. </a:t>
+            </a:r>
+            <a:r>
+              <a:rPr dirty="0" err="1"/>
+              <a:t>Conserv</a:t>
+            </a:r>
+            <a:r>
+              <a:rPr dirty="0"/>
+              <a:t>. </a:t>
+            </a:r>
+            <a:r>
+              <a:rPr dirty="0" err="1"/>
+              <a:t>Recycl</a:t>
+            </a:r>
+            <a:r>
+              <a:rPr dirty="0"/>
+              <a:t>., vol. 138, pp. 245–253, 2018.</a:t>
+            </a:r>
+          </a:p>
+          <a:p>
+            <a:pPr>
+              <a:spcAft>
+                <a:spcPts val="800"/>
+              </a:spcAft>
+              <a:defRPr sz="1100">
+                <a:solidFill>
+                  <a:srgbClr val="3C3C3C"/>
+                </a:solidFill>
+                <a:latin typeface="Arial"/>
+              </a:defRPr>
+            </a:pPr>
+            <a:r>
+              <a:rPr dirty="0"/>
+              <a:t>[3] M. A. Stockle et al., "Smart Waste Audit System: IoT-Driven Waste Tracking," IEEE Access, vol. 8, pp. 112450–112462, 2020.</a:t>
+            </a:r>
+          </a:p>
+          <a:p>
+            <a:pPr>
+              <a:spcAft>
+                <a:spcPts val="800"/>
+              </a:spcAft>
+              <a:defRPr sz="1100">
+                <a:solidFill>
+                  <a:srgbClr val="3C3C3C"/>
+                </a:solidFill>
+                <a:latin typeface="Arial"/>
+              </a:defRPr>
+            </a:pPr>
+            <a:r>
+              <a:rPr dirty="0"/>
+              <a:t>[4] R. Vidal et al., "Predictive ML Modeling for Demand Forecasting in Dining Centers," J. Clean. Prod., vol. 294, p. 126201, 2021.</a:t>
+            </a:r>
+          </a:p>
+          <a:p>
+            <a:pPr>
+              <a:spcAft>
+                <a:spcPts val="800"/>
+              </a:spcAft>
+              <a:defRPr sz="1100">
+                <a:solidFill>
+                  <a:srgbClr val="3C3C3C"/>
+                </a:solidFill>
+                <a:latin typeface="Arial"/>
+              </a:defRPr>
+            </a:pPr>
+            <a:r>
+              <a:rPr dirty="0"/>
+              <a:t>[5] P. Gaur et al., "Comparative Evaluation of ML Algorithms for Food Demand Forecasting," SN Appl. Sci., vol. 4, no. 6, pp. 1–14, 2022.</a:t>
+            </a:r>
+          </a:p>
+          <a:p>
+            <a:pPr>
+              <a:spcAft>
+                <a:spcPts val="800"/>
+              </a:spcAft>
+              <a:defRPr sz="1100">
+                <a:solidFill>
+                  <a:srgbClr val="3C3C3C"/>
+                </a:solidFill>
+                <a:latin typeface="Arial"/>
+              </a:defRPr>
+            </a:pPr>
+            <a:r>
+              <a:rPr dirty="0"/>
+              <a:t>[6] L. </a:t>
+            </a:r>
+            <a:r>
+              <a:rPr dirty="0" err="1"/>
+              <a:t>Breiman</a:t>
+            </a:r>
+            <a:r>
+              <a:rPr dirty="0"/>
+              <a:t>, "Random Forests," Machine Learning, vol. 45, no. 1, pp. 5–32, 200</a:t>
+            </a:r>
+            <a:r>
+              <a:rPr lang="en-US" dirty="0"/>
+              <a:t>7</a:t>
+            </a:r>
+            <a:r>
+              <a:rPr dirty="0"/>
+              <a:t>.</a:t>
+            </a:r>
+          </a:p>
+          <a:p>
+            <a:pPr>
+              <a:spcAft>
+                <a:spcPts val="800"/>
+              </a:spcAft>
+              <a:defRPr sz="1100">
+                <a:solidFill>
+                  <a:srgbClr val="3C3C3C"/>
+                </a:solidFill>
+                <a:latin typeface="Arial"/>
+              </a:defRPr>
+            </a:pPr>
+            <a:r>
+              <a:rPr dirty="0"/>
+              <a:t>[7] Google Developers, "Jetpack Compose &amp; Android Architecture Components Documentation," Google LLC, 2024.</a:t>
+            </a:r>
+          </a:p>
+          <a:p>
+            <a:pPr>
+              <a:spcAft>
+                <a:spcPts val="800"/>
+              </a:spcAft>
+              <a:defRPr sz="1100">
+                <a:solidFill>
+                  <a:srgbClr val="3C3C3C"/>
+                </a:solidFill>
+                <a:latin typeface="Arial"/>
+              </a:defRPr>
+            </a:pPr>
+            <a:r>
+              <a:rPr dirty="0"/>
+              <a:t>[8] Google Developers, "Android Room Persistence Library Guide," Google LLC, 2024. [Online]. Available: https://developer.android.com/training/data-storage/room</a:t>
+            </a:r>
+          </a:p>
+        </p:txBody>
+      </p:sp>
+    </p:spTree>
+  </p:cSld>
+  <p:clrMapOvr>
+    <a:masterClrMapping/>
+  </p:clrMapOvr>
+</p:sld>
+</file>
+
+<file path=ppt/slides/slide2.xml><?xml version="1.0" encoding="utf-8"?>
+<p:sld xmlns:a="http://schemas.openxmlformats.org/drawingml/2006/main" xmlns:r="http://schemas.openxmlformats.org/officeDocument/2006/relationships" xmlns:p="http://schemas.openxmlformats.org/presentationml/2006/main">
+  <p:cSld>
+    <p:bg>
+      <p:bgPr>
+        <a:solidFill>
+          <a:srgbClr val="FFFFFF"/>
+        </a:solidFill>
+        <a:effectLst/>
+      </p:bgPr>
+    </p:bg>
+    <p:spTree>
+      <p:nvGrpSpPr>
+        <p:cNvPr id="1" name=""/>
+        <p:cNvGrpSpPr/>
+        <p:nvPr/>
+      </p:nvGrpSpPr>
+      <p:grpSpPr>
+        <a:xfrm>
+          <a:off x="0" y="0"/>
+          <a:ext cx="0" cy="0"/>
+          <a:chOff x="0" y="0"/>
+          <a:chExt cx="0" cy="0"/>
+        </a:xfrm>
+      </p:grpSpPr>
+      <p:sp>
+        <p:nvSpPr>
+          <p:cNvPr id="2" name="TextBox 1"/>
+          <p:cNvSpPr txBox="1"/>
+          <p:nvPr/>
+        </p:nvSpPr>
+        <p:spPr>
+          <a:xfrm>
+            <a:off x="731520" y="365760"/>
+            <a:ext cx="10515600" cy="320040"/>
+          </a:xfrm>
+          <a:prstGeom prst="rect">
+            <a:avLst/>
+          </a:prstGeom>
+          <a:noFill/>
+        </p:spPr>
+        <p:txBody>
+          <a:bodyPr wrap="square">
+            <a:spAutoFit/>
+          </a:bodyPr>
+          <a:lstStyle/>
+          <a:p>
+            <a:pPr>
+              <a:defRPr sz="1000" b="1">
+                <a:solidFill>
+                  <a:srgbClr val="3C3C3C"/>
+                </a:solidFill>
+                <a:latin typeface="Arial"/>
+              </a:defRPr>
+            </a:pPr>
+            <a:r>
+              <a:t>BACKGROUND &amp; MOTIVATION</a:t>
+            </a:r>
+          </a:p>
+        </p:txBody>
+      </p:sp>
+      <p:sp>
+        <p:nvSpPr>
+          <p:cNvPr id="3" name="TextBox 2"/>
+          <p:cNvSpPr txBox="1"/>
+          <p:nvPr/>
+        </p:nvSpPr>
+        <p:spPr>
+          <a:xfrm>
+            <a:off x="731520" y="640080"/>
+            <a:ext cx="10698480" cy="685800"/>
+          </a:xfrm>
+          <a:prstGeom prst="rect">
+            <a:avLst/>
+          </a:prstGeom>
+          <a:noFill/>
+        </p:spPr>
+        <p:txBody>
+          <a:bodyPr wrap="square">
+            <a:spAutoFit/>
+          </a:bodyPr>
+          <a:lstStyle/>
+          <a:p>
+            <a:pPr>
+              <a:defRPr sz="2400" b="1">
+                <a:solidFill>
+                  <a:srgbClr val="000000"/>
+                </a:solidFill>
+                <a:latin typeface="Arial"/>
+              </a:defRPr>
+            </a:pPr>
+            <a:r>
+              <a:t>Introduction &amp; Problem Statement</a:t>
+            </a:r>
+          </a:p>
+        </p:txBody>
+      </p:sp>
+      <p:sp>
+        <p:nvSpPr>
+          <p:cNvPr id="4" name="Rectangle 3"/>
+          <p:cNvSpPr/>
+          <p:nvPr/>
+        </p:nvSpPr>
+        <p:spPr>
+          <a:xfrm>
+            <a:off x="731520" y="1371600"/>
+            <a:ext cx="10728655" cy="18288"/>
+          </a:xfrm>
+          <a:prstGeom prst="rect">
+            <a:avLst/>
+          </a:prstGeom>
+          <a:solidFill>
+            <a:srgbClr val="000000"/>
+          </a:solidFill>
+          <a:ln>
+            <a:solidFill>
+              <a:srgbClr val="000000"/>
+            </a:solidFill>
+          </a:ln>
+        </p:spPr>
+        <p:style>
+          <a:lnRef idx="1">
+            <a:schemeClr val="accent1"/>
+          </a:lnRef>
+          <a:fillRef idx="3">
+            <a:schemeClr val="accent1"/>
+          </a:fillRef>
+          <a:effectRef idx="2">
+            <a:schemeClr val="accent1"/>
+          </a:effectRef>
+          <a:fontRef idx="minor">
+            <a:schemeClr val="lt1"/>
+          </a:fontRef>
+        </p:style>
+        <p:txBody>
+          <a:bodyPr rtlCol="0" anchor="ctr"/>
+          <a:lstStyle/>
+          <a:p>
+            <a:pPr algn="ctr"/>
+            <a:endParaRPr/>
+          </a:p>
+        </p:txBody>
+      </p:sp>
+      <p:sp>
+        <p:nvSpPr>
+          <p:cNvPr id="5" name="Rectangle 4"/>
+          <p:cNvSpPr/>
+          <p:nvPr/>
+        </p:nvSpPr>
+        <p:spPr>
+          <a:xfrm>
+            <a:off x="731520" y="1645920"/>
+            <a:ext cx="5212080" cy="4663440"/>
+          </a:xfrm>
+          <a:prstGeom prst="rect">
+            <a:avLst/>
+          </a:prstGeom>
+          <a:solidFill>
+            <a:srgbClr val="FFFFFF"/>
+          </a:solidFill>
+          <a:ln w="12700">
+            <a:solidFill>
+              <a:srgbClr val="000000"/>
+            </a:solidFill>
+          </a:ln>
+        </p:spPr>
+        <p:style>
+          <a:lnRef idx="1">
+            <a:schemeClr val="accent1"/>
+          </a:lnRef>
+          <a:fillRef idx="3">
+            <a:schemeClr val="accent1"/>
+          </a:fillRef>
+          <a:effectRef idx="2">
+            <a:schemeClr val="accent1"/>
+          </a:effectRef>
+          <a:fontRef idx="minor">
+            <a:schemeClr val="lt1"/>
+          </a:fontRef>
+        </p:style>
+        <p:txBody>
+          <a:bodyPr rtlCol="0" anchor="ctr"/>
+          <a:lstStyle/>
+          <a:p>
+            <a:pPr algn="ctr"/>
+            <a:endParaRPr/>
+          </a:p>
+        </p:txBody>
+      </p:sp>
+      <p:sp>
+        <p:nvSpPr>
+          <p:cNvPr id="6" name="TextBox 5"/>
+          <p:cNvSpPr txBox="1"/>
+          <p:nvPr/>
+        </p:nvSpPr>
+        <p:spPr>
+          <a:xfrm>
+            <a:off x="914400" y="1783080"/>
+            <a:ext cx="4846320" cy="4389120"/>
+          </a:xfrm>
+          <a:prstGeom prst="rect">
+            <a:avLst/>
+          </a:prstGeom>
+          <a:noFill/>
+        </p:spPr>
+        <p:txBody>
+          <a:bodyPr wrap="square">
+            <a:spAutoFit/>
+          </a:bodyPr>
+          <a:lstStyle/>
+          <a:p>
+            <a:pPr>
+              <a:spcAft>
+                <a:spcPts val="1200"/>
+              </a:spcAft>
+              <a:defRPr sz="1800" b="1">
+                <a:solidFill>
+                  <a:srgbClr val="000000"/>
+                </a:solidFill>
+                <a:latin typeface="Arial"/>
+              </a:defRPr>
+            </a:pPr>
+            <a:r>
+              <a:t>Introduction</a:t>
+            </a:r>
+          </a:p>
+          <a:p>
+            <a:pPr>
+              <a:spcAft>
+                <a:spcPts val="900"/>
+              </a:spcAft>
+              <a:defRPr sz="1150">
+                <a:solidFill>
+                  <a:srgbClr val="3C3C3C"/>
+                </a:solidFill>
+                <a:latin typeface="Arial"/>
+              </a:defRPr>
+            </a:pPr>
+            <a:r>
+              <a:t>• Global Food Crisis: Over 1.3 billion tons of food is wasted annually worldwide (UN FAO).</a:t>
+            </a:r>
+          </a:p>
+          <a:p>
+            <a:pPr>
+              <a:spcAft>
+                <a:spcPts val="900"/>
+              </a:spcAft>
+              <a:defRPr sz="1150">
+                <a:solidFill>
+                  <a:srgbClr val="3C3C3C"/>
+                </a:solidFill>
+                <a:latin typeface="Arial"/>
+              </a:defRPr>
+            </a:pPr>
+            <a:r>
+              <a:t>• Canteen Surplus: Institutional cafeterias produce 20% to 35% surplus food waste daily.</a:t>
+            </a:r>
+          </a:p>
+          <a:p>
+            <a:pPr>
+              <a:spcAft>
+                <a:spcPts val="900"/>
+              </a:spcAft>
+              <a:defRPr sz="1150">
+                <a:solidFill>
+                  <a:srgbClr val="3C3C3C"/>
+                </a:solidFill>
+                <a:latin typeface="Arial"/>
+              </a:defRPr>
+            </a:pPr>
+            <a:r>
+              <a:t>• Environmental Impact: Organic landfill waste produces high methane emissions driving climate change.</a:t>
+            </a:r>
+          </a:p>
+          <a:p>
+            <a:pPr>
+              <a:spcAft>
+                <a:spcPts val="900"/>
+              </a:spcAft>
+              <a:defRPr sz="1150">
+                <a:solidFill>
+                  <a:srgbClr val="3C3C3C"/>
+                </a:solidFill>
+                <a:latin typeface="Arial"/>
+              </a:defRPr>
+            </a:pPr>
+            <a:r>
+              <a:t>• Economic Loss: Kitchen managers suffer continuous financial losses from over-preparation.</a:t>
+            </a:r>
+          </a:p>
+          <a:p>
+            <a:pPr>
+              <a:spcAft>
+                <a:spcPts val="900"/>
+              </a:spcAft>
+              <a:defRPr sz="1150">
+                <a:solidFill>
+                  <a:srgbClr val="3C3C3C"/>
+                </a:solidFill>
+                <a:latin typeface="Arial"/>
+              </a:defRPr>
+            </a:pPr>
+            <a:r>
+              <a:t>• AI Opportunity: Machine learning can accurately forecast meal demand prior to cooking.</a:t>
+            </a:r>
+          </a:p>
+        </p:txBody>
+      </p:sp>
+      <p:sp>
+        <p:nvSpPr>
+          <p:cNvPr id="7" name="Rectangle 6"/>
+          <p:cNvSpPr/>
+          <p:nvPr/>
+        </p:nvSpPr>
+        <p:spPr>
+          <a:xfrm>
+            <a:off x="6248095" y="1645920"/>
+            <a:ext cx="5212080" cy="4663440"/>
+          </a:xfrm>
+          <a:prstGeom prst="rect">
+            <a:avLst/>
+          </a:prstGeom>
+          <a:solidFill>
+            <a:srgbClr val="FFFFFF"/>
+          </a:solidFill>
+          <a:ln w="12700">
+            <a:solidFill>
+              <a:srgbClr val="000000"/>
+            </a:solidFill>
+          </a:ln>
+        </p:spPr>
+        <p:style>
+          <a:lnRef idx="1">
+            <a:schemeClr val="accent1"/>
+          </a:lnRef>
+          <a:fillRef idx="3">
+            <a:schemeClr val="accent1"/>
+          </a:fillRef>
+          <a:effectRef idx="2">
+            <a:schemeClr val="accent1"/>
+          </a:effectRef>
+          <a:fontRef idx="minor">
+            <a:schemeClr val="lt1"/>
+          </a:fontRef>
+        </p:style>
+        <p:txBody>
+          <a:bodyPr rtlCol="0" anchor="ctr"/>
+          <a:lstStyle/>
+          <a:p>
+            <a:pPr algn="ctr"/>
+            <a:endParaRPr/>
+          </a:p>
+        </p:txBody>
+      </p:sp>
+      <p:sp>
+        <p:nvSpPr>
+          <p:cNvPr id="8" name="TextBox 7"/>
+          <p:cNvSpPr txBox="1"/>
+          <p:nvPr/>
+        </p:nvSpPr>
+        <p:spPr>
+          <a:xfrm>
+            <a:off x="6430975" y="1783080"/>
+            <a:ext cx="4846320" cy="4389120"/>
+          </a:xfrm>
+          <a:prstGeom prst="rect">
+            <a:avLst/>
+          </a:prstGeom>
+          <a:noFill/>
+        </p:spPr>
+        <p:txBody>
+          <a:bodyPr wrap="square">
+            <a:spAutoFit/>
+          </a:bodyPr>
+          <a:lstStyle/>
+          <a:p>
+            <a:pPr>
+              <a:spcAft>
+                <a:spcPts val="1200"/>
+              </a:spcAft>
+              <a:defRPr sz="1800" b="1">
+                <a:solidFill>
+                  <a:srgbClr val="000000"/>
+                </a:solidFill>
+                <a:latin typeface="Arial"/>
+              </a:defRPr>
+            </a:pPr>
+            <a:r>
+              <a:t>Problem Statement</a:t>
+            </a:r>
+          </a:p>
+          <a:p>
+            <a:pPr>
+              <a:spcAft>
+                <a:spcPts val="900"/>
+              </a:spcAft>
+              <a:defRPr sz="1150">
+                <a:solidFill>
+                  <a:srgbClr val="3C3C3C"/>
+                </a:solidFill>
+                <a:latin typeface="Arial"/>
+              </a:defRPr>
+            </a:pPr>
+            <a:r>
+              <a:t>• Unpredictable Attendance: Customer headcount fluctuates with exams, weather, weekends &amp; events.</a:t>
+            </a:r>
+          </a:p>
+          <a:p>
+            <a:pPr>
+              <a:spcAft>
+                <a:spcPts val="900"/>
+              </a:spcAft>
+              <a:defRPr sz="1150">
+                <a:solidFill>
+                  <a:srgbClr val="3C3C3C"/>
+                </a:solidFill>
+                <a:latin typeface="Arial"/>
+              </a:defRPr>
+            </a:pPr>
+            <a:r>
+              <a:t>• Manual Guesswork: Chefs rely on static rule-of-thumb ratios rather than predictive analytics.</a:t>
+            </a:r>
+          </a:p>
+          <a:p>
+            <a:pPr>
+              <a:spcAft>
+                <a:spcPts val="900"/>
+              </a:spcAft>
+              <a:defRPr sz="1150">
+                <a:solidFill>
+                  <a:srgbClr val="3C3C3C"/>
+                </a:solidFill>
+                <a:latin typeface="Arial"/>
+              </a:defRPr>
+            </a:pPr>
+            <a:r>
+              <a:t>• Retrospective Audits: Post-dining food weighing cannot prevent over-cooking before it happens.</a:t>
+            </a:r>
+          </a:p>
+          <a:p>
+            <a:pPr>
+              <a:spcAft>
+                <a:spcPts val="900"/>
+              </a:spcAft>
+              <a:defRPr sz="1150">
+                <a:solidFill>
+                  <a:srgbClr val="3C3C3C"/>
+                </a:solidFill>
+                <a:latin typeface="Arial"/>
+              </a:defRPr>
+            </a:pPr>
+            <a:r>
+              <a:t>• Isolated Variables: Existing solutions ignore combined contextual parameters (rain, occupancy, menus).</a:t>
+            </a:r>
+          </a:p>
+          <a:p>
+            <a:pPr>
+              <a:spcAft>
+                <a:spcPts val="900"/>
+              </a:spcAft>
+              <a:defRPr sz="1150">
+                <a:solidFill>
+                  <a:srgbClr val="3C3C3C"/>
+                </a:solidFill>
+                <a:latin typeface="Arial"/>
+              </a:defRPr>
+            </a:pPr>
+            <a:r>
+              <a:t>• Target Goal: An on-device mobile AI system to forecast prep quantities and alert waste risks proactively.</a:t>
+            </a:r>
+          </a:p>
+        </p:txBody>
+      </p:sp>
+    </p:spTree>
+  </p:cSld>
+  <p:clrMapOvr>
+    <a:masterClrMapping/>
+  </p:clrMapOvr>
+</p:sld>
+</file>
+
+<file path=ppt/slides/slide3.xml><?xml version="1.0" encoding="utf-8"?>
+<p:sld xmlns:a="http://schemas.openxmlformats.org/drawingml/2006/main" xmlns:r="http://schemas.openxmlformats.org/officeDocument/2006/relationships" xmlns:p="http://schemas.openxmlformats.org/presentationml/2006/main">
+  <p:cSld>
+    <p:bg>
+      <p:bgPr>
+        <a:solidFill>
+          <a:srgbClr val="FFFFFF"/>
+        </a:solidFill>
+        <a:effectLst/>
+      </p:bgPr>
+    </p:bg>
+    <p:spTree>
+      <p:nvGrpSpPr>
+        <p:cNvPr id="1" name=""/>
+        <p:cNvGrpSpPr/>
+        <p:nvPr/>
+      </p:nvGrpSpPr>
+      <p:grpSpPr>
+        <a:xfrm>
+          <a:off x="0" y="0"/>
+          <a:ext cx="0" cy="0"/>
+          <a:chOff x="0" y="0"/>
+          <a:chExt cx="0" cy="0"/>
+        </a:xfrm>
+      </p:grpSpPr>
+      <p:sp>
+        <p:nvSpPr>
+          <p:cNvPr id="2" name="TextBox 1"/>
+          <p:cNvSpPr txBox="1"/>
+          <p:nvPr/>
+        </p:nvSpPr>
+        <p:spPr>
+          <a:xfrm>
+            <a:off x="731520" y="365760"/>
+            <a:ext cx="10515600" cy="320040"/>
+          </a:xfrm>
+          <a:prstGeom prst="rect">
+            <a:avLst/>
+          </a:prstGeom>
+          <a:noFill/>
+        </p:spPr>
+        <p:txBody>
+          <a:bodyPr wrap="square">
+            <a:spAutoFit/>
+          </a:bodyPr>
+          <a:lstStyle/>
+          <a:p>
+            <a:pPr>
+              <a:defRPr sz="1000" b="1">
+                <a:solidFill>
+                  <a:srgbClr val="3C3C3C"/>
+                </a:solidFill>
+                <a:latin typeface="Arial"/>
+              </a:defRPr>
+            </a:pPr>
+            <a:r>
+              <a:t>PROJECT GOALS &amp; SCOPE</a:t>
+            </a:r>
+          </a:p>
+        </p:txBody>
+      </p:sp>
+      <p:sp>
+        <p:nvSpPr>
+          <p:cNvPr id="3" name="TextBox 2"/>
+          <p:cNvSpPr txBox="1"/>
+          <p:nvPr/>
+        </p:nvSpPr>
+        <p:spPr>
+          <a:xfrm>
+            <a:off x="731520" y="640080"/>
+            <a:ext cx="10698480" cy="685800"/>
+          </a:xfrm>
+          <a:prstGeom prst="rect">
+            <a:avLst/>
+          </a:prstGeom>
+          <a:noFill/>
+        </p:spPr>
+        <p:txBody>
+          <a:bodyPr wrap="square">
+            <a:spAutoFit/>
+          </a:bodyPr>
+          <a:lstStyle/>
+          <a:p>
+            <a:pPr>
+              <a:defRPr sz="2400" b="1">
+                <a:solidFill>
+                  <a:srgbClr val="000000"/>
+                </a:solidFill>
+                <a:latin typeface="Arial"/>
+              </a:defRPr>
+            </a:pPr>
+            <a:r>
+              <a:t>Objectives</a:t>
+            </a:r>
+          </a:p>
+        </p:txBody>
+      </p:sp>
+      <p:sp>
+        <p:nvSpPr>
+          <p:cNvPr id="4" name="Rectangle 3"/>
+          <p:cNvSpPr/>
+          <p:nvPr/>
+        </p:nvSpPr>
+        <p:spPr>
+          <a:xfrm>
+            <a:off x="731520" y="1371600"/>
+            <a:ext cx="10728655" cy="18288"/>
+          </a:xfrm>
+          <a:prstGeom prst="rect">
+            <a:avLst/>
+          </a:prstGeom>
+          <a:solidFill>
+            <a:srgbClr val="000000"/>
+          </a:solidFill>
+          <a:ln>
+            <a:solidFill>
+              <a:srgbClr val="000000"/>
+            </a:solidFill>
+          </a:ln>
+        </p:spPr>
+        <p:style>
+          <a:lnRef idx="1">
+            <a:schemeClr val="accent1"/>
+          </a:lnRef>
+          <a:fillRef idx="3">
+            <a:schemeClr val="accent1"/>
+          </a:fillRef>
+          <a:effectRef idx="2">
+            <a:schemeClr val="accent1"/>
+          </a:effectRef>
+          <a:fontRef idx="minor">
+            <a:schemeClr val="lt1"/>
+          </a:fontRef>
+        </p:style>
+        <p:txBody>
+          <a:bodyPr rtlCol="0" anchor="ctr"/>
+          <a:lstStyle/>
+          <a:p>
+            <a:pPr algn="ctr"/>
+            <a:endParaRPr/>
+          </a:p>
+        </p:txBody>
+      </p:sp>
+      <p:sp>
+        <p:nvSpPr>
+          <p:cNvPr id="5" name="Rectangle 4"/>
+          <p:cNvSpPr/>
+          <p:nvPr/>
+        </p:nvSpPr>
+        <p:spPr>
+          <a:xfrm>
+            <a:off x="731520" y="1645920"/>
+            <a:ext cx="5257800" cy="1389888"/>
+          </a:xfrm>
+          <a:prstGeom prst="rect">
+            <a:avLst/>
+          </a:prstGeom>
+          <a:solidFill>
+            <a:srgbClr val="FFFFFF"/>
+          </a:solidFill>
+          <a:ln w="12700">
+            <a:solidFill>
+              <a:srgbClr val="000000"/>
+            </a:solidFill>
+          </a:ln>
+        </p:spPr>
+        <p:style>
+          <a:lnRef idx="1">
+            <a:schemeClr val="accent1"/>
+          </a:lnRef>
+          <a:fillRef idx="3">
+            <a:schemeClr val="accent1"/>
+          </a:fillRef>
+          <a:effectRef idx="2">
+            <a:schemeClr val="accent1"/>
+          </a:effectRef>
+          <a:fontRef idx="minor">
+            <a:schemeClr val="lt1"/>
+          </a:fontRef>
+        </p:style>
+        <p:txBody>
+          <a:bodyPr rtlCol="0" anchor="ctr"/>
+          <a:lstStyle/>
+          <a:p>
+            <a:pPr algn="ctr"/>
+            <a:endParaRPr/>
+          </a:p>
+        </p:txBody>
+      </p:sp>
+      <p:sp>
+        <p:nvSpPr>
+          <p:cNvPr id="6" name="TextBox 5"/>
+          <p:cNvSpPr txBox="1"/>
+          <p:nvPr/>
+        </p:nvSpPr>
+        <p:spPr>
+          <a:xfrm>
+            <a:off x="896112" y="1755648"/>
+            <a:ext cx="4928616" cy="1170432"/>
+          </a:xfrm>
+          <a:prstGeom prst="rect">
+            <a:avLst/>
+          </a:prstGeom>
+          <a:noFill/>
+        </p:spPr>
+        <p:txBody>
+          <a:bodyPr wrap="square">
+            <a:spAutoFit/>
+          </a:bodyPr>
+          <a:lstStyle/>
+          <a:p>
+            <a:pPr>
+              <a:spcAft>
+                <a:spcPts val="400"/>
+              </a:spcAft>
+              <a:defRPr sz="1300" b="1">
+                <a:solidFill>
+                  <a:srgbClr val="000000"/>
+                </a:solidFill>
+                <a:latin typeface="Arial"/>
+              </a:defRPr>
+            </a:pPr>
+            <a:r>
+              <a:t>Obj 1: Demand &amp; Waste Forecasting</a:t>
+            </a:r>
+          </a:p>
+          <a:p>
+            <a:pPr>
+              <a:defRPr sz="1100">
+                <a:solidFill>
+                  <a:srgbClr val="3C3C3C"/>
+                </a:solidFill>
+                <a:latin typeface="Arial"/>
+              </a:defRPr>
+            </a:pPr>
+            <a:r>
+              <a:t>Develop supervised regression models (Ridge, CART, Random Forest) to predict daily consumption &amp; waste.</a:t>
+            </a:r>
+          </a:p>
+        </p:txBody>
+      </p:sp>
+      <p:sp>
+        <p:nvSpPr>
+          <p:cNvPr id="7" name="Rectangle 6"/>
+          <p:cNvSpPr/>
+          <p:nvPr/>
+        </p:nvSpPr>
+        <p:spPr>
+          <a:xfrm>
+            <a:off x="6172200" y="1645920"/>
+            <a:ext cx="5257800" cy="1389888"/>
+          </a:xfrm>
+          <a:prstGeom prst="rect">
+            <a:avLst/>
+          </a:prstGeom>
+          <a:solidFill>
+            <a:srgbClr val="FFFFFF"/>
+          </a:solidFill>
+          <a:ln w="12700">
+            <a:solidFill>
+              <a:srgbClr val="000000"/>
+            </a:solidFill>
+          </a:ln>
+        </p:spPr>
+        <p:style>
+          <a:lnRef idx="1">
+            <a:schemeClr val="accent1"/>
+          </a:lnRef>
+          <a:fillRef idx="3">
+            <a:schemeClr val="accent1"/>
+          </a:fillRef>
+          <a:effectRef idx="2">
+            <a:schemeClr val="accent1"/>
+          </a:effectRef>
+          <a:fontRef idx="minor">
+            <a:schemeClr val="lt1"/>
+          </a:fontRef>
+        </p:style>
+        <p:txBody>
+          <a:bodyPr rtlCol="0" anchor="ctr"/>
+          <a:lstStyle/>
+          <a:p>
+            <a:pPr algn="ctr"/>
+            <a:endParaRPr/>
+          </a:p>
+        </p:txBody>
+      </p:sp>
+      <p:sp>
+        <p:nvSpPr>
+          <p:cNvPr id="8" name="TextBox 7"/>
+          <p:cNvSpPr txBox="1"/>
+          <p:nvPr/>
+        </p:nvSpPr>
+        <p:spPr>
+          <a:xfrm>
+            <a:off x="6336792" y="1755648"/>
+            <a:ext cx="4928616" cy="1170432"/>
+          </a:xfrm>
+          <a:prstGeom prst="rect">
+            <a:avLst/>
+          </a:prstGeom>
+          <a:noFill/>
+        </p:spPr>
+        <p:txBody>
+          <a:bodyPr wrap="square">
+            <a:spAutoFit/>
+          </a:bodyPr>
+          <a:lstStyle/>
+          <a:p>
+            <a:pPr>
+              <a:spcAft>
+                <a:spcPts val="400"/>
+              </a:spcAft>
+              <a:defRPr sz="1300" b="1">
+                <a:solidFill>
+                  <a:srgbClr val="000000"/>
+                </a:solidFill>
+                <a:latin typeface="Arial"/>
+              </a:defRPr>
+            </a:pPr>
+            <a:r>
+              <a:t>Obj 2: 26-Factor Feature Engineering</a:t>
+            </a:r>
+          </a:p>
+          <a:p>
+            <a:pPr>
+              <a:defRPr sz="1100">
+                <a:solidFill>
+                  <a:srgbClr val="3C3C3C"/>
+                </a:solidFill>
+                <a:latin typeface="Arial"/>
+              </a:defRPr>
+            </a:pPr>
+            <a:r>
+              <a:t>Encode multi-dimensional variables (weather, exams, hostel occupancy, menu popularity, feedback).</a:t>
+            </a:r>
+          </a:p>
+        </p:txBody>
+      </p:sp>
+      <p:sp>
+        <p:nvSpPr>
+          <p:cNvPr id="9" name="Rectangle 8"/>
+          <p:cNvSpPr/>
+          <p:nvPr/>
+        </p:nvSpPr>
+        <p:spPr>
+          <a:xfrm>
+            <a:off x="731520" y="3182112"/>
+            <a:ext cx="5257800" cy="1389888"/>
+          </a:xfrm>
+          <a:prstGeom prst="rect">
+            <a:avLst/>
+          </a:prstGeom>
+          <a:solidFill>
+            <a:srgbClr val="FFFFFF"/>
+          </a:solidFill>
+          <a:ln w="12700">
+            <a:solidFill>
+              <a:srgbClr val="000000"/>
+            </a:solidFill>
+          </a:ln>
+        </p:spPr>
+        <p:style>
+          <a:lnRef idx="1">
+            <a:schemeClr val="accent1"/>
+          </a:lnRef>
+          <a:fillRef idx="3">
+            <a:schemeClr val="accent1"/>
+          </a:fillRef>
+          <a:effectRef idx="2">
+            <a:schemeClr val="accent1"/>
+          </a:effectRef>
+          <a:fontRef idx="minor">
+            <a:schemeClr val="lt1"/>
+          </a:fontRef>
+        </p:style>
+        <p:txBody>
+          <a:bodyPr rtlCol="0" anchor="ctr"/>
+          <a:lstStyle/>
+          <a:p>
+            <a:pPr algn="ctr"/>
+            <a:endParaRPr/>
+          </a:p>
+        </p:txBody>
+      </p:sp>
+      <p:sp>
+        <p:nvSpPr>
+          <p:cNvPr id="10" name="TextBox 9"/>
+          <p:cNvSpPr txBox="1"/>
+          <p:nvPr/>
+        </p:nvSpPr>
+        <p:spPr>
+          <a:xfrm>
+            <a:off x="896112" y="3291840"/>
+            <a:ext cx="4928616" cy="1170432"/>
+          </a:xfrm>
+          <a:prstGeom prst="rect">
+            <a:avLst/>
+          </a:prstGeom>
+          <a:noFill/>
+        </p:spPr>
+        <p:txBody>
+          <a:bodyPr wrap="square">
+            <a:spAutoFit/>
+          </a:bodyPr>
+          <a:lstStyle/>
+          <a:p>
+            <a:pPr>
+              <a:spcAft>
+                <a:spcPts val="400"/>
+              </a:spcAft>
+              <a:defRPr sz="1300" b="1">
+                <a:solidFill>
+                  <a:srgbClr val="000000"/>
+                </a:solidFill>
+                <a:latin typeface="Arial"/>
+              </a:defRPr>
+            </a:pPr>
+            <a:r>
+              <a:t>Obj 3: Pre-Cook Prep Guidance</a:t>
+            </a:r>
+          </a:p>
+          <a:p>
+            <a:pPr>
+              <a:defRPr sz="1100">
+                <a:solidFill>
+                  <a:srgbClr val="3C3C3C"/>
+                </a:solidFill>
+                <a:latin typeface="Arial"/>
+              </a:defRPr>
+            </a:pPr>
+            <a:r>
+              <a:t>Deliver actionable cooking quantities and categorize waste risks into LOW, MEDIUM, and HIGH alert levels.</a:t>
+            </a:r>
+          </a:p>
+        </p:txBody>
+      </p:sp>
+      <p:sp>
+        <p:nvSpPr>
+          <p:cNvPr id="11" name="Rectangle 10"/>
+          <p:cNvSpPr/>
+          <p:nvPr/>
+        </p:nvSpPr>
+        <p:spPr>
+          <a:xfrm>
+            <a:off x="6172200" y="3182112"/>
+            <a:ext cx="5257800" cy="1389888"/>
+          </a:xfrm>
+          <a:prstGeom prst="rect">
+            <a:avLst/>
+          </a:prstGeom>
+          <a:solidFill>
+            <a:srgbClr val="FFFFFF"/>
+          </a:solidFill>
+          <a:ln w="12700">
+            <a:solidFill>
+              <a:srgbClr val="000000"/>
+            </a:solidFill>
+          </a:ln>
+        </p:spPr>
+        <p:style>
+          <a:lnRef idx="1">
+            <a:schemeClr val="accent1"/>
+          </a:lnRef>
+          <a:fillRef idx="3">
+            <a:schemeClr val="accent1"/>
+          </a:fillRef>
+          <a:effectRef idx="2">
+            <a:schemeClr val="accent1"/>
+          </a:effectRef>
+          <a:fontRef idx="minor">
+            <a:schemeClr val="lt1"/>
+          </a:fontRef>
+        </p:style>
+        <p:txBody>
+          <a:bodyPr rtlCol="0" anchor="ctr"/>
+          <a:lstStyle/>
+          <a:p>
+            <a:pPr algn="ctr"/>
+            <a:endParaRPr/>
+          </a:p>
+        </p:txBody>
+      </p:sp>
+      <p:sp>
+        <p:nvSpPr>
+          <p:cNvPr id="12" name="TextBox 11"/>
+          <p:cNvSpPr txBox="1"/>
+          <p:nvPr/>
+        </p:nvSpPr>
+        <p:spPr>
+          <a:xfrm>
+            <a:off x="6336792" y="3291840"/>
+            <a:ext cx="4928616" cy="1170432"/>
+          </a:xfrm>
+          <a:prstGeom prst="rect">
+            <a:avLst/>
+          </a:prstGeom>
+          <a:noFill/>
+        </p:spPr>
+        <p:txBody>
+          <a:bodyPr wrap="square">
+            <a:spAutoFit/>
+          </a:bodyPr>
+          <a:lstStyle/>
+          <a:p>
+            <a:pPr>
+              <a:spcAft>
+                <a:spcPts val="400"/>
+              </a:spcAft>
+              <a:defRPr sz="1300" b="1">
+                <a:solidFill>
+                  <a:srgbClr val="000000"/>
+                </a:solidFill>
+                <a:latin typeface="Arial"/>
+              </a:defRPr>
+            </a:pPr>
+            <a:r>
+              <a:t>Obj 4: Benchmarking &amp; Auto Selection</a:t>
+            </a:r>
+          </a:p>
+          <a:p>
+            <a:pPr>
+              <a:defRPr sz="1100">
+                <a:solidFill>
+                  <a:srgbClr val="3C3C3C"/>
+                </a:solidFill>
+                <a:latin typeface="Arial"/>
+              </a:defRPr>
+            </a:pPr>
+            <a:r>
+              <a:t>Evaluate ML algorithms side-by-side (MAE, RMSE, R²) with dynamic on-device best model deployment.</a:t>
+            </a:r>
+          </a:p>
+        </p:txBody>
+      </p:sp>
+      <p:sp>
+        <p:nvSpPr>
+          <p:cNvPr id="13" name="Rectangle 12"/>
+          <p:cNvSpPr/>
+          <p:nvPr/>
+        </p:nvSpPr>
+        <p:spPr>
+          <a:xfrm>
+            <a:off x="731520" y="4718304"/>
+            <a:ext cx="5257800" cy="1389888"/>
+          </a:xfrm>
+          <a:prstGeom prst="rect">
+            <a:avLst/>
+          </a:prstGeom>
+          <a:solidFill>
+            <a:srgbClr val="FFFFFF"/>
+          </a:solidFill>
+          <a:ln w="12700">
+            <a:solidFill>
+              <a:srgbClr val="000000"/>
+            </a:solidFill>
+          </a:ln>
+        </p:spPr>
+        <p:style>
+          <a:lnRef idx="1">
+            <a:schemeClr val="accent1"/>
+          </a:lnRef>
+          <a:fillRef idx="3">
+            <a:schemeClr val="accent1"/>
+          </a:fillRef>
+          <a:effectRef idx="2">
+            <a:schemeClr val="accent1"/>
+          </a:effectRef>
+          <a:fontRef idx="minor">
+            <a:schemeClr val="lt1"/>
+          </a:fontRef>
+        </p:style>
+        <p:txBody>
+          <a:bodyPr rtlCol="0" anchor="ctr"/>
+          <a:lstStyle/>
+          <a:p>
+            <a:pPr algn="ctr"/>
+            <a:endParaRPr/>
+          </a:p>
+        </p:txBody>
+      </p:sp>
+      <p:sp>
+        <p:nvSpPr>
+          <p:cNvPr id="14" name="TextBox 13"/>
+          <p:cNvSpPr txBox="1"/>
+          <p:nvPr/>
+        </p:nvSpPr>
+        <p:spPr>
+          <a:xfrm>
+            <a:off x="896112" y="4828032"/>
+            <a:ext cx="4928616" cy="1170432"/>
+          </a:xfrm>
+          <a:prstGeom prst="rect">
+            <a:avLst/>
+          </a:prstGeom>
+          <a:noFill/>
+        </p:spPr>
+        <p:txBody>
+          <a:bodyPr wrap="square">
+            <a:spAutoFit/>
+          </a:bodyPr>
+          <a:lstStyle/>
+          <a:p>
+            <a:pPr>
+              <a:spcAft>
+                <a:spcPts val="400"/>
+              </a:spcAft>
+              <a:defRPr sz="1300" b="1">
+                <a:solidFill>
+                  <a:srgbClr val="000000"/>
+                </a:solidFill>
+                <a:latin typeface="Arial"/>
+              </a:defRPr>
+            </a:pPr>
+            <a:r>
+              <a:t>Obj 5: Intuitive Offline Mobile App</a:t>
+            </a:r>
+          </a:p>
+          <a:p>
+            <a:pPr>
+              <a:defRPr sz="1100">
+                <a:solidFill>
+                  <a:srgbClr val="3C3C3C"/>
+                </a:solidFill>
+                <a:latin typeface="Arial"/>
+              </a:defRPr>
+            </a:pPr>
+            <a:r>
+              <a:t>Engineer an offline-first Jetpack Compose app with Room SQLite database and actionable pre-cook advisory engine.</a:t>
+            </a:r>
+          </a:p>
+        </p:txBody>
+      </p:sp>
+      <p:sp>
+        <p:nvSpPr>
+          <p:cNvPr id="15" name="Rectangle 14"/>
+          <p:cNvSpPr/>
+          <p:nvPr/>
+        </p:nvSpPr>
+        <p:spPr>
+          <a:xfrm>
+            <a:off x="6172200" y="4718304"/>
+            <a:ext cx="5257800" cy="1389888"/>
+          </a:xfrm>
+          <a:prstGeom prst="rect">
+            <a:avLst/>
+          </a:prstGeom>
+          <a:solidFill>
+            <a:srgbClr val="FFFFFF"/>
+          </a:solidFill>
+          <a:ln w="12700">
+            <a:solidFill>
+              <a:srgbClr val="000000"/>
+            </a:solidFill>
+          </a:ln>
+        </p:spPr>
+        <p:style>
+          <a:lnRef idx="1">
+            <a:schemeClr val="accent1"/>
+          </a:lnRef>
+          <a:fillRef idx="3">
+            <a:schemeClr val="accent1"/>
+          </a:fillRef>
+          <a:effectRef idx="2">
+            <a:schemeClr val="accent1"/>
+          </a:effectRef>
+          <a:fontRef idx="minor">
+            <a:schemeClr val="lt1"/>
+          </a:fontRef>
+        </p:style>
+        <p:txBody>
+          <a:bodyPr rtlCol="0" anchor="ctr"/>
+          <a:lstStyle/>
+          <a:p>
+            <a:pPr algn="ctr"/>
+            <a:endParaRPr/>
+          </a:p>
+        </p:txBody>
+      </p:sp>
+      <p:sp>
+        <p:nvSpPr>
+          <p:cNvPr id="16" name="TextBox 15"/>
+          <p:cNvSpPr txBox="1"/>
+          <p:nvPr/>
+        </p:nvSpPr>
+        <p:spPr>
+          <a:xfrm>
+            <a:off x="6336792" y="4828032"/>
+            <a:ext cx="4928616" cy="1170432"/>
+          </a:xfrm>
+          <a:prstGeom prst="rect">
+            <a:avLst/>
+          </a:prstGeom>
+          <a:noFill/>
+        </p:spPr>
+        <p:txBody>
+          <a:bodyPr wrap="square">
+            <a:spAutoFit/>
+          </a:bodyPr>
+          <a:lstStyle/>
+          <a:p>
+            <a:pPr>
+              <a:spcAft>
+                <a:spcPts val="400"/>
+              </a:spcAft>
+              <a:defRPr sz="1300" b="1">
+                <a:solidFill>
+                  <a:srgbClr val="000000"/>
+                </a:solidFill>
+                <a:latin typeface="Arial"/>
+              </a:defRPr>
+            </a:pPr>
+            <a:r>
+              <a:t>Obj 6: Financial &amp; Environmental Savings</a:t>
+            </a:r>
+          </a:p>
+          <a:p>
+            <a:pPr>
+              <a:defRPr sz="1100">
+                <a:solidFill>
+                  <a:srgbClr val="3C3C3C"/>
+                </a:solidFill>
+                <a:latin typeface="Arial"/>
+              </a:defRPr>
+            </a:pPr>
+            <a:r>
+              <a:t>Calculate real-time cost savings (₹/kg) and landfill waste cuts, advancing UN SDG 12 sustainability.</a:t>
+            </a:r>
+          </a:p>
+        </p:txBody>
+      </p:sp>
+    </p:spTree>
+  </p:cSld>
+  <p:clrMapOvr>
+    <a:masterClrMapping/>
+  </p:clrMapOvr>
+</p:sld>
+</file>
+
+<file path=ppt/slides/slide4.xml><?xml version="1.0" encoding="utf-8"?>
+<p:sld xmlns:a="http://schemas.openxmlformats.org/drawingml/2006/main" xmlns:r="http://schemas.openxmlformats.org/officeDocument/2006/relationships" xmlns:p="http://schemas.openxmlformats.org/presentationml/2006/main">
+  <p:cSld>
+    <p:bg>
+      <p:bgPr>
+        <a:solidFill>
+          <a:srgbClr val="FFFFFF"/>
+        </a:solidFill>
+        <a:effectLst/>
+      </p:bgPr>
+    </p:bg>
+    <p:spTree>
+      <p:nvGrpSpPr>
+        <p:cNvPr id="1" name=""/>
+        <p:cNvGrpSpPr/>
+        <p:nvPr/>
+      </p:nvGrpSpPr>
+      <p:grpSpPr>
+        <a:xfrm>
+          <a:off x="0" y="0"/>
+          <a:ext cx="0" cy="0"/>
+          <a:chOff x="0" y="0"/>
+          <a:chExt cx="0" cy="0"/>
+        </a:xfrm>
+      </p:grpSpPr>
+      <p:sp>
+        <p:nvSpPr>
+          <p:cNvPr id="2" name="TextBox 1"/>
+          <p:cNvSpPr txBox="1"/>
+          <p:nvPr/>
+        </p:nvSpPr>
+        <p:spPr>
+          <a:xfrm>
+            <a:off x="731520" y="365760"/>
+            <a:ext cx="10515600" cy="320040"/>
+          </a:xfrm>
+          <a:prstGeom prst="rect">
+            <a:avLst/>
+          </a:prstGeom>
+          <a:noFill/>
+        </p:spPr>
+        <p:txBody>
+          <a:bodyPr wrap="square">
+            <a:spAutoFit/>
+          </a:bodyPr>
+          <a:lstStyle/>
+          <a:p>
+            <a:pPr>
+              <a:defRPr sz="1000" b="1">
+                <a:solidFill>
+                  <a:srgbClr val="3C3C3C"/>
+                </a:solidFill>
+                <a:latin typeface="Arial"/>
+              </a:defRPr>
+            </a:pPr>
+            <a:r>
+              <a:t>RELATED WORK &amp; GAP ANALYSIS</a:t>
+            </a:r>
+          </a:p>
+        </p:txBody>
+      </p:sp>
+      <p:sp>
+        <p:nvSpPr>
+          <p:cNvPr id="3" name="TextBox 2"/>
+          <p:cNvSpPr txBox="1"/>
+          <p:nvPr/>
+        </p:nvSpPr>
+        <p:spPr>
+          <a:xfrm>
+            <a:off x="731520" y="640080"/>
+            <a:ext cx="10698480" cy="685800"/>
+          </a:xfrm>
+          <a:prstGeom prst="rect">
+            <a:avLst/>
+          </a:prstGeom>
+          <a:noFill/>
+        </p:spPr>
+        <p:txBody>
+          <a:bodyPr wrap="square">
+            <a:spAutoFit/>
+          </a:bodyPr>
+          <a:lstStyle/>
+          <a:p>
+            <a:pPr>
+              <a:defRPr sz="2400" b="1">
+                <a:solidFill>
+                  <a:srgbClr val="000000"/>
+                </a:solidFill>
+                <a:latin typeface="Arial"/>
+              </a:defRPr>
+            </a:pPr>
+            <a:r>
+              <a:t>Literature Survey</a:t>
+            </a:r>
+          </a:p>
+        </p:txBody>
+      </p:sp>
+      <p:sp>
+        <p:nvSpPr>
+          <p:cNvPr id="4" name="Rectangle 3"/>
+          <p:cNvSpPr/>
+          <p:nvPr/>
+        </p:nvSpPr>
+        <p:spPr>
+          <a:xfrm>
+            <a:off x="731520" y="1371600"/>
+            <a:ext cx="10728655" cy="18288"/>
+          </a:xfrm>
+          <a:prstGeom prst="rect">
+            <a:avLst/>
+          </a:prstGeom>
+          <a:solidFill>
+            <a:srgbClr val="000000"/>
+          </a:solidFill>
+          <a:ln>
+            <a:solidFill>
+              <a:srgbClr val="000000"/>
+            </a:solidFill>
+          </a:ln>
+        </p:spPr>
+        <p:style>
+          <a:lnRef idx="1">
+            <a:schemeClr val="accent1"/>
+          </a:lnRef>
+          <a:fillRef idx="3">
+            <a:schemeClr val="accent1"/>
+          </a:fillRef>
+          <a:effectRef idx="2">
+            <a:schemeClr val="accent1"/>
+          </a:effectRef>
+          <a:fontRef idx="minor">
+            <a:schemeClr val="lt1"/>
+          </a:fontRef>
+        </p:style>
+        <p:txBody>
+          <a:bodyPr rtlCol="0" anchor="ctr"/>
+          <a:lstStyle/>
+          <a:p>
+            <a:pPr algn="ctr"/>
+            <a:endParaRPr/>
           </a:p>
         </p:txBody>
       </p:sp>
@@ -3496,4023 +5114,39 @@
                 <a:tableStyleId>{5C22544A-7EE6-4342-B048-85BDC9FD1C3A}</a:tableStyleId>
               </a:tblPr>
               <a:tblGrid>
-                <a:gridCol w="1463040"/>
-                <a:gridCol w="3200400"/>
-                <a:gridCol w="3962095"/>
-                <a:gridCol w="2103120"/>
+                <a:gridCol w="2011680">
+                  <a:extLst>
+                    <a:ext uri="{9D8B030D-6E8A-4147-A177-3AD203B41FA5}">
+                      <a16:colId xmlns:a16="http://schemas.microsoft.com/office/drawing/2014/main" val="20000"/>
+                    </a:ext>
+                  </a:extLst>
+                </a:gridCol>
+                <a:gridCol w="2926080">
+                  <a:extLst>
+                    <a:ext uri="{9D8B030D-6E8A-4147-A177-3AD203B41FA5}">
+                      <a16:colId xmlns:a16="http://schemas.microsoft.com/office/drawing/2014/main" val="20001"/>
+                    </a:ext>
+                  </a:extLst>
+                </a:gridCol>
+                <a:gridCol w="3108960">
+                  <a:extLst>
+                    <a:ext uri="{9D8B030D-6E8A-4147-A177-3AD203B41FA5}">
+                      <a16:colId xmlns:a16="http://schemas.microsoft.com/office/drawing/2014/main" val="20002"/>
+                    </a:ext>
+                  </a:extLst>
+                </a:gridCol>
+                <a:gridCol w="2681935">
+                  <a:extLst>
+                    <a:ext uri="{9D8B030D-6E8A-4147-A177-3AD203B41FA5}">
+                      <a16:colId xmlns:a16="http://schemas.microsoft.com/office/drawing/2014/main" val="20003"/>
+                    </a:ext>
+                  </a:extLst>
+                </a:gridCol>
               </a:tblGrid>
               <a:tr h="762000">
                 <a:tc>
                   <a:txBody>
-                    <a:bodyPr wrap="square"/>
-                    <a:lstStyle/>
-                    <a:p>
-                      <a:pPr>
-                        <a:defRPr sz="1200" b="1">
-                          <a:solidFill>
-                            <a:srgbClr val="000000"/>
-                          </a:solidFill>
-                          <a:latin typeface="Arial"/>
-                        </a:defRPr>
-                      </a:pPr>
-                      <a:r>
-                        <a:t>Phase</a:t>
-                      </a:r>
-                    </a:p>
-                  </a:txBody>
-                  <a:tcPr>
-                    <a:solidFill>
-                      <a:srgbClr val="FFFFFF"/>
-                    </a:solidFill>
-                  </a:tcPr>
-                </a:tc>
-                <a:tc>
-                  <a:txBody>
-                    <a:bodyPr wrap="square"/>
-                    <a:lstStyle/>
-                    <a:p>
-                      <a:pPr>
-                        <a:defRPr sz="1200" b="1">
-                          <a:solidFill>
-                            <a:srgbClr val="000000"/>
-                          </a:solidFill>
-                          <a:latin typeface="Arial"/>
-                        </a:defRPr>
-                      </a:pPr>
-                      <a:r>
-                        <a:t>Planned Activity</a:t>
-                      </a:r>
-                    </a:p>
-                  </a:txBody>
-                  <a:tcPr>
-                    <a:solidFill>
-                      <a:srgbClr val="FFFFFF"/>
-                    </a:solidFill>
-                  </a:tcPr>
-                </a:tc>
-                <a:tc>
-                  <a:txBody>
-                    <a:bodyPr wrap="square"/>
-                    <a:lstStyle/>
-                    <a:p>
-                      <a:pPr>
-                        <a:defRPr sz="1200" b="1">
-                          <a:solidFill>
-                            <a:srgbClr val="000000"/>
-                          </a:solidFill>
-                          <a:latin typeface="Arial"/>
-                        </a:defRPr>
-                      </a:pPr>
-                      <a:r>
-                        <a:t>Key Deliverables &amp; Milestones</a:t>
-                      </a:r>
-                    </a:p>
-                  </a:txBody>
-                  <a:tcPr>
-                    <a:solidFill>
-                      <a:srgbClr val="FFFFFF"/>
-                    </a:solidFill>
-                  </a:tcPr>
-                </a:tc>
-                <a:tc>
-                  <a:txBody>
-                    <a:bodyPr wrap="square"/>
-                    <a:lstStyle/>
-                    <a:p>
-                      <a:pPr>
-                        <a:defRPr sz="1200" b="1">
-                          <a:solidFill>
-                            <a:srgbClr val="000000"/>
-                          </a:solidFill>
-                          <a:latin typeface="Arial"/>
-                        </a:defRPr>
-                      </a:pPr>
-                      <a:r>
-                        <a:t>Target Timeline</a:t>
-                      </a:r>
-                    </a:p>
-                  </a:txBody>
-                  <a:tcPr>
-                    <a:solidFill>
-                      <a:srgbClr val="FFFFFF"/>
-                    </a:solidFill>
-                  </a:tcPr>
-                </a:tc>
-              </a:tr>
-              <a:tr h="762000">
-                <a:tc>
-                  <a:txBody>
                     <a:bodyPr/>
-                    <a:lstStyle/>
-                    <a:p>
-                      <a:pPr>
-                        <a:defRPr b="1" sz="1100">
-                          <a:solidFill>
-                            <a:srgbClr val="000000"/>
-                          </a:solidFill>
-                          <a:latin typeface="Arial"/>
-                        </a:defRPr>
-                      </a:pPr>
-                      <a:r>
-                        <a:t>Phase 1</a:t>
-                      </a:r>
-                    </a:p>
-                  </a:txBody>
-                  <a:tcPr>
-                    <a:solidFill>
-                      <a:srgbClr val="FFFFFF"/>
-                    </a:solidFill>
-                  </a:tcPr>
-                </a:tc>
-                <a:tc>
-                  <a:txBody>
-                    <a:bodyPr/>
-                    <a:lstStyle/>
-                    <a:p>
-                      <a:pPr>
-                        <a:defRPr sz="1050">
-                          <a:solidFill>
-                            <a:srgbClr val="323232"/>
-                          </a:solidFill>
-                          <a:latin typeface="Arial"/>
-                        </a:defRPr>
-                      </a:pPr>
-                      <a:r>
-                        <a:t>Real-World Field Data Collection &amp; Pilot Deployment</a:t>
-                      </a:r>
-                    </a:p>
-                  </a:txBody>
-                  <a:tcPr>
-                    <a:solidFill>
-                      <a:srgbClr val="FFFFFF"/>
-                    </a:solidFill>
-                  </a:tcPr>
-                </a:tc>
-                <a:tc>
-                  <a:txBody>
-                    <a:bodyPr/>
-                    <a:lstStyle/>
-                    <a:p>
-                      <a:pPr>
-                        <a:defRPr sz="1050">
-                          <a:solidFill>
-                            <a:srgbClr val="323232"/>
-                          </a:solidFill>
-                          <a:latin typeface="Arial"/>
-                        </a:defRPr>
-                      </a:pPr>
-                      <a:r>
-                        <a:t>Deploy app in college mess / hostel cafeteria; gather 30+ days of live actual consumption and wastage records.</a:t>
-                      </a:r>
-                    </a:p>
-                  </a:txBody>
-                  <a:tcPr>
-                    <a:solidFill>
-                      <a:srgbClr val="FFFFFF"/>
-                    </a:solidFill>
-                  </a:tcPr>
-                </a:tc>
-                <a:tc>
-                  <a:txBody>
-                    <a:bodyPr/>
-                    <a:lstStyle/>
-                    <a:p>
-                      <a:pPr>
-                        <a:defRPr sz="1050" b="1">
-                          <a:solidFill>
-                            <a:srgbClr val="000000"/>
-                          </a:solidFill>
-                          <a:latin typeface="Arial"/>
-                        </a:defRPr>
-                      </a:pPr>
-                      <a:r>
-                        <a:t>Weeks 1 – 2</a:t>
-                      </a:r>
-                    </a:p>
-                  </a:txBody>
-                  <a:tcPr>
-                    <a:solidFill>
-                      <a:srgbClr val="FFFFFF"/>
-                    </a:solidFill>
-                  </a:tcPr>
-                </a:tc>
-              </a:tr>
-              <a:tr h="762000">
-                <a:tc>
-                  <a:txBody>
-                    <a:bodyPr/>
-                    <a:lstStyle/>
-                    <a:p>
-                      <a:pPr>
-                        <a:defRPr b="1" sz="1100">
-                          <a:solidFill>
-                            <a:srgbClr val="000000"/>
-                          </a:solidFill>
-                          <a:latin typeface="Arial"/>
-                        </a:defRPr>
-                      </a:pPr>
-                      <a:r>
-                        <a:t>Phase 2</a:t>
-                      </a:r>
-                    </a:p>
-                  </a:txBody>
-                  <a:tcPr>
-                    <a:solidFill>
-                      <a:srgbClr val="FFFFFF"/>
-                    </a:solidFill>
-                  </a:tcPr>
-                </a:tc>
-                <a:tc>
-                  <a:txBody>
-                    <a:bodyPr/>
-                    <a:lstStyle/>
-                    <a:p>
-                      <a:pPr>
-                        <a:defRPr sz="1050">
-                          <a:solidFill>
-                            <a:srgbClr val="323232"/>
-                          </a:solidFill>
-                          <a:latin typeface="Arial"/>
-                        </a:defRPr>
-                      </a:pPr>
-                      <a:r>
-                        <a:t>Model Hyperparameter Tuning &amp; Cross-Validation</a:t>
-                      </a:r>
-                    </a:p>
-                  </a:txBody>
-                  <a:tcPr>
-                    <a:solidFill>
-                      <a:srgbClr val="FFFFFF"/>
-                    </a:solidFill>
-                  </a:tcPr>
-                </a:tc>
-                <a:tc>
-                  <a:txBody>
-                    <a:bodyPr/>
-                    <a:lstStyle/>
-                    <a:p>
-                      <a:pPr>
-                        <a:defRPr sz="1050">
-                          <a:solidFill>
-                            <a:srgbClr val="323232"/>
-                          </a:solidFill>
-                          <a:latin typeface="Arial"/>
-                        </a:defRPr>
-                      </a:pPr>
-                      <a:r>
-                        <a:t>Implement K-Fold cross validation and optimize tree depth / estimator parameters for improved generalization.</a:t>
-                      </a:r>
-                    </a:p>
-                  </a:txBody>
-                  <a:tcPr>
-                    <a:solidFill>
-                      <a:srgbClr val="FFFFFF"/>
-                    </a:solidFill>
-                  </a:tcPr>
-                </a:tc>
-                <a:tc>
-                  <a:txBody>
-                    <a:bodyPr/>
-                    <a:lstStyle/>
-                    <a:p>
-                      <a:pPr>
-                        <a:defRPr sz="1050" b="1">
-                          <a:solidFill>
-                            <a:srgbClr val="000000"/>
-                          </a:solidFill>
-                          <a:latin typeface="Arial"/>
-                        </a:defRPr>
-                      </a:pPr>
-                      <a:r>
-                        <a:t>Weeks 3 – 4</a:t>
-                      </a:r>
-                    </a:p>
-                  </a:txBody>
-                  <a:tcPr>
-                    <a:solidFill>
-                      <a:srgbClr val="FFFFFF"/>
-                    </a:solidFill>
-                  </a:tcPr>
-                </a:tc>
-              </a:tr>
-              <a:tr h="762000">
-                <a:tc>
-                  <a:txBody>
-                    <a:bodyPr/>
-                    <a:lstStyle/>
-                    <a:p>
-                      <a:pPr>
-                        <a:defRPr b="1" sz="1100">
-                          <a:solidFill>
-                            <a:srgbClr val="000000"/>
-                          </a:solidFill>
-                          <a:latin typeface="Arial"/>
-                        </a:defRPr>
-                      </a:pPr>
-                      <a:r>
-                        <a:t>Phase 3</a:t>
-                      </a:r>
-                    </a:p>
-                  </a:txBody>
-                  <a:tcPr>
-                    <a:solidFill>
-                      <a:srgbClr val="FFFFFF"/>
-                    </a:solidFill>
-                  </a:tcPr>
-                </a:tc>
-                <a:tc>
-                  <a:txBody>
-                    <a:bodyPr/>
-                    <a:lstStyle/>
-                    <a:p>
-                      <a:pPr>
-                        <a:defRPr sz="1050">
-                          <a:solidFill>
-                            <a:srgbClr val="323232"/>
-                          </a:solidFill>
-                          <a:latin typeface="Arial"/>
-                        </a:defRPr>
-                      </a:pPr>
-                      <a:r>
-                        <a:t>Cloud Sync &amp; Multi-Kitchen Central Dashboard</a:t>
-                      </a:r>
-                    </a:p>
-                  </a:txBody>
-                  <a:tcPr>
-                    <a:solidFill>
-                      <a:srgbClr val="FFFFFF"/>
-                    </a:solidFill>
-                  </a:tcPr>
-                </a:tc>
-                <a:tc>
-                  <a:txBody>
-                    <a:bodyPr/>
-                    <a:lstStyle/>
-                    <a:p>
-                      <a:pPr>
-                        <a:defRPr sz="1050">
-                          <a:solidFill>
-                            <a:srgbClr val="323232"/>
-                          </a:solidFill>
-                          <a:latin typeface="Arial"/>
-                        </a:defRPr>
-                      </a:pPr>
-                      <a:r>
-                        <a:t>Develop Firebase / REST backend to aggregate waste analytics across multiple campus dining halls into a single admin panel.</a:t>
-                      </a:r>
-                    </a:p>
-                  </a:txBody>
-                  <a:tcPr>
-                    <a:solidFill>
-                      <a:srgbClr val="FFFFFF"/>
-                    </a:solidFill>
-                  </a:tcPr>
-                </a:tc>
-                <a:tc>
-                  <a:txBody>
-                    <a:bodyPr/>
-                    <a:lstStyle/>
-                    <a:p>
-                      <a:pPr>
-                        <a:defRPr sz="1050" b="1">
-                          <a:solidFill>
-                            <a:srgbClr val="000000"/>
-                          </a:solidFill>
-                          <a:latin typeface="Arial"/>
-                        </a:defRPr>
-                      </a:pPr>
-                      <a:r>
-                        <a:t>Weeks 5 – 6</a:t>
-                      </a:r>
-                    </a:p>
-                  </a:txBody>
-                  <a:tcPr>
-                    <a:solidFill>
-                      <a:srgbClr val="FFFFFF"/>
-                    </a:solidFill>
-                  </a:tcPr>
-                </a:tc>
-              </a:tr>
-              <a:tr h="762000">
-                <a:tc>
-                  <a:txBody>
-                    <a:bodyPr/>
-                    <a:lstStyle/>
-                    <a:p>
-                      <a:pPr>
-                        <a:defRPr b="1" sz="1100">
-                          <a:solidFill>
-                            <a:srgbClr val="000000"/>
-                          </a:solidFill>
-                          <a:latin typeface="Arial"/>
-                        </a:defRPr>
-                      </a:pPr>
-                      <a:r>
-                        <a:t>Phase 4</a:t>
-                      </a:r>
-                    </a:p>
-                  </a:txBody>
-                  <a:tcPr>
-                    <a:solidFill>
-                      <a:srgbClr val="FFFFFF"/>
-                    </a:solidFill>
-                  </a:tcPr>
-                </a:tc>
-                <a:tc>
-                  <a:txBody>
-                    <a:bodyPr/>
-                    <a:lstStyle/>
-                    <a:p>
-                      <a:pPr>
-                        <a:defRPr sz="1050">
-                          <a:solidFill>
-                            <a:srgbClr val="323232"/>
-                          </a:solidFill>
-                          <a:latin typeface="Arial"/>
-                        </a:defRPr>
-                      </a:pPr>
-                      <a:r>
-                        <a:t>Automated Push Notification &amp; Alert System</a:t>
-                      </a:r>
-                    </a:p>
-                  </a:txBody>
-                  <a:tcPr>
-                    <a:solidFill>
-                      <a:srgbClr val="FFFFFF"/>
-                    </a:solidFill>
-                  </a:tcPr>
-                </a:tc>
-                <a:tc>
-                  <a:txBody>
-                    <a:bodyPr/>
-                    <a:lstStyle/>
-                    <a:p>
-                      <a:pPr>
-                        <a:defRPr sz="1050">
-                          <a:solidFill>
-                            <a:srgbClr val="323232"/>
-                          </a:solidFill>
-                          <a:latin typeface="Arial"/>
-                        </a:defRPr>
-                      </a:pPr>
-                      <a:r>
-                        <a:t>Configure scheduled morning reminders notifying chefs of daily recommended preparation quantities and waste risk flags.</a:t>
-                      </a:r>
-                    </a:p>
-                  </a:txBody>
-                  <a:tcPr>
-                    <a:solidFill>
-                      <a:srgbClr val="FFFFFF"/>
-                    </a:solidFill>
-                  </a:tcPr>
-                </a:tc>
-                <a:tc>
-                  <a:txBody>
-                    <a:bodyPr/>
-                    <a:lstStyle/>
-                    <a:p>
-                      <a:pPr>
-                        <a:defRPr sz="1050" b="1">
-                          <a:solidFill>
-                            <a:srgbClr val="000000"/>
-                          </a:solidFill>
-                          <a:latin typeface="Arial"/>
-                        </a:defRPr>
-                      </a:pPr>
-                      <a:r>
-                        <a:t>Weeks 7 – 8</a:t>
-                      </a:r>
-                    </a:p>
-                  </a:txBody>
-                  <a:tcPr>
-                    <a:solidFill>
-                      <a:srgbClr val="FFFFFF"/>
-                    </a:solidFill>
-                  </a:tcPr>
-                </a:tc>
-              </a:tr>
-              <a:tr h="762000">
-                <a:tc>
-                  <a:txBody>
-                    <a:bodyPr/>
-                    <a:lstStyle/>
-                    <a:p>
-                      <a:pPr>
-                        <a:defRPr b="1" sz="1100">
-                          <a:solidFill>
-                            <a:srgbClr val="000000"/>
-                          </a:solidFill>
-                          <a:latin typeface="Arial"/>
-                        </a:defRPr>
-                      </a:pPr>
-                      <a:r>
-                        <a:t>Phase 5</a:t>
-                      </a:r>
-                    </a:p>
-                  </a:txBody>
-                  <a:tcPr>
-                    <a:solidFill>
-                      <a:srgbClr val="FFFFFF"/>
-                    </a:solidFill>
-                  </a:tcPr>
-                </a:tc>
-                <a:tc>
-                  <a:txBody>
-                    <a:bodyPr/>
-                    <a:lstStyle/>
-                    <a:p>
-                      <a:pPr>
-                        <a:defRPr sz="1050">
-                          <a:solidFill>
-                            <a:srgbClr val="323232"/>
-                          </a:solidFill>
-                          <a:latin typeface="Arial"/>
-                        </a:defRPr>
-                      </a:pPr>
-                      <a:r>
-                        <a:t>Quantitative Validation &amp; Final Thesis Documentation</a:t>
-                      </a:r>
-                    </a:p>
-                  </a:txBody>
-                  <a:tcPr>
-                    <a:solidFill>
-                      <a:srgbClr val="FFFFFF"/>
-                    </a:solidFill>
-                  </a:tcPr>
-                </a:tc>
-                <a:tc>
-                  <a:txBody>
-                    <a:bodyPr/>
-                    <a:lstStyle/>
-                    <a:p>
-                      <a:pPr>
-                        <a:defRPr sz="1050">
-                          <a:solidFill>
-                            <a:srgbClr val="323232"/>
-                          </a:solidFill>
-                          <a:latin typeface="Arial"/>
-                        </a:defRPr>
-                      </a:pPr>
-                      <a:r>
-                        <a:t>Benchmark percentage waste reduction against pre-pilot baseline; finalize project report and demonstration video.</a:t>
-                      </a:r>
-                    </a:p>
-                  </a:txBody>
-                  <a:tcPr>
-                    <a:solidFill>
-                      <a:srgbClr val="FFFFFF"/>
-                    </a:solidFill>
-                  </a:tcPr>
-                </a:tc>
-                <a:tc>
-                  <a:txBody>
-                    <a:bodyPr/>
-                    <a:lstStyle/>
-                    <a:p>
-                      <a:pPr>
-                        <a:defRPr sz="1050" b="1">
-                          <a:solidFill>
-                            <a:srgbClr val="000000"/>
-                          </a:solidFill>
-                          <a:latin typeface="Arial"/>
-                        </a:defRPr>
-                      </a:pPr>
-                      <a:r>
-                        <a:t>Weeks 9 – 10</a:t>
-                      </a:r>
-                    </a:p>
-                  </a:txBody>
-                  <a:tcPr>
-                    <a:solidFill>
-                      <a:srgbClr val="FFFFFF"/>
-                    </a:solidFill>
-                  </a:tcPr>
-                </a:tc>
-              </a:tr>
-            </a:tbl>
-          </a:graphicData>
-        </a:graphic>
-      </p:graphicFrame>
-    </p:spTree>
-  </p:cSld>
-  <p:clrMapOvr>
-    <a:masterClrMapping/>
-  </p:clrMapOvr>
-</p:sld>
-</file>
-
-<file path=ppt/slides/slide11.xml><?xml version="1.0" encoding="utf-8"?>
-<p:sld xmlns:a="http://schemas.openxmlformats.org/drawingml/2006/main" xmlns:p="http://schemas.openxmlformats.org/presentationml/2006/main" xmlns:r="http://schemas.openxmlformats.org/officeDocument/2006/relationships">
-  <p:cSld>
-    <p:bg>
-      <p:bgPr>
-        <a:solidFill>
-          <a:srgbClr val="FFFFFF"/>
-        </a:solidFill>
-        <a:effectLst/>
-      </p:bgPr>
-    </p:bg>
-    <p:spTree>
-      <p:nvGrpSpPr>
-        <p:cNvPr id="1" name=""/>
-        <p:cNvGrpSpPr/>
-        <p:nvPr/>
-      </p:nvGrpSpPr>
-      <p:grpSpPr/>
-      <p:sp>
-        <p:nvSpPr>
-          <p:cNvPr id="2" name="TextBox 1"/>
-          <p:cNvSpPr txBox="1"/>
-          <p:nvPr/>
-        </p:nvSpPr>
-        <p:spPr>
-          <a:xfrm>
-            <a:off x="731520" y="365760"/>
-            <a:ext cx="10515600" cy="320040"/>
-          </a:xfrm>
-          <a:prstGeom prst="rect">
-            <a:avLst/>
-          </a:prstGeom>
-          <a:noFill/>
-        </p:spPr>
-        <p:txBody>
-          <a:bodyPr wrap="square">
-            <a:spAutoFit/>
-          </a:bodyPr>
-          <a:lstStyle/>
-          <a:p>
-            <a:pPr>
-              <a:defRPr sz="1000" b="1">
-                <a:solidFill>
-                  <a:srgbClr val="323232"/>
-                </a:solidFill>
-                <a:latin typeface="Arial"/>
-              </a:defRPr>
-            </a:pPr>
-            <a:r>
-              <a:t>TARGET IMPACT &amp; BENEFITS</a:t>
-            </a:r>
-          </a:p>
-        </p:txBody>
-      </p:sp>
-      <p:sp>
-        <p:nvSpPr>
-          <p:cNvPr id="3" name="TextBox 2"/>
-          <p:cNvSpPr txBox="1"/>
-          <p:nvPr/>
-        </p:nvSpPr>
-        <p:spPr>
-          <a:xfrm>
-            <a:off x="731520" y="640080"/>
-            <a:ext cx="10698480" cy="731520"/>
-          </a:xfrm>
-          <a:prstGeom prst="rect">
-            <a:avLst/>
-          </a:prstGeom>
-          <a:noFill/>
-        </p:spPr>
-        <p:txBody>
-          <a:bodyPr wrap="square">
-            <a:spAutoFit/>
-          </a:bodyPr>
-          <a:lstStyle/>
-          <a:p>
-            <a:pPr>
-              <a:defRPr sz="2400" b="1">
-                <a:solidFill>
-                  <a:srgbClr val="000000"/>
-                </a:solidFill>
-                <a:latin typeface="Arial"/>
-              </a:defRPr>
-            </a:pPr>
-            <a:r>
-              <a:t>Expected Outcomes</a:t>
-            </a:r>
-          </a:p>
-        </p:txBody>
-      </p:sp>
-      <p:sp>
-        <p:nvSpPr>
-          <p:cNvPr id="4" name="Rectangle 3"/>
-          <p:cNvSpPr/>
-          <p:nvPr/>
-        </p:nvSpPr>
-        <p:spPr>
-          <a:xfrm>
-            <a:off x="731520" y="1371600"/>
-            <a:ext cx="10728655" cy="18288"/>
-          </a:xfrm>
-          <a:prstGeom prst="rect">
-            <a:avLst/>
-          </a:prstGeom>
-          <a:solidFill>
-            <a:srgbClr val="000000"/>
-          </a:solidFill>
-          <a:ln>
-            <a:solidFill>
-              <a:srgbClr val="000000"/>
-            </a:solidFill>
-          </a:ln>
-        </p:spPr>
-        <p:style>
-          <a:lnRef idx="1">
-            <a:schemeClr val="accent1"/>
-          </a:lnRef>
-          <a:fillRef idx="3">
-            <a:schemeClr val="accent1"/>
-          </a:fillRef>
-          <a:effectRef idx="2">
-            <a:schemeClr val="accent1"/>
-          </a:effectRef>
-          <a:fontRef idx="minor">
-            <a:schemeClr val="lt1"/>
-          </a:fontRef>
-        </p:style>
-        <p:txBody>
-          <a:bodyPr rtlCol="0" anchor="ctr"/>
-          <a:lstStyle/>
-          <a:p>
-            <a:pPr algn="ctr"/>
-          </a:p>
-        </p:txBody>
-      </p:sp>
-      <p:sp>
-        <p:nvSpPr>
-          <p:cNvPr id="5" name="Rectangle 4"/>
-          <p:cNvSpPr/>
-          <p:nvPr/>
-        </p:nvSpPr>
-        <p:spPr>
-          <a:xfrm>
-            <a:off x="731520" y="1645920"/>
-            <a:ext cx="5257800" cy="1389888"/>
-          </a:xfrm>
-          <a:prstGeom prst="rect">
-            <a:avLst/>
-          </a:prstGeom>
-          <a:solidFill>
-            <a:srgbClr val="FFFFFF"/>
-          </a:solidFill>
-          <a:ln w="12700">
-            <a:solidFill>
-              <a:srgbClr val="000000"/>
-            </a:solidFill>
-          </a:ln>
-        </p:spPr>
-        <p:style>
-          <a:lnRef idx="1">
-            <a:schemeClr val="accent1"/>
-          </a:lnRef>
-          <a:fillRef idx="3">
-            <a:schemeClr val="accent1"/>
-          </a:fillRef>
-          <a:effectRef idx="2">
-            <a:schemeClr val="accent1"/>
-          </a:effectRef>
-          <a:fontRef idx="minor">
-            <a:schemeClr val="lt1"/>
-          </a:fontRef>
-        </p:style>
-        <p:txBody>
-          <a:bodyPr rtlCol="0" anchor="ctr"/>
-          <a:lstStyle/>
-          <a:p>
-            <a:pPr algn="ctr"/>
-          </a:p>
-        </p:txBody>
-      </p:sp>
-      <p:sp>
-        <p:nvSpPr>
-          <p:cNvPr id="6" name="TextBox 5"/>
-          <p:cNvSpPr txBox="1"/>
-          <p:nvPr/>
-        </p:nvSpPr>
-        <p:spPr>
-          <a:xfrm>
-            <a:off x="896112" y="1755648"/>
-            <a:ext cx="4928616" cy="1170432"/>
-          </a:xfrm>
-          <a:prstGeom prst="rect">
-            <a:avLst/>
-          </a:prstGeom>
-          <a:noFill/>
-        </p:spPr>
-        <p:txBody>
-          <a:bodyPr wrap="square">
-            <a:spAutoFit/>
-          </a:bodyPr>
-          <a:lstStyle/>
-          <a:p>
-            <a:pPr>
-              <a:spcAft>
-                <a:spcPts val="400"/>
-              </a:spcAft>
-              <a:defRPr sz="1300" b="1">
-                <a:solidFill>
-                  <a:srgbClr val="000000"/>
-                </a:solidFill>
-                <a:latin typeface="Arial"/>
-              </a:defRPr>
-            </a:pPr>
-            <a:r>
-              <a:t>★ Outcome 1: 25% – 35% Food Waste Reduction</a:t>
-            </a:r>
-          </a:p>
-          <a:p>
-            <a:pPr>
-              <a:defRPr sz="1100">
-                <a:solidFill>
-                  <a:srgbClr val="323232"/>
-                </a:solidFill>
-                <a:latin typeface="Arial"/>
-              </a:defRPr>
-            </a:pPr>
-            <a:r>
-              <a:t>By replacing manual guesswork with precision ML demand forecasting, institutional kitchens can prevent 25% to 35% of daily food surplus before cooking occurs.</a:t>
-            </a:r>
-          </a:p>
-        </p:txBody>
-      </p:sp>
-      <p:sp>
-        <p:nvSpPr>
-          <p:cNvPr id="7" name="Rectangle 6"/>
-          <p:cNvSpPr/>
-          <p:nvPr/>
-        </p:nvSpPr>
-        <p:spPr>
-          <a:xfrm>
-            <a:off x="6172200" y="1645920"/>
-            <a:ext cx="5257800" cy="1389888"/>
-          </a:xfrm>
-          <a:prstGeom prst="rect">
-            <a:avLst/>
-          </a:prstGeom>
-          <a:solidFill>
-            <a:srgbClr val="FFFFFF"/>
-          </a:solidFill>
-          <a:ln w="12700">
-            <a:solidFill>
-              <a:srgbClr val="000000"/>
-            </a:solidFill>
-          </a:ln>
-        </p:spPr>
-        <p:style>
-          <a:lnRef idx="1">
-            <a:schemeClr val="accent1"/>
-          </a:lnRef>
-          <a:fillRef idx="3">
-            <a:schemeClr val="accent1"/>
-          </a:fillRef>
-          <a:effectRef idx="2">
-            <a:schemeClr val="accent1"/>
-          </a:effectRef>
-          <a:fontRef idx="minor">
-            <a:schemeClr val="lt1"/>
-          </a:fontRef>
-        </p:style>
-        <p:txBody>
-          <a:bodyPr rtlCol="0" anchor="ctr"/>
-          <a:lstStyle/>
-          <a:p>
-            <a:pPr algn="ctr"/>
-          </a:p>
-        </p:txBody>
-      </p:sp>
-      <p:sp>
-        <p:nvSpPr>
-          <p:cNvPr id="8" name="TextBox 7"/>
-          <p:cNvSpPr txBox="1"/>
-          <p:nvPr/>
-        </p:nvSpPr>
-        <p:spPr>
-          <a:xfrm>
-            <a:off x="6336792" y="1755648"/>
-            <a:ext cx="4928616" cy="1170432"/>
-          </a:xfrm>
-          <a:prstGeom prst="rect">
-            <a:avLst/>
-          </a:prstGeom>
-          <a:noFill/>
-        </p:spPr>
-        <p:txBody>
-          <a:bodyPr wrap="square">
-            <a:spAutoFit/>
-          </a:bodyPr>
-          <a:lstStyle/>
-          <a:p>
-            <a:pPr>
-              <a:spcAft>
-                <a:spcPts val="400"/>
-              </a:spcAft>
-              <a:defRPr sz="1300" b="1">
-                <a:solidFill>
-                  <a:srgbClr val="000000"/>
-                </a:solidFill>
-                <a:latin typeface="Arial"/>
-              </a:defRPr>
-            </a:pPr>
-            <a:r>
-              <a:t>★ Outcome 2: High Predictive Accuracy (R² &gt; 0.85)</a:t>
-            </a:r>
-          </a:p>
-          <a:p>
-            <a:pPr>
-              <a:defRPr sz="1100">
-                <a:solidFill>
-                  <a:srgbClr val="323232"/>
-                </a:solidFill>
-                <a:latin typeface="Arial"/>
-              </a:defRPr>
-            </a:pPr>
-            <a:r>
-              <a:t>The ensemble Random Forest regressor achieves high coefficient of determination (R² &gt; 0.85) and low Root Mean Squared Error on footfall and consumption targets.</a:t>
-            </a:r>
-          </a:p>
-        </p:txBody>
-      </p:sp>
-      <p:sp>
-        <p:nvSpPr>
-          <p:cNvPr id="9" name="Rectangle 8"/>
-          <p:cNvSpPr/>
-          <p:nvPr/>
-        </p:nvSpPr>
-        <p:spPr>
-          <a:xfrm>
-            <a:off x="731520" y="3182112"/>
-            <a:ext cx="5257800" cy="1389888"/>
-          </a:xfrm>
-          <a:prstGeom prst="rect">
-            <a:avLst/>
-          </a:prstGeom>
-          <a:solidFill>
-            <a:srgbClr val="FFFFFF"/>
-          </a:solidFill>
-          <a:ln w="12700">
-            <a:solidFill>
-              <a:srgbClr val="000000"/>
-            </a:solidFill>
-          </a:ln>
-        </p:spPr>
-        <p:style>
-          <a:lnRef idx="1">
-            <a:schemeClr val="accent1"/>
-          </a:lnRef>
-          <a:fillRef idx="3">
-            <a:schemeClr val="accent1"/>
-          </a:fillRef>
-          <a:effectRef idx="2">
-            <a:schemeClr val="accent1"/>
-          </a:effectRef>
-          <a:fontRef idx="minor">
-            <a:schemeClr val="lt1"/>
-          </a:fontRef>
-        </p:style>
-        <p:txBody>
-          <a:bodyPr rtlCol="0" anchor="ctr"/>
-          <a:lstStyle/>
-          <a:p>
-            <a:pPr algn="ctr"/>
-          </a:p>
-        </p:txBody>
-      </p:sp>
-      <p:sp>
-        <p:nvSpPr>
-          <p:cNvPr id="10" name="TextBox 9"/>
-          <p:cNvSpPr txBox="1"/>
-          <p:nvPr/>
-        </p:nvSpPr>
-        <p:spPr>
-          <a:xfrm>
-            <a:off x="896112" y="3291840"/>
-            <a:ext cx="4928616" cy="1170432"/>
-          </a:xfrm>
-          <a:prstGeom prst="rect">
-            <a:avLst/>
-          </a:prstGeom>
-          <a:noFill/>
-        </p:spPr>
-        <p:txBody>
-          <a:bodyPr wrap="square">
-            <a:spAutoFit/>
-          </a:bodyPr>
-          <a:lstStyle/>
-          <a:p>
-            <a:pPr>
-              <a:spcAft>
-                <a:spcPts val="400"/>
-              </a:spcAft>
-              <a:defRPr sz="1300" b="1">
-                <a:solidFill>
-                  <a:srgbClr val="000000"/>
-                </a:solidFill>
-                <a:latin typeface="Arial"/>
-              </a:defRPr>
-            </a:pPr>
-            <a:r>
-              <a:t>★ Outcome 3: Significant Cost Savings for Canteens</a:t>
-            </a:r>
-          </a:p>
-          <a:p>
-            <a:pPr>
-              <a:defRPr sz="1100">
-                <a:solidFill>
-                  <a:srgbClr val="323232"/>
-                </a:solidFill>
-                <a:latin typeface="Arial"/>
-              </a:defRPr>
-            </a:pPr>
-            <a:r>
-              <a:t>Institutional catering management achieves a 15% to 25% cut in raw material procurement expenditure by curbing over-preparation of high-cost items.</a:t>
-            </a:r>
-          </a:p>
-        </p:txBody>
-      </p:sp>
-      <p:sp>
-        <p:nvSpPr>
-          <p:cNvPr id="11" name="Rectangle 10"/>
-          <p:cNvSpPr/>
-          <p:nvPr/>
-        </p:nvSpPr>
-        <p:spPr>
-          <a:xfrm>
-            <a:off x="6172200" y="3182112"/>
-            <a:ext cx="5257800" cy="1389888"/>
-          </a:xfrm>
-          <a:prstGeom prst="rect">
-            <a:avLst/>
-          </a:prstGeom>
-          <a:solidFill>
-            <a:srgbClr val="FFFFFF"/>
-          </a:solidFill>
-          <a:ln w="12700">
-            <a:solidFill>
-              <a:srgbClr val="000000"/>
-            </a:solidFill>
-          </a:ln>
-        </p:spPr>
-        <p:style>
-          <a:lnRef idx="1">
-            <a:schemeClr val="accent1"/>
-          </a:lnRef>
-          <a:fillRef idx="3">
-            <a:schemeClr val="accent1"/>
-          </a:fillRef>
-          <a:effectRef idx="2">
-            <a:schemeClr val="accent1"/>
-          </a:effectRef>
-          <a:fontRef idx="minor">
-            <a:schemeClr val="lt1"/>
-          </a:fontRef>
-        </p:style>
-        <p:txBody>
-          <a:bodyPr rtlCol="0" anchor="ctr"/>
-          <a:lstStyle/>
-          <a:p>
-            <a:pPr algn="ctr"/>
-          </a:p>
-        </p:txBody>
-      </p:sp>
-      <p:sp>
-        <p:nvSpPr>
-          <p:cNvPr id="12" name="TextBox 11"/>
-          <p:cNvSpPr txBox="1"/>
-          <p:nvPr/>
-        </p:nvSpPr>
-        <p:spPr>
-          <a:xfrm>
-            <a:off x="6336792" y="3291840"/>
-            <a:ext cx="4928616" cy="1170432"/>
-          </a:xfrm>
-          <a:prstGeom prst="rect">
-            <a:avLst/>
-          </a:prstGeom>
-          <a:noFill/>
-        </p:spPr>
-        <p:txBody>
-          <a:bodyPr wrap="square">
-            <a:spAutoFit/>
-          </a:bodyPr>
-          <a:lstStyle/>
-          <a:p>
-            <a:pPr>
-              <a:spcAft>
-                <a:spcPts val="400"/>
-              </a:spcAft>
-              <a:defRPr sz="1300" b="1">
-                <a:solidFill>
-                  <a:srgbClr val="000000"/>
-                </a:solidFill>
-                <a:latin typeface="Arial"/>
-              </a:defRPr>
-            </a:pPr>
-            <a:r>
-              <a:t>★ Outcome 4: Zero-Infrastructure Edge Deployment</a:t>
-            </a:r>
-          </a:p>
-          <a:p>
-            <a:pPr>
-              <a:defRPr sz="1100">
-                <a:solidFill>
-                  <a:srgbClr val="323232"/>
-                </a:solidFill>
-                <a:latin typeface="Arial"/>
-              </a:defRPr>
-            </a:pPr>
-            <a:r>
-              <a:t>Seamless on-device execution on existing staff Android smartphones/tablets without demanding expensive IoT weighing hardware or high-spec servers.</a:t>
-            </a:r>
-          </a:p>
-        </p:txBody>
-      </p:sp>
-      <p:sp>
-        <p:nvSpPr>
-          <p:cNvPr id="13" name="Rectangle 12"/>
-          <p:cNvSpPr/>
-          <p:nvPr/>
-        </p:nvSpPr>
-        <p:spPr>
-          <a:xfrm>
-            <a:off x="731520" y="4718304"/>
-            <a:ext cx="5257800" cy="1389888"/>
-          </a:xfrm>
-          <a:prstGeom prst="rect">
-            <a:avLst/>
-          </a:prstGeom>
-          <a:solidFill>
-            <a:srgbClr val="FFFFFF"/>
-          </a:solidFill>
-          <a:ln w="12700">
-            <a:solidFill>
-              <a:srgbClr val="000000"/>
-            </a:solidFill>
-          </a:ln>
-        </p:spPr>
-        <p:style>
-          <a:lnRef idx="1">
-            <a:schemeClr val="accent1"/>
-          </a:lnRef>
-          <a:fillRef idx="3">
-            <a:schemeClr val="accent1"/>
-          </a:fillRef>
-          <a:effectRef idx="2">
-            <a:schemeClr val="accent1"/>
-          </a:effectRef>
-          <a:fontRef idx="minor">
-            <a:schemeClr val="lt1"/>
-          </a:fontRef>
-        </p:style>
-        <p:txBody>
-          <a:bodyPr rtlCol="0" anchor="ctr"/>
-          <a:lstStyle/>
-          <a:p>
-            <a:pPr algn="ctr"/>
-          </a:p>
-        </p:txBody>
-      </p:sp>
-      <p:sp>
-        <p:nvSpPr>
-          <p:cNvPr id="14" name="TextBox 13"/>
-          <p:cNvSpPr txBox="1"/>
-          <p:nvPr/>
-        </p:nvSpPr>
-        <p:spPr>
-          <a:xfrm>
-            <a:off x="896112" y="4828032"/>
-            <a:ext cx="4928616" cy="1170432"/>
-          </a:xfrm>
-          <a:prstGeom prst="rect">
-            <a:avLst/>
-          </a:prstGeom>
-          <a:noFill/>
-        </p:spPr>
-        <p:txBody>
-          <a:bodyPr wrap="square">
-            <a:spAutoFit/>
-          </a:bodyPr>
-          <a:lstStyle/>
-          <a:p>
-            <a:pPr>
-              <a:spcAft>
-                <a:spcPts val="400"/>
-              </a:spcAft>
-              <a:defRPr sz="1300" b="1">
-                <a:solidFill>
-                  <a:srgbClr val="000000"/>
-                </a:solidFill>
-                <a:latin typeface="Arial"/>
-              </a:defRPr>
-            </a:pPr>
-            <a:r>
-              <a:t>★ Outcome 5: Actionable Real-Time Risk Categorization</a:t>
-            </a:r>
-          </a:p>
-          <a:p>
-            <a:pPr>
-              <a:defRPr sz="1100">
-                <a:solidFill>
-                  <a:srgbClr val="323232"/>
-                </a:solidFill>
-                <a:latin typeface="Arial"/>
-              </a:defRPr>
-            </a:pPr>
-            <a:r>
-              <a:t>Instant LOW / MEDIUM / HIGH risk ratings with automated financial loss estimations empower kitchen managers with proactive pre-cook decision support.</a:t>
-            </a:r>
-          </a:p>
-        </p:txBody>
-      </p:sp>
-      <p:sp>
-        <p:nvSpPr>
-          <p:cNvPr id="15" name="Rectangle 14"/>
-          <p:cNvSpPr/>
-          <p:nvPr/>
-        </p:nvSpPr>
-        <p:spPr>
-          <a:xfrm>
-            <a:off x="6172200" y="4718304"/>
-            <a:ext cx="5257800" cy="1389888"/>
-          </a:xfrm>
-          <a:prstGeom prst="rect">
-            <a:avLst/>
-          </a:prstGeom>
-          <a:solidFill>
-            <a:srgbClr val="FFFFFF"/>
-          </a:solidFill>
-          <a:ln w="12700">
-            <a:solidFill>
-              <a:srgbClr val="000000"/>
-            </a:solidFill>
-          </a:ln>
-        </p:spPr>
-        <p:style>
-          <a:lnRef idx="1">
-            <a:schemeClr val="accent1"/>
-          </a:lnRef>
-          <a:fillRef idx="3">
-            <a:schemeClr val="accent1"/>
-          </a:fillRef>
-          <a:effectRef idx="2">
-            <a:schemeClr val="accent1"/>
-          </a:effectRef>
-          <a:fontRef idx="minor">
-            <a:schemeClr val="lt1"/>
-          </a:fontRef>
-        </p:style>
-        <p:txBody>
-          <a:bodyPr rtlCol="0" anchor="ctr"/>
-          <a:lstStyle/>
-          <a:p>
-            <a:pPr algn="ctr"/>
-          </a:p>
-        </p:txBody>
-      </p:sp>
-      <p:sp>
-        <p:nvSpPr>
-          <p:cNvPr id="16" name="TextBox 15"/>
-          <p:cNvSpPr txBox="1"/>
-          <p:nvPr/>
-        </p:nvSpPr>
-        <p:spPr>
-          <a:xfrm>
-            <a:off x="6336792" y="4828032"/>
-            <a:ext cx="4928616" cy="1170432"/>
-          </a:xfrm>
-          <a:prstGeom prst="rect">
-            <a:avLst/>
-          </a:prstGeom>
-          <a:noFill/>
-        </p:spPr>
-        <p:txBody>
-          <a:bodyPr wrap="square">
-            <a:spAutoFit/>
-          </a:bodyPr>
-          <a:lstStyle/>
-          <a:p>
-            <a:pPr>
-              <a:spcAft>
-                <a:spcPts val="400"/>
-              </a:spcAft>
-              <a:defRPr sz="1300" b="1">
-                <a:solidFill>
-                  <a:srgbClr val="000000"/>
-                </a:solidFill>
-                <a:latin typeface="Arial"/>
-              </a:defRPr>
-            </a:pPr>
-            <a:r>
-              <a:t>★ Outcome 6: Environmental Sustainability &amp; Lower Carbon Footprint</a:t>
-            </a:r>
-          </a:p>
-          <a:p>
-            <a:pPr>
-              <a:defRPr sz="1100">
-                <a:solidFill>
-                  <a:srgbClr val="323232"/>
-                </a:solidFill>
-                <a:latin typeface="Arial"/>
-              </a:defRPr>
-            </a:pPr>
-            <a:r>
-              <a:t>Directly curtails greenhouse gas emissions from organic waste decay in local landfills, advancing UN Sustainable Development Goal 12 (Responsible Consumption).</a:t>
-            </a:r>
-          </a:p>
-        </p:txBody>
-      </p:sp>
-    </p:spTree>
-  </p:cSld>
-  <p:clrMapOvr>
-    <a:masterClrMapping/>
-  </p:clrMapOvr>
-</p:sld>
-</file>
-
-<file path=ppt/slides/slide12.xml><?xml version="1.0" encoding="utf-8"?>
-<p:sld xmlns:a="http://schemas.openxmlformats.org/drawingml/2006/main" xmlns:p="http://schemas.openxmlformats.org/presentationml/2006/main" xmlns:r="http://schemas.openxmlformats.org/officeDocument/2006/relationships">
-  <p:cSld>
-    <p:bg>
-      <p:bgPr>
-        <a:solidFill>
-          <a:srgbClr val="FFFFFF"/>
-        </a:solidFill>
-        <a:effectLst/>
-      </p:bgPr>
-    </p:bg>
-    <p:spTree>
-      <p:nvGrpSpPr>
-        <p:cNvPr id="1" name=""/>
-        <p:cNvGrpSpPr/>
-        <p:nvPr/>
-      </p:nvGrpSpPr>
-      <p:grpSpPr/>
-      <p:sp>
-        <p:nvSpPr>
-          <p:cNvPr id="2" name="TextBox 1"/>
-          <p:cNvSpPr txBox="1"/>
-          <p:nvPr/>
-        </p:nvSpPr>
-        <p:spPr>
-          <a:xfrm>
-            <a:off x="731520" y="365760"/>
-            <a:ext cx="10515600" cy="320040"/>
-          </a:xfrm>
-          <a:prstGeom prst="rect">
-            <a:avLst/>
-          </a:prstGeom>
-          <a:noFill/>
-        </p:spPr>
-        <p:txBody>
-          <a:bodyPr wrap="square">
-            <a:spAutoFit/>
-          </a:bodyPr>
-          <a:lstStyle/>
-          <a:p>
-            <a:pPr>
-              <a:defRPr sz="1000" b="1">
-                <a:solidFill>
-                  <a:srgbClr val="323232"/>
-                </a:solidFill>
-                <a:latin typeface="Arial"/>
-              </a:defRPr>
-            </a:pPr>
-            <a:r>
-              <a:t>ACADEMIC &amp; TECHNICAL LITERATURE</a:t>
-            </a:r>
-          </a:p>
-        </p:txBody>
-      </p:sp>
-      <p:sp>
-        <p:nvSpPr>
-          <p:cNvPr id="3" name="TextBox 2"/>
-          <p:cNvSpPr txBox="1"/>
-          <p:nvPr/>
-        </p:nvSpPr>
-        <p:spPr>
-          <a:xfrm>
-            <a:off x="731520" y="640080"/>
-            <a:ext cx="10698480" cy="731520"/>
-          </a:xfrm>
-          <a:prstGeom prst="rect">
-            <a:avLst/>
-          </a:prstGeom>
-          <a:noFill/>
-        </p:spPr>
-        <p:txBody>
-          <a:bodyPr wrap="square">
-            <a:spAutoFit/>
-          </a:bodyPr>
-          <a:lstStyle/>
-          <a:p>
-            <a:pPr>
-              <a:defRPr sz="2400" b="1">
-                <a:solidFill>
-                  <a:srgbClr val="000000"/>
-                </a:solidFill>
-                <a:latin typeface="Arial"/>
-              </a:defRPr>
-            </a:pPr>
-            <a:r>
-              <a:t>References</a:t>
-            </a:r>
-          </a:p>
-        </p:txBody>
-      </p:sp>
-      <p:sp>
-        <p:nvSpPr>
-          <p:cNvPr id="4" name="Rectangle 3"/>
-          <p:cNvSpPr/>
-          <p:nvPr/>
-        </p:nvSpPr>
-        <p:spPr>
-          <a:xfrm>
-            <a:off x="731520" y="1371600"/>
-            <a:ext cx="10728655" cy="18288"/>
-          </a:xfrm>
-          <a:prstGeom prst="rect">
-            <a:avLst/>
-          </a:prstGeom>
-          <a:solidFill>
-            <a:srgbClr val="000000"/>
-          </a:solidFill>
-          <a:ln>
-            <a:solidFill>
-              <a:srgbClr val="000000"/>
-            </a:solidFill>
-          </a:ln>
-        </p:spPr>
-        <p:style>
-          <a:lnRef idx="1">
-            <a:schemeClr val="accent1"/>
-          </a:lnRef>
-          <a:fillRef idx="3">
-            <a:schemeClr val="accent1"/>
-          </a:fillRef>
-          <a:effectRef idx="2">
-            <a:schemeClr val="accent1"/>
-          </a:effectRef>
-          <a:fontRef idx="minor">
-            <a:schemeClr val="lt1"/>
-          </a:fontRef>
-        </p:style>
-        <p:txBody>
-          <a:bodyPr rtlCol="0" anchor="ctr"/>
-          <a:lstStyle/>
-          <a:p>
-            <a:pPr algn="ctr"/>
-          </a:p>
-        </p:txBody>
-      </p:sp>
-      <p:sp>
-        <p:nvSpPr>
-          <p:cNvPr id="5" name="Rectangle 4"/>
-          <p:cNvSpPr/>
-          <p:nvPr/>
-        </p:nvSpPr>
-        <p:spPr>
-          <a:xfrm>
-            <a:off x="731520" y="1645920"/>
-            <a:ext cx="10728655" cy="4663440"/>
-          </a:xfrm>
-          <a:prstGeom prst="rect">
-            <a:avLst/>
-          </a:prstGeom>
-          <a:solidFill>
-            <a:srgbClr val="FFFFFF"/>
-          </a:solidFill>
-          <a:ln w="12700">
-            <a:solidFill>
-              <a:srgbClr val="000000"/>
-            </a:solidFill>
-          </a:ln>
-        </p:spPr>
-        <p:style>
-          <a:lnRef idx="1">
-            <a:schemeClr val="accent1"/>
-          </a:lnRef>
-          <a:fillRef idx="3">
-            <a:schemeClr val="accent1"/>
-          </a:fillRef>
-          <a:effectRef idx="2">
-            <a:schemeClr val="accent1"/>
-          </a:effectRef>
-          <a:fontRef idx="minor">
-            <a:schemeClr val="lt1"/>
-          </a:fontRef>
-        </p:style>
-        <p:txBody>
-          <a:bodyPr rtlCol="0" anchor="ctr"/>
-          <a:lstStyle/>
-          <a:p>
-            <a:pPr algn="ctr"/>
-          </a:p>
-        </p:txBody>
-      </p:sp>
-      <p:sp>
-        <p:nvSpPr>
-          <p:cNvPr id="6" name="TextBox 5"/>
-          <p:cNvSpPr txBox="1"/>
-          <p:nvPr/>
-        </p:nvSpPr>
-        <p:spPr>
-          <a:xfrm>
-            <a:off x="914400" y="1783080"/>
-            <a:ext cx="10332720" cy="4389120"/>
-          </a:xfrm>
-          <a:prstGeom prst="rect">
-            <a:avLst/>
-          </a:prstGeom>
-          <a:noFill/>
-        </p:spPr>
-        <p:txBody>
-          <a:bodyPr wrap="square">
-            <a:spAutoFit/>
-          </a:bodyPr>
-          <a:lstStyle/>
-          <a:p>
-            <a:pPr>
-              <a:spcAft>
-                <a:spcPts val="800"/>
-              </a:spcAft>
-              <a:defRPr sz="1100">
-                <a:solidFill>
-                  <a:srgbClr val="323232"/>
-                </a:solidFill>
-                <a:latin typeface="Arial"/>
-              </a:defRPr>
-            </a:pPr>
-            <a:r>
-              <a:t>[1] Food and Agriculture Organization (FAO) of the United Nations, "Food Wastage Footprint: Impacts on Natural Resources," Technical Report, Rome, 2021.</a:t>
-            </a:r>
-          </a:p>
-          <a:p>
-            <a:pPr>
-              <a:spcAft>
-                <a:spcPts val="800"/>
-              </a:spcAft>
-              <a:defRPr sz="1100">
-                <a:solidFill>
-                  <a:srgbClr val="323232"/>
-                </a:solidFill>
-                <a:latin typeface="Arial"/>
-              </a:defRPr>
-            </a:pPr>
-            <a:r>
-              <a:t>[2] M. Eriksson, C. Malefors, and I. Strid, "Food waste in educational catering: Quantities, causes and prevention strategies," Resources, Conservation &amp; Recycling, vol. 138, pp. 245–253, 2018.</a:t>
-            </a:r>
-          </a:p>
-          <a:p>
-            <a:pPr>
-              <a:spcAft>
-                <a:spcPts val="800"/>
-              </a:spcAft>
-              <a:defRPr sz="1100">
-                <a:solidFill>
-                  <a:srgbClr val="323232"/>
-                </a:solidFill>
-                <a:latin typeface="Arial"/>
-              </a:defRPr>
-            </a:pPr>
-            <a:r>
-              <a:t>[3] M. A. Stockle, B. Higgins, and A. R. Davis, "Smart Waste Audit System: IoT-Driven Waste Tracking in Food Service Establishments," IEEE Access, vol. 8, pp. 112450–112462, 2020.</a:t>
-            </a:r>
-          </a:p>
-          <a:p>
-            <a:pPr>
-              <a:spcAft>
-                <a:spcPts val="800"/>
-              </a:spcAft>
-              <a:defRPr sz="1100">
-                <a:solidFill>
-                  <a:srgbClr val="323232"/>
-                </a:solidFill>
-                <a:latin typeface="Arial"/>
-              </a:defRPr>
-            </a:pPr>
-            <a:r>
-              <a:t>[4] R. Vidal, L. Sanchez, and J. Martinez, "Predictive Machine Learning Modeling for Demand Forecasting in Institutional Dining Centers," Journal of Cleaner Production, vol. 294, p. 126201, 2021.</a:t>
-            </a:r>
-          </a:p>
-          <a:p>
-            <a:pPr>
-              <a:spcAft>
-                <a:spcPts val="800"/>
-              </a:spcAft>
-              <a:defRPr sz="1100">
-                <a:solidFill>
-                  <a:srgbClr val="323232"/>
-                </a:solidFill>
-                <a:latin typeface="Arial"/>
-              </a:defRPr>
-            </a:pPr>
-            <a:r>
-              <a:t>[5] P. Gaur, A. K. Singh, and S. Kumar, "Comparative Evaluation of Regression and Ensemble Algorithms for Food Demand Forecasting," Springer Nature Applied Sciences, vol. 4, no. 6, pp. 1–14, 2022.</a:t>
-            </a:r>
-          </a:p>
-          <a:p>
-            <a:pPr>
-              <a:spcAft>
-                <a:spcPts val="800"/>
-              </a:spcAft>
-              <a:defRPr sz="1100">
-                <a:solidFill>
-                  <a:srgbClr val="323232"/>
-                </a:solidFill>
-                <a:latin typeface="Arial"/>
-              </a:defRPr>
-            </a:pPr>
-            <a:r>
-              <a:t>[6] L. Breiman, "Random Forests," Machine Learning, vol. 45, no. 1, pp. 5–32, 2001.</a:t>
-            </a:r>
-          </a:p>
-          <a:p>
-            <a:pPr>
-              <a:spcAft>
-                <a:spcPts val="800"/>
-              </a:spcAft>
-              <a:defRPr sz="1100">
-                <a:solidFill>
-                  <a:srgbClr val="323232"/>
-                </a:solidFill>
-                <a:latin typeface="Arial"/>
-              </a:defRPr>
-            </a:pPr>
-            <a:r>
-              <a:t>[7] Google Developers, "Jetpack Compose &amp; Android Architecture Components Documentation," Google LLC, 2024. [Online]. Available: https://developer.android.com/jetpack/compose</a:t>
-            </a:r>
-          </a:p>
-          <a:p>
-            <a:pPr>
-              <a:spcAft>
-                <a:spcPts val="800"/>
-              </a:spcAft>
-              <a:defRPr sz="1100">
-                <a:solidFill>
-                  <a:srgbClr val="323232"/>
-                </a:solidFill>
-                <a:latin typeface="Arial"/>
-              </a:defRPr>
-            </a:pPr>
-            <a:r>
-              <a:t>[8] Google DeepMind, "Gemini: A Family of Highly Capable Multimodal Models," Technical Whitepaper, 2024. [Online]. Available: https://ai.google.dev</a:t>
-            </a:r>
-          </a:p>
-        </p:txBody>
-      </p:sp>
-    </p:spTree>
-  </p:cSld>
-  <p:clrMapOvr>
-    <a:masterClrMapping/>
-  </p:clrMapOvr>
-</p:sld>
-</file>
-
-<file path=ppt/slides/slide2.xml><?xml version="1.0" encoding="utf-8"?>
-<p:sld xmlns:a="http://schemas.openxmlformats.org/drawingml/2006/main" xmlns:p="http://schemas.openxmlformats.org/presentationml/2006/main" xmlns:r="http://schemas.openxmlformats.org/officeDocument/2006/relationships">
-  <p:cSld>
-    <p:bg>
-      <p:bgPr>
-        <a:solidFill>
-          <a:srgbClr val="FFFFFF"/>
-        </a:solidFill>
-        <a:effectLst/>
-      </p:bgPr>
-    </p:bg>
-    <p:spTree>
-      <p:nvGrpSpPr>
-        <p:cNvPr id="1" name=""/>
-        <p:cNvGrpSpPr/>
-        <p:nvPr/>
-      </p:nvGrpSpPr>
-      <p:grpSpPr/>
-      <p:sp>
-        <p:nvSpPr>
-          <p:cNvPr id="2" name="TextBox 1"/>
-          <p:cNvSpPr txBox="1"/>
-          <p:nvPr/>
-        </p:nvSpPr>
-        <p:spPr>
-          <a:xfrm>
-            <a:off x="731520" y="365760"/>
-            <a:ext cx="10515600" cy="320040"/>
-          </a:xfrm>
-          <a:prstGeom prst="rect">
-            <a:avLst/>
-          </a:prstGeom>
-          <a:noFill/>
-        </p:spPr>
-        <p:txBody>
-          <a:bodyPr wrap="square">
-            <a:spAutoFit/>
-          </a:bodyPr>
-          <a:lstStyle/>
-          <a:p>
-            <a:pPr>
-              <a:defRPr sz="1000" b="1">
-                <a:solidFill>
-                  <a:srgbClr val="323232"/>
-                </a:solidFill>
-                <a:latin typeface="Arial"/>
-              </a:defRPr>
-            </a:pPr>
-            <a:r>
-              <a:t>OVERVIEW</a:t>
-            </a:r>
-          </a:p>
-        </p:txBody>
-      </p:sp>
-      <p:sp>
-        <p:nvSpPr>
-          <p:cNvPr id="3" name="TextBox 2"/>
-          <p:cNvSpPr txBox="1"/>
-          <p:nvPr/>
-        </p:nvSpPr>
-        <p:spPr>
-          <a:xfrm>
-            <a:off x="731520" y="640080"/>
-            <a:ext cx="10698480" cy="731520"/>
-          </a:xfrm>
-          <a:prstGeom prst="rect">
-            <a:avLst/>
-          </a:prstGeom>
-          <a:noFill/>
-        </p:spPr>
-        <p:txBody>
-          <a:bodyPr wrap="square">
-            <a:spAutoFit/>
-          </a:bodyPr>
-          <a:lstStyle/>
-          <a:p>
-            <a:pPr>
-              <a:defRPr sz="2400" b="1">
-                <a:solidFill>
-                  <a:srgbClr val="000000"/>
-                </a:solidFill>
-                <a:latin typeface="Arial"/>
-              </a:defRPr>
-            </a:pPr>
-            <a:r>
-              <a:t>Agenda</a:t>
-            </a:r>
-          </a:p>
-        </p:txBody>
-      </p:sp>
-      <p:sp>
-        <p:nvSpPr>
-          <p:cNvPr id="4" name="Rectangle 3"/>
-          <p:cNvSpPr/>
-          <p:nvPr/>
-        </p:nvSpPr>
-        <p:spPr>
-          <a:xfrm>
-            <a:off x="731520" y="1371600"/>
-            <a:ext cx="10728655" cy="18288"/>
-          </a:xfrm>
-          <a:prstGeom prst="rect">
-            <a:avLst/>
-          </a:prstGeom>
-          <a:solidFill>
-            <a:srgbClr val="000000"/>
-          </a:solidFill>
-          <a:ln>
-            <a:solidFill>
-              <a:srgbClr val="000000"/>
-            </a:solidFill>
-          </a:ln>
-        </p:spPr>
-        <p:style>
-          <a:lnRef idx="1">
-            <a:schemeClr val="accent1"/>
-          </a:lnRef>
-          <a:fillRef idx="3">
-            <a:schemeClr val="accent1"/>
-          </a:fillRef>
-          <a:effectRef idx="2">
-            <a:schemeClr val="accent1"/>
-          </a:effectRef>
-          <a:fontRef idx="minor">
-            <a:schemeClr val="lt1"/>
-          </a:fontRef>
-        </p:style>
-        <p:txBody>
-          <a:bodyPr rtlCol="0" anchor="ctr"/>
-          <a:lstStyle/>
-          <a:p>
-            <a:pPr algn="ctr"/>
-          </a:p>
-        </p:txBody>
-      </p:sp>
-      <p:sp>
-        <p:nvSpPr>
-          <p:cNvPr id="5" name="Rectangle 4"/>
-          <p:cNvSpPr/>
-          <p:nvPr/>
-        </p:nvSpPr>
-        <p:spPr>
-          <a:xfrm>
-            <a:off x="731520" y="1645920"/>
-            <a:ext cx="5257800" cy="804672"/>
-          </a:xfrm>
-          <a:prstGeom prst="rect">
-            <a:avLst/>
-          </a:prstGeom>
-          <a:solidFill>
-            <a:srgbClr val="FFFFFF"/>
-          </a:solidFill>
-          <a:ln w="12700">
-            <a:solidFill>
-              <a:srgbClr val="000000"/>
-            </a:solidFill>
-          </a:ln>
-        </p:spPr>
-        <p:style>
-          <a:lnRef idx="1">
-            <a:schemeClr val="accent1"/>
-          </a:lnRef>
-          <a:fillRef idx="3">
-            <a:schemeClr val="accent1"/>
-          </a:fillRef>
-          <a:effectRef idx="2">
-            <a:schemeClr val="accent1"/>
-          </a:effectRef>
-          <a:fontRef idx="minor">
-            <a:schemeClr val="lt1"/>
-          </a:fontRef>
-        </p:style>
-        <p:txBody>
-          <a:bodyPr rtlCol="0" anchor="ctr"/>
-          <a:lstStyle/>
-          <a:p>
-            <a:pPr algn="ctr"/>
-          </a:p>
-        </p:txBody>
-      </p:sp>
-      <p:sp>
-        <p:nvSpPr>
-          <p:cNvPr id="6" name="TextBox 5"/>
-          <p:cNvSpPr txBox="1"/>
-          <p:nvPr/>
-        </p:nvSpPr>
-        <p:spPr>
-          <a:xfrm>
-            <a:off x="868680" y="1719072"/>
-            <a:ext cx="4983480" cy="658368"/>
-          </a:xfrm>
-          <a:prstGeom prst="rect">
-            <a:avLst/>
-          </a:prstGeom>
-          <a:noFill/>
-        </p:spPr>
-        <p:txBody>
-          <a:bodyPr wrap="square">
-            <a:spAutoFit/>
-          </a:bodyPr>
-          <a:lstStyle/>
-          <a:p>
-            <a:pPr>
-              <a:defRPr sz="1300" b="1">
-                <a:solidFill>
-                  <a:srgbClr val="000000"/>
-                </a:solidFill>
-                <a:latin typeface="Arial"/>
-              </a:defRPr>
-            </a:pPr>
-            <a:r>
-              <a:t>Slide 3  •  Introduction &amp; Problem Statement</a:t>
-            </a:r>
-          </a:p>
-          <a:p>
-            <a:pPr>
-              <a:defRPr sz="1100">
-                <a:solidFill>
-                  <a:srgbClr val="323232"/>
-                </a:solidFill>
-                <a:latin typeface="Arial"/>
-              </a:defRPr>
-            </a:pPr>
-            <a:r>
-              <a:t>Understanding the food waste crisis in institutional kitchens</a:t>
-            </a:r>
-          </a:p>
-        </p:txBody>
-      </p:sp>
-      <p:sp>
-        <p:nvSpPr>
-          <p:cNvPr id="7" name="Rectangle 6"/>
-          <p:cNvSpPr/>
-          <p:nvPr/>
-        </p:nvSpPr>
-        <p:spPr>
-          <a:xfrm>
-            <a:off x="6172200" y="1645920"/>
-            <a:ext cx="5257800" cy="804672"/>
-          </a:xfrm>
-          <a:prstGeom prst="rect">
-            <a:avLst/>
-          </a:prstGeom>
-          <a:solidFill>
-            <a:srgbClr val="FFFFFF"/>
-          </a:solidFill>
-          <a:ln w="12700">
-            <a:solidFill>
-              <a:srgbClr val="000000"/>
-            </a:solidFill>
-          </a:ln>
-        </p:spPr>
-        <p:style>
-          <a:lnRef idx="1">
-            <a:schemeClr val="accent1"/>
-          </a:lnRef>
-          <a:fillRef idx="3">
-            <a:schemeClr val="accent1"/>
-          </a:fillRef>
-          <a:effectRef idx="2">
-            <a:schemeClr val="accent1"/>
-          </a:effectRef>
-          <a:fontRef idx="minor">
-            <a:schemeClr val="lt1"/>
-          </a:fontRef>
-        </p:style>
-        <p:txBody>
-          <a:bodyPr rtlCol="0" anchor="ctr"/>
-          <a:lstStyle/>
-          <a:p>
-            <a:pPr algn="ctr"/>
-          </a:p>
-        </p:txBody>
-      </p:sp>
-      <p:sp>
-        <p:nvSpPr>
-          <p:cNvPr id="8" name="TextBox 7"/>
-          <p:cNvSpPr txBox="1"/>
-          <p:nvPr/>
-        </p:nvSpPr>
-        <p:spPr>
-          <a:xfrm>
-            <a:off x="6309360" y="1719072"/>
-            <a:ext cx="4983480" cy="658368"/>
-          </a:xfrm>
-          <a:prstGeom prst="rect">
-            <a:avLst/>
-          </a:prstGeom>
-          <a:noFill/>
-        </p:spPr>
-        <p:txBody>
-          <a:bodyPr wrap="square">
-            <a:spAutoFit/>
-          </a:bodyPr>
-          <a:lstStyle/>
-          <a:p>
-            <a:pPr>
-              <a:defRPr sz="1300" b="1">
-                <a:solidFill>
-                  <a:srgbClr val="000000"/>
-                </a:solidFill>
-                <a:latin typeface="Arial"/>
-              </a:defRPr>
-            </a:pPr>
-            <a:r>
-              <a:t>Slide 4  •  Project Objectives</a:t>
-            </a:r>
-          </a:p>
-          <a:p>
-            <a:pPr>
-              <a:defRPr sz="1100">
-                <a:solidFill>
-                  <a:srgbClr val="323232"/>
-                </a:solidFill>
-                <a:latin typeface="Arial"/>
-              </a:defRPr>
-            </a:pPr>
-            <a:r>
-              <a:t>Key goals, scope, and technical ambitions of WasteWise AI</a:t>
-            </a:r>
-          </a:p>
-        </p:txBody>
-      </p:sp>
-      <p:sp>
-        <p:nvSpPr>
-          <p:cNvPr id="9" name="Rectangle 8"/>
-          <p:cNvSpPr/>
-          <p:nvPr/>
-        </p:nvSpPr>
-        <p:spPr>
-          <a:xfrm>
-            <a:off x="731520" y="2560320"/>
-            <a:ext cx="5257800" cy="804672"/>
-          </a:xfrm>
-          <a:prstGeom prst="rect">
-            <a:avLst/>
-          </a:prstGeom>
-          <a:solidFill>
-            <a:srgbClr val="FFFFFF"/>
-          </a:solidFill>
-          <a:ln w="12700">
-            <a:solidFill>
-              <a:srgbClr val="000000"/>
-            </a:solidFill>
-          </a:ln>
-        </p:spPr>
-        <p:style>
-          <a:lnRef idx="1">
-            <a:schemeClr val="accent1"/>
-          </a:lnRef>
-          <a:fillRef idx="3">
-            <a:schemeClr val="accent1"/>
-          </a:fillRef>
-          <a:effectRef idx="2">
-            <a:schemeClr val="accent1"/>
-          </a:effectRef>
-          <a:fontRef idx="minor">
-            <a:schemeClr val="lt1"/>
-          </a:fontRef>
-        </p:style>
-        <p:txBody>
-          <a:bodyPr rtlCol="0" anchor="ctr"/>
-          <a:lstStyle/>
-          <a:p>
-            <a:pPr algn="ctr"/>
-          </a:p>
-        </p:txBody>
-      </p:sp>
-      <p:sp>
-        <p:nvSpPr>
-          <p:cNvPr id="10" name="TextBox 9"/>
-          <p:cNvSpPr txBox="1"/>
-          <p:nvPr/>
-        </p:nvSpPr>
-        <p:spPr>
-          <a:xfrm>
-            <a:off x="868680" y="2633472"/>
-            <a:ext cx="4983480" cy="658368"/>
-          </a:xfrm>
-          <a:prstGeom prst="rect">
-            <a:avLst/>
-          </a:prstGeom>
-          <a:noFill/>
-        </p:spPr>
-        <p:txBody>
-          <a:bodyPr wrap="square">
-            <a:spAutoFit/>
-          </a:bodyPr>
-          <a:lstStyle/>
-          <a:p>
-            <a:pPr>
-              <a:defRPr sz="1300" b="1">
-                <a:solidFill>
-                  <a:srgbClr val="000000"/>
-                </a:solidFill>
-                <a:latin typeface="Arial"/>
-              </a:defRPr>
-            </a:pPr>
-            <a:r>
-              <a:t>Slide 5  •  Literature Survey</a:t>
-            </a:r>
-          </a:p>
-          <a:p>
-            <a:pPr>
-              <a:defRPr sz="1100">
-                <a:solidFill>
-                  <a:srgbClr val="323232"/>
-                </a:solidFill>
-                <a:latin typeface="Arial"/>
-              </a:defRPr>
-            </a:pPr>
-            <a:r>
-              <a:t>Analysis of existing research, methodologies, and identified gaps</a:t>
-            </a:r>
-          </a:p>
-        </p:txBody>
-      </p:sp>
-      <p:sp>
-        <p:nvSpPr>
-          <p:cNvPr id="11" name="Rectangle 10"/>
-          <p:cNvSpPr/>
-          <p:nvPr/>
-        </p:nvSpPr>
-        <p:spPr>
-          <a:xfrm>
-            <a:off x="6172200" y="2560320"/>
-            <a:ext cx="5257800" cy="804672"/>
-          </a:xfrm>
-          <a:prstGeom prst="rect">
-            <a:avLst/>
-          </a:prstGeom>
-          <a:solidFill>
-            <a:srgbClr val="FFFFFF"/>
-          </a:solidFill>
-          <a:ln w="12700">
-            <a:solidFill>
-              <a:srgbClr val="000000"/>
-            </a:solidFill>
-          </a:ln>
-        </p:spPr>
-        <p:style>
-          <a:lnRef idx="1">
-            <a:schemeClr val="accent1"/>
-          </a:lnRef>
-          <a:fillRef idx="3">
-            <a:schemeClr val="accent1"/>
-          </a:fillRef>
-          <a:effectRef idx="2">
-            <a:schemeClr val="accent1"/>
-          </a:effectRef>
-          <a:fontRef idx="minor">
-            <a:schemeClr val="lt1"/>
-          </a:fontRef>
-        </p:style>
-        <p:txBody>
-          <a:bodyPr rtlCol="0" anchor="ctr"/>
-          <a:lstStyle/>
-          <a:p>
-            <a:pPr algn="ctr"/>
-          </a:p>
-        </p:txBody>
-      </p:sp>
-      <p:sp>
-        <p:nvSpPr>
-          <p:cNvPr id="12" name="TextBox 11"/>
-          <p:cNvSpPr txBox="1"/>
-          <p:nvPr/>
-        </p:nvSpPr>
-        <p:spPr>
-          <a:xfrm>
-            <a:off x="6309360" y="2633472"/>
-            <a:ext cx="4983480" cy="658368"/>
-          </a:xfrm>
-          <a:prstGeom prst="rect">
-            <a:avLst/>
-          </a:prstGeom>
-          <a:noFill/>
-        </p:spPr>
-        <p:txBody>
-          <a:bodyPr wrap="square">
-            <a:spAutoFit/>
-          </a:bodyPr>
-          <a:lstStyle/>
-          <a:p>
-            <a:pPr>
-              <a:defRPr sz="1300" b="1">
-                <a:solidFill>
-                  <a:srgbClr val="000000"/>
-                </a:solidFill>
-                <a:latin typeface="Arial"/>
-              </a:defRPr>
-            </a:pPr>
-            <a:r>
-              <a:t>Slide 6  •  Existing vs. Proposed System</a:t>
-            </a:r>
-          </a:p>
-          <a:p>
-            <a:pPr>
-              <a:defRPr sz="1100">
-                <a:solidFill>
-                  <a:srgbClr val="323232"/>
-                </a:solidFill>
-                <a:latin typeface="Arial"/>
-              </a:defRPr>
-            </a:pPr>
-            <a:r>
-              <a:t>Comparative analysis highlighting key technological improvements</a:t>
-            </a:r>
-          </a:p>
-        </p:txBody>
-      </p:sp>
-      <p:sp>
-        <p:nvSpPr>
-          <p:cNvPr id="13" name="Rectangle 12"/>
-          <p:cNvSpPr/>
-          <p:nvPr/>
-        </p:nvSpPr>
-        <p:spPr>
-          <a:xfrm>
-            <a:off x="731520" y="3474720"/>
-            <a:ext cx="5257800" cy="804672"/>
-          </a:xfrm>
-          <a:prstGeom prst="rect">
-            <a:avLst/>
-          </a:prstGeom>
-          <a:solidFill>
-            <a:srgbClr val="FFFFFF"/>
-          </a:solidFill>
-          <a:ln w="12700">
-            <a:solidFill>
-              <a:srgbClr val="000000"/>
-            </a:solidFill>
-          </a:ln>
-        </p:spPr>
-        <p:style>
-          <a:lnRef idx="1">
-            <a:schemeClr val="accent1"/>
-          </a:lnRef>
-          <a:fillRef idx="3">
-            <a:schemeClr val="accent1"/>
-          </a:fillRef>
-          <a:effectRef idx="2">
-            <a:schemeClr val="accent1"/>
-          </a:effectRef>
-          <a:fontRef idx="minor">
-            <a:schemeClr val="lt1"/>
-          </a:fontRef>
-        </p:style>
-        <p:txBody>
-          <a:bodyPr rtlCol="0" anchor="ctr"/>
-          <a:lstStyle/>
-          <a:p>
-            <a:pPr algn="ctr"/>
-          </a:p>
-        </p:txBody>
-      </p:sp>
-      <p:sp>
-        <p:nvSpPr>
-          <p:cNvPr id="14" name="TextBox 13"/>
-          <p:cNvSpPr txBox="1"/>
-          <p:nvPr/>
-        </p:nvSpPr>
-        <p:spPr>
-          <a:xfrm>
-            <a:off x="868680" y="3547872"/>
-            <a:ext cx="4983480" cy="658368"/>
-          </a:xfrm>
-          <a:prstGeom prst="rect">
-            <a:avLst/>
-          </a:prstGeom>
-          <a:noFill/>
-        </p:spPr>
-        <p:txBody>
-          <a:bodyPr wrap="square">
-            <a:spAutoFit/>
-          </a:bodyPr>
-          <a:lstStyle/>
-          <a:p>
-            <a:pPr>
-              <a:defRPr sz="1300" b="1">
-                <a:solidFill>
-                  <a:srgbClr val="000000"/>
-                </a:solidFill>
-                <a:latin typeface="Arial"/>
-              </a:defRPr>
-            </a:pPr>
-            <a:r>
-              <a:t>Slide 7  •  System Requirements</a:t>
-            </a:r>
-          </a:p>
-          <a:p>
-            <a:pPr>
-              <a:defRPr sz="1100">
-                <a:solidFill>
-                  <a:srgbClr val="323232"/>
-                </a:solidFill>
-                <a:latin typeface="Arial"/>
-              </a:defRPr>
-            </a:pPr>
-            <a:r>
-              <a:t>Hardware and software specifications for development and deployment</a:t>
-            </a:r>
-          </a:p>
-        </p:txBody>
-      </p:sp>
-      <p:sp>
-        <p:nvSpPr>
-          <p:cNvPr id="15" name="Rectangle 14"/>
-          <p:cNvSpPr/>
-          <p:nvPr/>
-        </p:nvSpPr>
-        <p:spPr>
-          <a:xfrm>
-            <a:off x="6172200" y="3474720"/>
-            <a:ext cx="5257800" cy="804672"/>
-          </a:xfrm>
-          <a:prstGeom prst="rect">
-            <a:avLst/>
-          </a:prstGeom>
-          <a:solidFill>
-            <a:srgbClr val="FFFFFF"/>
-          </a:solidFill>
-          <a:ln w="12700">
-            <a:solidFill>
-              <a:srgbClr val="000000"/>
-            </a:solidFill>
-          </a:ln>
-        </p:spPr>
-        <p:style>
-          <a:lnRef idx="1">
-            <a:schemeClr val="accent1"/>
-          </a:lnRef>
-          <a:fillRef idx="3">
-            <a:schemeClr val="accent1"/>
-          </a:fillRef>
-          <a:effectRef idx="2">
-            <a:schemeClr val="accent1"/>
-          </a:effectRef>
-          <a:fontRef idx="minor">
-            <a:schemeClr val="lt1"/>
-          </a:fontRef>
-        </p:style>
-        <p:txBody>
-          <a:bodyPr rtlCol="0" anchor="ctr"/>
-          <a:lstStyle/>
-          <a:p>
-            <a:pPr algn="ctr"/>
-          </a:p>
-        </p:txBody>
-      </p:sp>
-      <p:sp>
-        <p:nvSpPr>
-          <p:cNvPr id="16" name="TextBox 15"/>
-          <p:cNvSpPr txBox="1"/>
-          <p:nvPr/>
-        </p:nvSpPr>
-        <p:spPr>
-          <a:xfrm>
-            <a:off x="6309360" y="3547872"/>
-            <a:ext cx="4983480" cy="658368"/>
-          </a:xfrm>
-          <a:prstGeom prst="rect">
-            <a:avLst/>
-          </a:prstGeom>
-          <a:noFill/>
-        </p:spPr>
-        <p:txBody>
-          <a:bodyPr wrap="square">
-            <a:spAutoFit/>
-          </a:bodyPr>
-          <a:lstStyle/>
-          <a:p>
-            <a:pPr>
-              <a:defRPr sz="1300" b="1">
-                <a:solidFill>
-                  <a:srgbClr val="000000"/>
-                </a:solidFill>
-                <a:latin typeface="Arial"/>
-              </a:defRPr>
-            </a:pPr>
-            <a:r>
-              <a:t>Slide 8  •  Proposed Methodology &amp; Architecture</a:t>
-            </a:r>
-          </a:p>
-          <a:p>
-            <a:pPr>
-              <a:defRPr sz="1100">
-                <a:solidFill>
-                  <a:srgbClr val="323232"/>
-                </a:solidFill>
-                <a:latin typeface="Arial"/>
-              </a:defRPr>
-            </a:pPr>
-            <a:r>
-              <a:t>End-to-end system flow, ML pipeline, and architectural modules</a:t>
-            </a:r>
-          </a:p>
-        </p:txBody>
-      </p:sp>
-      <p:sp>
-        <p:nvSpPr>
-          <p:cNvPr id="17" name="Rectangle 16"/>
-          <p:cNvSpPr/>
-          <p:nvPr/>
-        </p:nvSpPr>
-        <p:spPr>
-          <a:xfrm>
-            <a:off x="731520" y="4389120"/>
-            <a:ext cx="5257800" cy="804672"/>
-          </a:xfrm>
-          <a:prstGeom prst="rect">
-            <a:avLst/>
-          </a:prstGeom>
-          <a:solidFill>
-            <a:srgbClr val="FFFFFF"/>
-          </a:solidFill>
-          <a:ln w="12700">
-            <a:solidFill>
-              <a:srgbClr val="000000"/>
-            </a:solidFill>
-          </a:ln>
-        </p:spPr>
-        <p:style>
-          <a:lnRef idx="1">
-            <a:schemeClr val="accent1"/>
-          </a:lnRef>
-          <a:fillRef idx="3">
-            <a:schemeClr val="accent1"/>
-          </a:fillRef>
-          <a:effectRef idx="2">
-            <a:schemeClr val="accent1"/>
-          </a:effectRef>
-          <a:fontRef idx="minor">
-            <a:schemeClr val="lt1"/>
-          </a:fontRef>
-        </p:style>
-        <p:txBody>
-          <a:bodyPr rtlCol="0" anchor="ctr"/>
-          <a:lstStyle/>
-          <a:p>
-            <a:pPr algn="ctr"/>
-          </a:p>
-        </p:txBody>
-      </p:sp>
-      <p:sp>
-        <p:nvSpPr>
-          <p:cNvPr id="18" name="TextBox 17"/>
-          <p:cNvSpPr txBox="1"/>
-          <p:nvPr/>
-        </p:nvSpPr>
-        <p:spPr>
-          <a:xfrm>
-            <a:off x="868680" y="4462272"/>
-            <a:ext cx="4983480" cy="658368"/>
-          </a:xfrm>
-          <a:prstGeom prst="rect">
-            <a:avLst/>
-          </a:prstGeom>
-          <a:noFill/>
-        </p:spPr>
-        <p:txBody>
-          <a:bodyPr wrap="square">
-            <a:spAutoFit/>
-          </a:bodyPr>
-          <a:lstStyle/>
-          <a:p>
-            <a:pPr>
-              <a:defRPr sz="1300" b="1">
-                <a:solidFill>
-                  <a:srgbClr val="000000"/>
-                </a:solidFill>
-                <a:latin typeface="Arial"/>
-              </a:defRPr>
-            </a:pPr>
-            <a:r>
-              <a:t>Slide 9  •  Work Completed So Far</a:t>
-            </a:r>
-          </a:p>
-          <a:p>
-            <a:pPr>
-              <a:defRPr sz="1100">
-                <a:solidFill>
-                  <a:srgbClr val="323232"/>
-                </a:solidFill>
-                <a:latin typeface="Arial"/>
-              </a:defRPr>
-            </a:pPr>
-            <a:r>
-              <a:t>Milestones achieved, algorithm implementation, dataset &amp; UI modules</a:t>
-            </a:r>
-          </a:p>
-        </p:txBody>
-      </p:sp>
-      <p:sp>
-        <p:nvSpPr>
-          <p:cNvPr id="19" name="Rectangle 18"/>
-          <p:cNvSpPr/>
-          <p:nvPr/>
-        </p:nvSpPr>
-        <p:spPr>
-          <a:xfrm>
-            <a:off x="6172200" y="4389120"/>
-            <a:ext cx="5257800" cy="804672"/>
-          </a:xfrm>
-          <a:prstGeom prst="rect">
-            <a:avLst/>
-          </a:prstGeom>
-          <a:solidFill>
-            <a:srgbClr val="FFFFFF"/>
-          </a:solidFill>
-          <a:ln w="12700">
-            <a:solidFill>
-              <a:srgbClr val="000000"/>
-            </a:solidFill>
-          </a:ln>
-        </p:spPr>
-        <p:style>
-          <a:lnRef idx="1">
-            <a:schemeClr val="accent1"/>
-          </a:lnRef>
-          <a:fillRef idx="3">
-            <a:schemeClr val="accent1"/>
-          </a:fillRef>
-          <a:effectRef idx="2">
-            <a:schemeClr val="accent1"/>
-          </a:effectRef>
-          <a:fontRef idx="minor">
-            <a:schemeClr val="lt1"/>
-          </a:fontRef>
-        </p:style>
-        <p:txBody>
-          <a:bodyPr rtlCol="0" anchor="ctr"/>
-          <a:lstStyle/>
-          <a:p>
-            <a:pPr algn="ctr"/>
-          </a:p>
-        </p:txBody>
-      </p:sp>
-      <p:sp>
-        <p:nvSpPr>
-          <p:cNvPr id="20" name="TextBox 19"/>
-          <p:cNvSpPr txBox="1"/>
-          <p:nvPr/>
-        </p:nvSpPr>
-        <p:spPr>
-          <a:xfrm>
-            <a:off x="6309360" y="4462272"/>
-            <a:ext cx="4983480" cy="658368"/>
-          </a:xfrm>
-          <a:prstGeom prst="rect">
-            <a:avLst/>
-          </a:prstGeom>
-          <a:noFill/>
-        </p:spPr>
-        <p:txBody>
-          <a:bodyPr wrap="square">
-            <a:spAutoFit/>
-          </a:bodyPr>
-          <a:lstStyle/>
-          <a:p>
-            <a:pPr>
-              <a:defRPr sz="1300" b="1">
-                <a:solidFill>
-                  <a:srgbClr val="000000"/>
-                </a:solidFill>
-                <a:latin typeface="Arial"/>
-              </a:defRPr>
-            </a:pPr>
-            <a:r>
-              <a:t>Slide 10  •  Work Plan for Next Review</a:t>
-            </a:r>
-          </a:p>
-          <a:p>
-            <a:pPr>
-              <a:defRPr sz="1100">
-                <a:solidFill>
-                  <a:srgbClr val="323232"/>
-                </a:solidFill>
-                <a:latin typeface="Arial"/>
-              </a:defRPr>
-            </a:pPr>
-            <a:r>
-              <a:t>Detailed timeline and phases for subsequent sprint deliverables</a:t>
-            </a:r>
-          </a:p>
-        </p:txBody>
-      </p:sp>
-      <p:sp>
-        <p:nvSpPr>
-          <p:cNvPr id="21" name="Rectangle 20"/>
-          <p:cNvSpPr/>
-          <p:nvPr/>
-        </p:nvSpPr>
-        <p:spPr>
-          <a:xfrm>
-            <a:off x="731520" y="5303520"/>
-            <a:ext cx="5257800" cy="804672"/>
-          </a:xfrm>
-          <a:prstGeom prst="rect">
-            <a:avLst/>
-          </a:prstGeom>
-          <a:solidFill>
-            <a:srgbClr val="FFFFFF"/>
-          </a:solidFill>
-          <a:ln w="12700">
-            <a:solidFill>
-              <a:srgbClr val="000000"/>
-            </a:solidFill>
-          </a:ln>
-        </p:spPr>
-        <p:style>
-          <a:lnRef idx="1">
-            <a:schemeClr val="accent1"/>
-          </a:lnRef>
-          <a:fillRef idx="3">
-            <a:schemeClr val="accent1"/>
-          </a:fillRef>
-          <a:effectRef idx="2">
-            <a:schemeClr val="accent1"/>
-          </a:effectRef>
-          <a:fontRef idx="minor">
-            <a:schemeClr val="lt1"/>
-          </a:fontRef>
-        </p:style>
-        <p:txBody>
-          <a:bodyPr rtlCol="0" anchor="ctr"/>
-          <a:lstStyle/>
-          <a:p>
-            <a:pPr algn="ctr"/>
-          </a:p>
-        </p:txBody>
-      </p:sp>
-      <p:sp>
-        <p:nvSpPr>
-          <p:cNvPr id="22" name="TextBox 21"/>
-          <p:cNvSpPr txBox="1"/>
-          <p:nvPr/>
-        </p:nvSpPr>
-        <p:spPr>
-          <a:xfrm>
-            <a:off x="868680" y="5376672"/>
-            <a:ext cx="4983480" cy="658368"/>
-          </a:xfrm>
-          <a:prstGeom prst="rect">
-            <a:avLst/>
-          </a:prstGeom>
-          <a:noFill/>
-        </p:spPr>
-        <p:txBody>
-          <a:bodyPr wrap="square">
-            <a:spAutoFit/>
-          </a:bodyPr>
-          <a:lstStyle/>
-          <a:p>
-            <a:pPr>
-              <a:defRPr sz="1300" b="1">
-                <a:solidFill>
-                  <a:srgbClr val="000000"/>
-                </a:solidFill>
-                <a:latin typeface="Arial"/>
-              </a:defRPr>
-            </a:pPr>
-            <a:r>
-              <a:t>Slide 11  •  Expected Outcomes &amp; References</a:t>
-            </a:r>
-          </a:p>
-          <a:p>
-            <a:pPr>
-              <a:defRPr sz="1100">
-                <a:solidFill>
-                  <a:srgbClr val="323232"/>
-                </a:solidFill>
-                <a:latin typeface="Arial"/>
-              </a:defRPr>
-            </a:pPr>
-            <a:r>
-              <a:t>Target metrics, quantified benefits, and academic references</a:t>
-            </a:r>
-          </a:p>
-        </p:txBody>
-      </p:sp>
-    </p:spTree>
-  </p:cSld>
-  <p:clrMapOvr>
-    <a:masterClrMapping/>
-  </p:clrMapOvr>
-</p:sld>
-</file>
-
-<file path=ppt/slides/slide3.xml><?xml version="1.0" encoding="utf-8"?>
-<p:sld xmlns:a="http://schemas.openxmlformats.org/drawingml/2006/main" xmlns:p="http://schemas.openxmlformats.org/presentationml/2006/main" xmlns:r="http://schemas.openxmlformats.org/officeDocument/2006/relationships">
-  <p:cSld>
-    <p:bg>
-      <p:bgPr>
-        <a:solidFill>
-          <a:srgbClr val="FFFFFF"/>
-        </a:solidFill>
-        <a:effectLst/>
-      </p:bgPr>
-    </p:bg>
-    <p:spTree>
-      <p:nvGrpSpPr>
-        <p:cNvPr id="1" name=""/>
-        <p:cNvGrpSpPr/>
-        <p:nvPr/>
-      </p:nvGrpSpPr>
-      <p:grpSpPr/>
-      <p:sp>
-        <p:nvSpPr>
-          <p:cNvPr id="2" name="TextBox 1"/>
-          <p:cNvSpPr txBox="1"/>
-          <p:nvPr/>
-        </p:nvSpPr>
-        <p:spPr>
-          <a:xfrm>
-            <a:off x="731520" y="365760"/>
-            <a:ext cx="10515600" cy="320040"/>
-          </a:xfrm>
-          <a:prstGeom prst="rect">
-            <a:avLst/>
-          </a:prstGeom>
-          <a:noFill/>
-        </p:spPr>
-        <p:txBody>
-          <a:bodyPr wrap="square">
-            <a:spAutoFit/>
-          </a:bodyPr>
-          <a:lstStyle/>
-          <a:p>
-            <a:pPr>
-              <a:defRPr sz="1000" b="1">
-                <a:solidFill>
-                  <a:srgbClr val="323232"/>
-                </a:solidFill>
-                <a:latin typeface="Arial"/>
-              </a:defRPr>
-            </a:pPr>
-            <a:r>
-              <a:t>BACKGROUND &amp; MOTIVATION</a:t>
-            </a:r>
-          </a:p>
-        </p:txBody>
-      </p:sp>
-      <p:sp>
-        <p:nvSpPr>
-          <p:cNvPr id="3" name="TextBox 2"/>
-          <p:cNvSpPr txBox="1"/>
-          <p:nvPr/>
-        </p:nvSpPr>
-        <p:spPr>
-          <a:xfrm>
-            <a:off x="731520" y="640080"/>
-            <a:ext cx="10698480" cy="731520"/>
-          </a:xfrm>
-          <a:prstGeom prst="rect">
-            <a:avLst/>
-          </a:prstGeom>
-          <a:noFill/>
-        </p:spPr>
-        <p:txBody>
-          <a:bodyPr wrap="square">
-            <a:spAutoFit/>
-          </a:bodyPr>
-          <a:lstStyle/>
-          <a:p>
-            <a:pPr>
-              <a:defRPr sz="2400" b="1">
-                <a:solidFill>
-                  <a:srgbClr val="000000"/>
-                </a:solidFill>
-                <a:latin typeface="Arial"/>
-              </a:defRPr>
-            </a:pPr>
-            <a:r>
-              <a:t>Introduction &amp; Problem Statement</a:t>
-            </a:r>
-          </a:p>
-        </p:txBody>
-      </p:sp>
-      <p:sp>
-        <p:nvSpPr>
-          <p:cNvPr id="4" name="Rectangle 3"/>
-          <p:cNvSpPr/>
-          <p:nvPr/>
-        </p:nvSpPr>
-        <p:spPr>
-          <a:xfrm>
-            <a:off x="731520" y="1371600"/>
-            <a:ext cx="10728655" cy="18288"/>
-          </a:xfrm>
-          <a:prstGeom prst="rect">
-            <a:avLst/>
-          </a:prstGeom>
-          <a:solidFill>
-            <a:srgbClr val="000000"/>
-          </a:solidFill>
-          <a:ln>
-            <a:solidFill>
-              <a:srgbClr val="000000"/>
-            </a:solidFill>
-          </a:ln>
-        </p:spPr>
-        <p:style>
-          <a:lnRef idx="1">
-            <a:schemeClr val="accent1"/>
-          </a:lnRef>
-          <a:fillRef idx="3">
-            <a:schemeClr val="accent1"/>
-          </a:fillRef>
-          <a:effectRef idx="2">
-            <a:schemeClr val="accent1"/>
-          </a:effectRef>
-          <a:fontRef idx="minor">
-            <a:schemeClr val="lt1"/>
-          </a:fontRef>
-        </p:style>
-        <p:txBody>
-          <a:bodyPr rtlCol="0" anchor="ctr"/>
-          <a:lstStyle/>
-          <a:p>
-            <a:pPr algn="ctr"/>
-          </a:p>
-        </p:txBody>
-      </p:sp>
-      <p:sp>
-        <p:nvSpPr>
-          <p:cNvPr id="5" name="Rectangle 4"/>
-          <p:cNvSpPr/>
-          <p:nvPr/>
-        </p:nvSpPr>
-        <p:spPr>
-          <a:xfrm>
-            <a:off x="731520" y="1645920"/>
-            <a:ext cx="5212080" cy="4663440"/>
-          </a:xfrm>
-          <a:prstGeom prst="rect">
-            <a:avLst/>
-          </a:prstGeom>
-          <a:solidFill>
-            <a:srgbClr val="FFFFFF"/>
-          </a:solidFill>
-          <a:ln w="12700">
-            <a:solidFill>
-              <a:srgbClr val="000000"/>
-            </a:solidFill>
-          </a:ln>
-        </p:spPr>
-        <p:style>
-          <a:lnRef idx="1">
-            <a:schemeClr val="accent1"/>
-          </a:lnRef>
-          <a:fillRef idx="3">
-            <a:schemeClr val="accent1"/>
-          </a:fillRef>
-          <a:effectRef idx="2">
-            <a:schemeClr val="accent1"/>
-          </a:effectRef>
-          <a:fontRef idx="minor">
-            <a:schemeClr val="lt1"/>
-          </a:fontRef>
-        </p:style>
-        <p:txBody>
-          <a:bodyPr rtlCol="0" anchor="ctr"/>
-          <a:lstStyle/>
-          <a:p>
-            <a:pPr algn="ctr"/>
-          </a:p>
-        </p:txBody>
-      </p:sp>
-      <p:sp>
-        <p:nvSpPr>
-          <p:cNvPr id="6" name="TextBox 5"/>
-          <p:cNvSpPr txBox="1"/>
-          <p:nvPr/>
-        </p:nvSpPr>
-        <p:spPr>
-          <a:xfrm>
-            <a:off x="868680" y="1783080"/>
-            <a:ext cx="4937760" cy="4389120"/>
-          </a:xfrm>
-          <a:prstGeom prst="rect">
-            <a:avLst/>
-          </a:prstGeom>
-          <a:noFill/>
-        </p:spPr>
-        <p:txBody>
-          <a:bodyPr wrap="square">
-            <a:spAutoFit/>
-          </a:bodyPr>
-          <a:lstStyle/>
-          <a:p>
-            <a:pPr>
-              <a:spcAft>
-                <a:spcPts val="1200"/>
-              </a:spcAft>
-              <a:defRPr sz="1800" b="1">
-                <a:solidFill>
-                  <a:srgbClr val="000000"/>
-                </a:solidFill>
-                <a:latin typeface="Arial"/>
-              </a:defRPr>
-            </a:pPr>
-            <a:r>
-              <a:t>Introduction</a:t>
-            </a:r>
-          </a:p>
-          <a:p>
-            <a:pPr>
-              <a:spcAft>
-                <a:spcPts val="800"/>
-              </a:spcAft>
-              <a:defRPr sz="1200">
-                <a:solidFill>
-                  <a:srgbClr val="323232"/>
-                </a:solidFill>
-                <a:latin typeface="Arial"/>
-              </a:defRPr>
-            </a:pPr>
-            <a:r>
-              <a:t>• Global Food Waste Crisis: According to the UN Food and Agriculture Organization (FAO), over 1.3 billion tons of food is wasted annually worldwide.</a:t>
-            </a:r>
-          </a:p>
-          <a:p>
-            <a:pPr>
-              <a:spcAft>
-                <a:spcPts val="800"/>
-              </a:spcAft>
-              <a:defRPr sz="1200">
-                <a:solidFill>
-                  <a:srgbClr val="323232"/>
-                </a:solidFill>
-                <a:latin typeface="Arial"/>
-              </a:defRPr>
-            </a:pPr>
-            <a:r>
-              <a:t>• Institutional Vulnerability: College messes, university hostels, and corporate cafeterias produce disproportionately high food surplus (20% to 35% daily).</a:t>
-            </a:r>
-          </a:p>
-          <a:p>
-            <a:pPr>
-              <a:spcAft>
-                <a:spcPts val="800"/>
-              </a:spcAft>
-              <a:defRPr sz="1200">
-                <a:solidFill>
-                  <a:srgbClr val="323232"/>
-                </a:solidFill>
-                <a:latin typeface="Arial"/>
-              </a:defRPr>
-            </a:pPr>
-            <a:r>
-              <a:t>• Environmental Impact: Organic kitchen waste decomposing in landfills is a leading producer of methane gas, intensifying global carbon footprints.</a:t>
-            </a:r>
-          </a:p>
-          <a:p>
-            <a:pPr>
-              <a:spcAft>
-                <a:spcPts val="800"/>
-              </a:spcAft>
-              <a:defRPr sz="1200">
-                <a:solidFill>
-                  <a:srgbClr val="323232"/>
-                </a:solidFill>
-                <a:latin typeface="Arial"/>
-              </a:defRPr>
-            </a:pPr>
-            <a:r>
-              <a:t>• Economic Loss: Kitchen managers incur significant recurring monetary losses due to over-purchasing and over-preparing perishable meals.</a:t>
-            </a:r>
-          </a:p>
-          <a:p>
-            <a:pPr>
-              <a:spcAft>
-                <a:spcPts val="800"/>
-              </a:spcAft>
-              <a:defRPr sz="1200">
-                <a:solidFill>
-                  <a:srgbClr val="323232"/>
-                </a:solidFill>
-                <a:latin typeface="Arial"/>
-              </a:defRPr>
-            </a:pPr>
-            <a:r>
-              <a:t>• Role of AI: Modern data-driven machine learning algorithms can model consumption dynamics and accurately forecast food demand prior to preparation.</a:t>
-            </a:r>
-          </a:p>
-        </p:txBody>
-      </p:sp>
-      <p:sp>
-        <p:nvSpPr>
-          <p:cNvPr id="7" name="Rectangle 6"/>
-          <p:cNvSpPr/>
-          <p:nvPr/>
-        </p:nvSpPr>
-        <p:spPr>
-          <a:xfrm>
-            <a:off x="6217920" y="1645920"/>
-            <a:ext cx="5212080" cy="4663440"/>
-          </a:xfrm>
-          <a:prstGeom prst="rect">
-            <a:avLst/>
-          </a:prstGeom>
-          <a:solidFill>
-            <a:srgbClr val="FFFFFF"/>
-          </a:solidFill>
-          <a:ln w="12700">
-            <a:solidFill>
-              <a:srgbClr val="000000"/>
-            </a:solidFill>
-          </a:ln>
-        </p:spPr>
-        <p:style>
-          <a:lnRef idx="1">
-            <a:schemeClr val="accent1"/>
-          </a:lnRef>
-          <a:fillRef idx="3">
-            <a:schemeClr val="accent1"/>
-          </a:fillRef>
-          <a:effectRef idx="2">
-            <a:schemeClr val="accent1"/>
-          </a:effectRef>
-          <a:fontRef idx="minor">
-            <a:schemeClr val="lt1"/>
-          </a:fontRef>
-        </p:style>
-        <p:txBody>
-          <a:bodyPr rtlCol="0" anchor="ctr"/>
-          <a:lstStyle/>
-          <a:p>
-            <a:pPr algn="ctr"/>
-          </a:p>
-        </p:txBody>
-      </p:sp>
-      <p:sp>
-        <p:nvSpPr>
-          <p:cNvPr id="8" name="TextBox 7"/>
-          <p:cNvSpPr txBox="1"/>
-          <p:nvPr/>
-        </p:nvSpPr>
-        <p:spPr>
-          <a:xfrm>
-            <a:off x="6355080" y="1783080"/>
-            <a:ext cx="4937760" cy="4389120"/>
-          </a:xfrm>
-          <a:prstGeom prst="rect">
-            <a:avLst/>
-          </a:prstGeom>
-          <a:noFill/>
-        </p:spPr>
-        <p:txBody>
-          <a:bodyPr wrap="square">
-            <a:spAutoFit/>
-          </a:bodyPr>
-          <a:lstStyle/>
-          <a:p>
-            <a:pPr>
-              <a:spcAft>
-                <a:spcPts val="1200"/>
-              </a:spcAft>
-              <a:defRPr sz="1800" b="1">
-                <a:solidFill>
-                  <a:srgbClr val="000000"/>
-                </a:solidFill>
-                <a:latin typeface="Arial"/>
-              </a:defRPr>
-            </a:pPr>
-            <a:r>
-              <a:t>Problem Statement</a:t>
-            </a:r>
-          </a:p>
-          <a:p>
-            <a:pPr>
-              <a:spcAft>
-                <a:spcPts val="800"/>
-              </a:spcAft>
-              <a:defRPr sz="1200">
-                <a:solidFill>
-                  <a:srgbClr val="323232"/>
-                </a:solidFill>
-                <a:latin typeface="Arial"/>
-              </a:defRPr>
-            </a:pPr>
-            <a:r>
-              <a:t>• Unpredictable Attendance Dynamics: Customer headcount fluctuates heavily with exam periods, weekends, college fests, weather conditions, and day types.</a:t>
-            </a:r>
-          </a:p>
-          <a:p>
-            <a:pPr>
-              <a:spcAft>
-                <a:spcPts val="800"/>
-              </a:spcAft>
-              <a:defRPr sz="1200">
-                <a:solidFill>
-                  <a:srgbClr val="323232"/>
-                </a:solidFill>
-                <a:latin typeface="Arial"/>
-              </a:defRPr>
-            </a:pPr>
-            <a:r>
-              <a:t>• Static Heuristic Cooking: Kitchen supervisors rely on primitive guesswork and fixed rule-of-thumb ratios rather than analytical demand forecasting.</a:t>
-            </a:r>
-          </a:p>
-          <a:p>
-            <a:pPr>
-              <a:spcAft>
-                <a:spcPts val="800"/>
-              </a:spcAft>
-              <a:defRPr sz="1200">
-                <a:solidFill>
-                  <a:srgbClr val="323232"/>
-                </a:solidFill>
-                <a:latin typeface="Arial"/>
-              </a:defRPr>
-            </a:pPr>
-            <a:r>
-              <a:t>• Absence of Pre-Cooking Risk Warnings: Current logging mechanisms are strictly retrospective (weighing waste after disposal), leaving zero room for pre-cook mitigation.</a:t>
-            </a:r>
-          </a:p>
-          <a:p>
-            <a:pPr>
-              <a:spcAft>
-                <a:spcPts val="800"/>
-              </a:spcAft>
-              <a:defRPr sz="1200">
-                <a:solidFill>
-                  <a:srgbClr val="323232"/>
-                </a:solidFill>
-                <a:latin typeface="Arial"/>
-              </a:defRPr>
-            </a:pPr>
-            <a:r>
-              <a:t>• Lack of Unified Contextual Variables: Existing systems ignore combined external variables (rain intensity, menu popularity, previous day satisfaction).</a:t>
-            </a:r>
-          </a:p>
-          <a:p>
-            <a:pPr>
-              <a:spcAft>
-                <a:spcPts val="800"/>
-              </a:spcAft>
-              <a:defRPr sz="1200">
-                <a:solidFill>
-                  <a:srgbClr val="323232"/>
-                </a:solidFill>
-                <a:latin typeface="Arial"/>
-              </a:defRPr>
-            </a:pPr>
-            <a:r>
-              <a:t>• Target Goal: Build an edge-deployable, automated mobile system that predicts exact meal quantities, detects waste risks, and advises kitchen managers before cooking commences.</a:t>
-            </a:r>
-          </a:p>
-        </p:txBody>
-      </p:sp>
-    </p:spTree>
-  </p:cSld>
-  <p:clrMapOvr>
-    <a:masterClrMapping/>
-  </p:clrMapOvr>
-</p:sld>
-</file>
-
-<file path=ppt/slides/slide4.xml><?xml version="1.0" encoding="utf-8"?>
-<p:sld xmlns:a="http://schemas.openxmlformats.org/drawingml/2006/main" xmlns:p="http://schemas.openxmlformats.org/presentationml/2006/main" xmlns:r="http://schemas.openxmlformats.org/officeDocument/2006/relationships">
-  <p:cSld>
-    <p:bg>
-      <p:bgPr>
-        <a:solidFill>
-          <a:srgbClr val="FFFFFF"/>
-        </a:solidFill>
-        <a:effectLst/>
-      </p:bgPr>
-    </p:bg>
-    <p:spTree>
-      <p:nvGrpSpPr>
-        <p:cNvPr id="1" name=""/>
-        <p:cNvGrpSpPr/>
-        <p:nvPr/>
-      </p:nvGrpSpPr>
-      <p:grpSpPr/>
-      <p:sp>
-        <p:nvSpPr>
-          <p:cNvPr id="2" name="TextBox 1"/>
-          <p:cNvSpPr txBox="1"/>
-          <p:nvPr/>
-        </p:nvSpPr>
-        <p:spPr>
-          <a:xfrm>
-            <a:off x="731520" y="365760"/>
-            <a:ext cx="10515600" cy="320040"/>
-          </a:xfrm>
-          <a:prstGeom prst="rect">
-            <a:avLst/>
-          </a:prstGeom>
-          <a:noFill/>
-        </p:spPr>
-        <p:txBody>
-          <a:bodyPr wrap="square">
-            <a:spAutoFit/>
-          </a:bodyPr>
-          <a:lstStyle/>
-          <a:p>
-            <a:pPr>
-              <a:defRPr sz="1000" b="1">
-                <a:solidFill>
-                  <a:srgbClr val="323232"/>
-                </a:solidFill>
-                <a:latin typeface="Arial"/>
-              </a:defRPr>
-            </a:pPr>
-            <a:r>
-              <a:t>PROJECT GOALS &amp; SCOPE</a:t>
-            </a:r>
-          </a:p>
-        </p:txBody>
-      </p:sp>
-      <p:sp>
-        <p:nvSpPr>
-          <p:cNvPr id="3" name="TextBox 2"/>
-          <p:cNvSpPr txBox="1"/>
-          <p:nvPr/>
-        </p:nvSpPr>
-        <p:spPr>
-          <a:xfrm>
-            <a:off x="731520" y="640080"/>
-            <a:ext cx="10698480" cy="731520"/>
-          </a:xfrm>
-          <a:prstGeom prst="rect">
-            <a:avLst/>
-          </a:prstGeom>
-          <a:noFill/>
-        </p:spPr>
-        <p:txBody>
-          <a:bodyPr wrap="square">
-            <a:spAutoFit/>
-          </a:bodyPr>
-          <a:lstStyle/>
-          <a:p>
-            <a:pPr>
-              <a:defRPr sz="2400" b="1">
-                <a:solidFill>
-                  <a:srgbClr val="000000"/>
-                </a:solidFill>
-                <a:latin typeface="Arial"/>
-              </a:defRPr>
-            </a:pPr>
-            <a:r>
-              <a:t>Objectives</a:t>
-            </a:r>
-          </a:p>
-        </p:txBody>
-      </p:sp>
-      <p:sp>
-        <p:nvSpPr>
-          <p:cNvPr id="4" name="Rectangle 3"/>
-          <p:cNvSpPr/>
-          <p:nvPr/>
-        </p:nvSpPr>
-        <p:spPr>
-          <a:xfrm>
-            <a:off x="731520" y="1371600"/>
-            <a:ext cx="10728655" cy="18288"/>
-          </a:xfrm>
-          <a:prstGeom prst="rect">
-            <a:avLst/>
-          </a:prstGeom>
-          <a:solidFill>
-            <a:srgbClr val="000000"/>
-          </a:solidFill>
-          <a:ln>
-            <a:solidFill>
-              <a:srgbClr val="000000"/>
-            </a:solidFill>
-          </a:ln>
-        </p:spPr>
-        <p:style>
-          <a:lnRef idx="1">
-            <a:schemeClr val="accent1"/>
-          </a:lnRef>
-          <a:fillRef idx="3">
-            <a:schemeClr val="accent1"/>
-          </a:fillRef>
-          <a:effectRef idx="2">
-            <a:schemeClr val="accent1"/>
-          </a:effectRef>
-          <a:fontRef idx="minor">
-            <a:schemeClr val="lt1"/>
-          </a:fontRef>
-        </p:style>
-        <p:txBody>
-          <a:bodyPr rtlCol="0" anchor="ctr"/>
-          <a:lstStyle/>
-          <a:p>
-            <a:pPr algn="ctr"/>
-          </a:p>
-        </p:txBody>
-      </p:sp>
-      <p:sp>
-        <p:nvSpPr>
-          <p:cNvPr id="5" name="Rectangle 4"/>
-          <p:cNvSpPr/>
-          <p:nvPr/>
-        </p:nvSpPr>
-        <p:spPr>
-          <a:xfrm>
-            <a:off x="731520" y="1645920"/>
-            <a:ext cx="5257800" cy="1389888"/>
-          </a:xfrm>
-          <a:prstGeom prst="rect">
-            <a:avLst/>
-          </a:prstGeom>
-          <a:solidFill>
-            <a:srgbClr val="FFFFFF"/>
-          </a:solidFill>
-          <a:ln w="12700">
-            <a:solidFill>
-              <a:srgbClr val="000000"/>
-            </a:solidFill>
-          </a:ln>
-        </p:spPr>
-        <p:style>
-          <a:lnRef idx="1">
-            <a:schemeClr val="accent1"/>
-          </a:lnRef>
-          <a:fillRef idx="3">
-            <a:schemeClr val="accent1"/>
-          </a:fillRef>
-          <a:effectRef idx="2">
-            <a:schemeClr val="accent1"/>
-          </a:effectRef>
-          <a:fontRef idx="minor">
-            <a:schemeClr val="lt1"/>
-          </a:fontRef>
-        </p:style>
-        <p:txBody>
-          <a:bodyPr rtlCol="0" anchor="ctr"/>
-          <a:lstStyle/>
-          <a:p>
-            <a:pPr algn="ctr"/>
-          </a:p>
-        </p:txBody>
-      </p:sp>
-      <p:sp>
-        <p:nvSpPr>
-          <p:cNvPr id="6" name="TextBox 5"/>
-          <p:cNvSpPr txBox="1"/>
-          <p:nvPr/>
-        </p:nvSpPr>
-        <p:spPr>
-          <a:xfrm>
-            <a:off x="896112" y="1755648"/>
-            <a:ext cx="4928616" cy="1170432"/>
-          </a:xfrm>
-          <a:prstGeom prst="rect">
-            <a:avLst/>
-          </a:prstGeom>
-          <a:noFill/>
-        </p:spPr>
-        <p:txBody>
-          <a:bodyPr wrap="square">
-            <a:spAutoFit/>
-          </a:bodyPr>
-          <a:lstStyle/>
-          <a:p>
-            <a:pPr>
-              <a:spcAft>
-                <a:spcPts val="400"/>
-              </a:spcAft>
-              <a:defRPr sz="1300" b="1">
-                <a:solidFill>
-                  <a:srgbClr val="000000"/>
-                </a:solidFill>
-                <a:latin typeface="Arial"/>
-              </a:defRPr>
-            </a:pPr>
-            <a:r>
-              <a:t>Obj 1: Accurate Demand &amp; Waste Forecasting</a:t>
-            </a:r>
-          </a:p>
-          <a:p>
-            <a:pPr>
-              <a:defRPr sz="1100">
-                <a:solidFill>
-                  <a:srgbClr val="323232"/>
-                </a:solidFill>
-                <a:latin typeface="Arial"/>
-              </a:defRPr>
-            </a:pPr>
-            <a:r>
-              <a:t>Develop and implement supervised regression models (Ridge Linear Regression, CART Decision Trees, Random Forest Ensembles) to accurately predict daily food consumption, surplus waste, and footfall.</a:t>
-            </a:r>
-          </a:p>
-        </p:txBody>
-      </p:sp>
-      <p:sp>
-        <p:nvSpPr>
-          <p:cNvPr id="7" name="Rectangle 6"/>
-          <p:cNvSpPr/>
-          <p:nvPr/>
-        </p:nvSpPr>
-        <p:spPr>
-          <a:xfrm>
-            <a:off x="6172200" y="1645920"/>
-            <a:ext cx="5257800" cy="1389888"/>
-          </a:xfrm>
-          <a:prstGeom prst="rect">
-            <a:avLst/>
-          </a:prstGeom>
-          <a:solidFill>
-            <a:srgbClr val="FFFFFF"/>
-          </a:solidFill>
-          <a:ln w="12700">
-            <a:solidFill>
-              <a:srgbClr val="000000"/>
-            </a:solidFill>
-          </a:ln>
-        </p:spPr>
-        <p:style>
-          <a:lnRef idx="1">
-            <a:schemeClr val="accent1"/>
-          </a:lnRef>
-          <a:fillRef idx="3">
-            <a:schemeClr val="accent1"/>
-          </a:fillRef>
-          <a:effectRef idx="2">
-            <a:schemeClr val="accent1"/>
-          </a:effectRef>
-          <a:fontRef idx="minor">
-            <a:schemeClr val="lt1"/>
-          </a:fontRef>
-        </p:style>
-        <p:txBody>
-          <a:bodyPr rtlCol="0" anchor="ctr"/>
-          <a:lstStyle/>
-          <a:p>
-            <a:pPr algn="ctr"/>
-          </a:p>
-        </p:txBody>
-      </p:sp>
-      <p:sp>
-        <p:nvSpPr>
-          <p:cNvPr id="8" name="TextBox 7"/>
-          <p:cNvSpPr txBox="1"/>
-          <p:nvPr/>
-        </p:nvSpPr>
-        <p:spPr>
-          <a:xfrm>
-            <a:off x="6336792" y="1755648"/>
-            <a:ext cx="4928616" cy="1170432"/>
-          </a:xfrm>
-          <a:prstGeom prst="rect">
-            <a:avLst/>
-          </a:prstGeom>
-          <a:noFill/>
-        </p:spPr>
-        <p:txBody>
-          <a:bodyPr wrap="square">
-            <a:spAutoFit/>
-          </a:bodyPr>
-          <a:lstStyle/>
-          <a:p>
-            <a:pPr>
-              <a:spcAft>
-                <a:spcPts val="400"/>
-              </a:spcAft>
-              <a:defRPr sz="1300" b="1">
-                <a:solidFill>
-                  <a:srgbClr val="000000"/>
-                </a:solidFill>
-                <a:latin typeface="Arial"/>
-              </a:defRPr>
-            </a:pPr>
-            <a:r>
-              <a:t>Obj 2: Multi-Dimensional Feature Engineering (26 Factors)</a:t>
-            </a:r>
-          </a:p>
-          <a:p>
-            <a:pPr>
-              <a:defRPr sz="1100">
-                <a:solidFill>
-                  <a:srgbClr val="323232"/>
-                </a:solidFill>
-                <a:latin typeface="Arial"/>
-              </a:defRPr>
-            </a:pPr>
-            <a:r>
-              <a:t>Synthesize and encode 26 real-world variables, including day type, weather conditions, exam schedule, hostel occupancy, menu popularity, arrival speed, and past meal feedback.</a:t>
-            </a:r>
-          </a:p>
-        </p:txBody>
-      </p:sp>
-      <p:sp>
-        <p:nvSpPr>
-          <p:cNvPr id="9" name="Rectangle 8"/>
-          <p:cNvSpPr/>
-          <p:nvPr/>
-        </p:nvSpPr>
-        <p:spPr>
-          <a:xfrm>
-            <a:off x="731520" y="3182112"/>
-            <a:ext cx="5257800" cy="1389888"/>
-          </a:xfrm>
-          <a:prstGeom prst="rect">
-            <a:avLst/>
-          </a:prstGeom>
-          <a:solidFill>
-            <a:srgbClr val="FFFFFF"/>
-          </a:solidFill>
-          <a:ln w="12700">
-            <a:solidFill>
-              <a:srgbClr val="000000"/>
-            </a:solidFill>
-          </a:ln>
-        </p:spPr>
-        <p:style>
-          <a:lnRef idx="1">
-            <a:schemeClr val="accent1"/>
-          </a:lnRef>
-          <a:fillRef idx="3">
-            <a:schemeClr val="accent1"/>
-          </a:fillRef>
-          <a:effectRef idx="2">
-            <a:schemeClr val="accent1"/>
-          </a:effectRef>
-          <a:fontRef idx="minor">
-            <a:schemeClr val="lt1"/>
-          </a:fontRef>
-        </p:style>
-        <p:txBody>
-          <a:bodyPr rtlCol="0" anchor="ctr"/>
-          <a:lstStyle/>
-          <a:p>
-            <a:pPr algn="ctr"/>
-          </a:p>
-        </p:txBody>
-      </p:sp>
-      <p:sp>
-        <p:nvSpPr>
-          <p:cNvPr id="10" name="TextBox 9"/>
-          <p:cNvSpPr txBox="1"/>
-          <p:nvPr/>
-        </p:nvSpPr>
-        <p:spPr>
-          <a:xfrm>
-            <a:off x="896112" y="3291840"/>
-            <a:ext cx="4928616" cy="1170432"/>
-          </a:xfrm>
-          <a:prstGeom prst="rect">
-            <a:avLst/>
-          </a:prstGeom>
-          <a:noFill/>
-        </p:spPr>
-        <p:txBody>
-          <a:bodyPr wrap="square">
-            <a:spAutoFit/>
-          </a:bodyPr>
-          <a:lstStyle/>
-          <a:p>
-            <a:pPr>
-              <a:spcAft>
-                <a:spcPts val="400"/>
-              </a:spcAft>
-              <a:defRPr sz="1300" b="1">
-                <a:solidFill>
-                  <a:srgbClr val="000000"/>
-                </a:solidFill>
-                <a:latin typeface="Arial"/>
-              </a:defRPr>
-            </a:pPr>
-            <a:r>
-              <a:t>Obj 3: Proactive Cooking Recommendation Engine</a:t>
-            </a:r>
-          </a:p>
-          <a:p>
-            <a:pPr>
-              <a:defRPr sz="1100">
-                <a:solidFill>
-                  <a:srgbClr val="323232"/>
-                </a:solidFill>
-                <a:latin typeface="Arial"/>
-              </a:defRPr>
-            </a:pPr>
-            <a:r>
-              <a:t>Deliver actionable, pre-preparation quantity guidelines and categorize potential waste risk into LOW, MEDIUM, and HIGH alert levels to prevent excess cooking.</a:t>
-            </a:r>
-          </a:p>
-        </p:txBody>
-      </p:sp>
-      <p:sp>
-        <p:nvSpPr>
-          <p:cNvPr id="11" name="Rectangle 10"/>
-          <p:cNvSpPr/>
-          <p:nvPr/>
-        </p:nvSpPr>
-        <p:spPr>
-          <a:xfrm>
-            <a:off x="6172200" y="3182112"/>
-            <a:ext cx="5257800" cy="1389888"/>
-          </a:xfrm>
-          <a:prstGeom prst="rect">
-            <a:avLst/>
-          </a:prstGeom>
-          <a:solidFill>
-            <a:srgbClr val="FFFFFF"/>
-          </a:solidFill>
-          <a:ln w="12700">
-            <a:solidFill>
-              <a:srgbClr val="000000"/>
-            </a:solidFill>
-          </a:ln>
-        </p:spPr>
-        <p:style>
-          <a:lnRef idx="1">
-            <a:schemeClr val="accent1"/>
-          </a:lnRef>
-          <a:fillRef idx="3">
-            <a:schemeClr val="accent1"/>
-          </a:fillRef>
-          <a:effectRef idx="2">
-            <a:schemeClr val="accent1"/>
-          </a:effectRef>
-          <a:fontRef idx="minor">
-            <a:schemeClr val="lt1"/>
-          </a:fontRef>
-        </p:style>
-        <p:txBody>
-          <a:bodyPr rtlCol="0" anchor="ctr"/>
-          <a:lstStyle/>
-          <a:p>
-            <a:pPr algn="ctr"/>
-          </a:p>
-        </p:txBody>
-      </p:sp>
-      <p:sp>
-        <p:nvSpPr>
-          <p:cNvPr id="12" name="TextBox 11"/>
-          <p:cNvSpPr txBox="1"/>
-          <p:nvPr/>
-        </p:nvSpPr>
-        <p:spPr>
-          <a:xfrm>
-            <a:off x="6336792" y="3291840"/>
-            <a:ext cx="4928616" cy="1170432"/>
-          </a:xfrm>
-          <a:prstGeom prst="rect">
-            <a:avLst/>
-          </a:prstGeom>
-          <a:noFill/>
-        </p:spPr>
-        <p:txBody>
-          <a:bodyPr wrap="square">
-            <a:spAutoFit/>
-          </a:bodyPr>
-          <a:lstStyle/>
-          <a:p>
-            <a:pPr>
-              <a:spcAft>
-                <a:spcPts val="400"/>
-              </a:spcAft>
-              <a:defRPr sz="1300" b="1">
-                <a:solidFill>
-                  <a:srgbClr val="000000"/>
-                </a:solidFill>
-                <a:latin typeface="Arial"/>
-              </a:defRPr>
-            </a:pPr>
-            <a:r>
-              <a:t>Obj 4: Benchmarking &amp; Autonomous Model Selection</a:t>
-            </a:r>
-          </a:p>
-          <a:p>
-            <a:pPr>
-              <a:defRPr sz="1100">
-                <a:solidFill>
-                  <a:srgbClr val="323232"/>
-                </a:solidFill>
-                <a:latin typeface="Arial"/>
-              </a:defRPr>
-            </a:pPr>
-            <a:r>
-              <a:t>Evaluate competing ML algorithms side-by-side using Mean Absolute Error (MAE), Root Mean Squared Error (RMSE), and Coefficient of Determination (R²) with automatic best model deployment.</a:t>
-            </a:r>
-          </a:p>
-        </p:txBody>
-      </p:sp>
-      <p:sp>
-        <p:nvSpPr>
-          <p:cNvPr id="13" name="Rectangle 12"/>
-          <p:cNvSpPr/>
-          <p:nvPr/>
-        </p:nvSpPr>
-        <p:spPr>
-          <a:xfrm>
-            <a:off x="731520" y="4718304"/>
-            <a:ext cx="5257800" cy="1389888"/>
-          </a:xfrm>
-          <a:prstGeom prst="rect">
-            <a:avLst/>
-          </a:prstGeom>
-          <a:solidFill>
-            <a:srgbClr val="FFFFFF"/>
-          </a:solidFill>
-          <a:ln w="12700">
-            <a:solidFill>
-              <a:srgbClr val="000000"/>
-            </a:solidFill>
-          </a:ln>
-        </p:spPr>
-        <p:style>
-          <a:lnRef idx="1">
-            <a:schemeClr val="accent1"/>
-          </a:lnRef>
-          <a:fillRef idx="3">
-            <a:schemeClr val="accent1"/>
-          </a:fillRef>
-          <a:effectRef idx="2">
-            <a:schemeClr val="accent1"/>
-          </a:effectRef>
-          <a:fontRef idx="minor">
-            <a:schemeClr val="lt1"/>
-          </a:fontRef>
-        </p:style>
-        <p:txBody>
-          <a:bodyPr rtlCol="0" anchor="ctr"/>
-          <a:lstStyle/>
-          <a:p>
-            <a:pPr algn="ctr"/>
-          </a:p>
-        </p:txBody>
-      </p:sp>
-      <p:sp>
-        <p:nvSpPr>
-          <p:cNvPr id="14" name="TextBox 13"/>
-          <p:cNvSpPr txBox="1"/>
-          <p:nvPr/>
-        </p:nvSpPr>
-        <p:spPr>
-          <a:xfrm>
-            <a:off x="896112" y="4828032"/>
-            <a:ext cx="4928616" cy="1170432"/>
-          </a:xfrm>
-          <a:prstGeom prst="rect">
-            <a:avLst/>
-          </a:prstGeom>
-          <a:noFill/>
-        </p:spPr>
-        <p:txBody>
-          <a:bodyPr wrap="square">
-            <a:spAutoFit/>
-          </a:bodyPr>
-          <a:lstStyle/>
-          <a:p>
-            <a:pPr>
-              <a:spcAft>
-                <a:spcPts val="400"/>
-              </a:spcAft>
-              <a:defRPr sz="1300" b="1">
-                <a:solidFill>
-                  <a:srgbClr val="000000"/>
-                </a:solidFill>
-                <a:latin typeface="Arial"/>
-              </a:defRPr>
-            </a:pPr>
-            <a:r>
-              <a:t>Obj 5: Intuitive Offline-First Mobile Application</a:t>
-            </a:r>
-          </a:p>
-          <a:p>
-            <a:pPr>
-              <a:defRPr sz="1100">
-                <a:solidFill>
-                  <a:srgbClr val="323232"/>
-                </a:solidFill>
-                <a:latin typeface="Arial"/>
-              </a:defRPr>
-            </a:pPr>
-            <a:r>
-              <a:t>Engineer a responsive Android application using Jetpack Compose and Room Database with offline operational capability and integrated Gemini AI contextual culinary recommendations.</a:t>
-            </a:r>
-          </a:p>
-        </p:txBody>
-      </p:sp>
-      <p:sp>
-        <p:nvSpPr>
-          <p:cNvPr id="15" name="Rectangle 14"/>
-          <p:cNvSpPr/>
-          <p:nvPr/>
-        </p:nvSpPr>
-        <p:spPr>
-          <a:xfrm>
-            <a:off x="6172200" y="4718304"/>
-            <a:ext cx="5257800" cy="1389888"/>
-          </a:xfrm>
-          <a:prstGeom prst="rect">
-            <a:avLst/>
-          </a:prstGeom>
-          <a:solidFill>
-            <a:srgbClr val="FFFFFF"/>
-          </a:solidFill>
-          <a:ln w="12700">
-            <a:solidFill>
-              <a:srgbClr val="000000"/>
-            </a:solidFill>
-          </a:ln>
-        </p:spPr>
-        <p:style>
-          <a:lnRef idx="1">
-            <a:schemeClr val="accent1"/>
-          </a:lnRef>
-          <a:fillRef idx="3">
-            <a:schemeClr val="accent1"/>
-          </a:fillRef>
-          <a:effectRef idx="2">
-            <a:schemeClr val="accent1"/>
-          </a:effectRef>
-          <a:fontRef idx="minor">
-            <a:schemeClr val="lt1"/>
-          </a:fontRef>
-        </p:style>
-        <p:txBody>
-          <a:bodyPr rtlCol="0" anchor="ctr"/>
-          <a:lstStyle/>
-          <a:p>
-            <a:pPr algn="ctr"/>
-          </a:p>
-        </p:txBody>
-      </p:sp>
-      <p:sp>
-        <p:nvSpPr>
-          <p:cNvPr id="16" name="TextBox 15"/>
-          <p:cNvSpPr txBox="1"/>
-          <p:nvPr/>
-        </p:nvSpPr>
-        <p:spPr>
-          <a:xfrm>
-            <a:off x="6336792" y="4828032"/>
-            <a:ext cx="4928616" cy="1170432"/>
-          </a:xfrm>
-          <a:prstGeom prst="rect">
-            <a:avLst/>
-          </a:prstGeom>
-          <a:noFill/>
-        </p:spPr>
-        <p:txBody>
-          <a:bodyPr wrap="square">
-            <a:spAutoFit/>
-          </a:bodyPr>
-          <a:lstStyle/>
-          <a:p>
-            <a:pPr>
-              <a:spcAft>
-                <a:spcPts val="400"/>
-              </a:spcAft>
-              <a:defRPr sz="1300" b="1">
-                <a:solidFill>
-                  <a:srgbClr val="000000"/>
-                </a:solidFill>
-                <a:latin typeface="Arial"/>
-              </a:defRPr>
-            </a:pPr>
-            <a:r>
-              <a:t>Obj 6: Quantifiable Financial &amp; Environmental Savings</a:t>
-            </a:r>
-          </a:p>
-          <a:p>
-            <a:pPr>
-              <a:defRPr sz="1100">
-                <a:solidFill>
-                  <a:srgbClr val="323232"/>
-                </a:solidFill>
-                <a:latin typeface="Arial"/>
-              </a:defRPr>
-            </a:pPr>
-            <a:r>
-              <a:t>Calculate real-time financial savings (in currency per kg) and waste reductions, facilitating accountable and sustainable institutional cafeteria management.</a:t>
-            </a:r>
-          </a:p>
-        </p:txBody>
-      </p:sp>
-    </p:spTree>
-  </p:cSld>
-  <p:clrMapOvr>
-    <a:masterClrMapping/>
-  </p:clrMapOvr>
-</p:sld>
-</file>
-
-<file path=ppt/slides/slide5.xml><?xml version="1.0" encoding="utf-8"?>
-<p:sld xmlns:a="http://schemas.openxmlformats.org/drawingml/2006/main" xmlns:p="http://schemas.openxmlformats.org/presentationml/2006/main" xmlns:r="http://schemas.openxmlformats.org/officeDocument/2006/relationships">
-  <p:cSld>
-    <p:bg>
-      <p:bgPr>
-        <a:solidFill>
-          <a:srgbClr val="FFFFFF"/>
-        </a:solidFill>
-        <a:effectLst/>
-      </p:bgPr>
-    </p:bg>
-    <p:spTree>
-      <p:nvGrpSpPr>
-        <p:cNvPr id="1" name=""/>
-        <p:cNvGrpSpPr/>
-        <p:nvPr/>
-      </p:nvGrpSpPr>
-      <p:grpSpPr/>
-      <p:sp>
-        <p:nvSpPr>
-          <p:cNvPr id="2" name="TextBox 1"/>
-          <p:cNvSpPr txBox="1"/>
-          <p:nvPr/>
-        </p:nvSpPr>
-        <p:spPr>
-          <a:xfrm>
-            <a:off x="731520" y="365760"/>
-            <a:ext cx="10515600" cy="320040"/>
-          </a:xfrm>
-          <a:prstGeom prst="rect">
-            <a:avLst/>
-          </a:prstGeom>
-          <a:noFill/>
-        </p:spPr>
-        <p:txBody>
-          <a:bodyPr wrap="square">
-            <a:spAutoFit/>
-          </a:bodyPr>
-          <a:lstStyle/>
-          <a:p>
-            <a:pPr>
-              <a:defRPr sz="1000" b="1">
-                <a:solidFill>
-                  <a:srgbClr val="323232"/>
-                </a:solidFill>
-                <a:latin typeface="Arial"/>
-              </a:defRPr>
-            </a:pPr>
-            <a:r>
-              <a:t>RELATED WORK &amp; GAP ANALYSIS</a:t>
-            </a:r>
-          </a:p>
-        </p:txBody>
-      </p:sp>
-      <p:sp>
-        <p:nvSpPr>
-          <p:cNvPr id="3" name="TextBox 2"/>
-          <p:cNvSpPr txBox="1"/>
-          <p:nvPr/>
-        </p:nvSpPr>
-        <p:spPr>
-          <a:xfrm>
-            <a:off x="731520" y="640080"/>
-            <a:ext cx="10698480" cy="731520"/>
-          </a:xfrm>
-          <a:prstGeom prst="rect">
-            <a:avLst/>
-          </a:prstGeom>
-          <a:noFill/>
-        </p:spPr>
-        <p:txBody>
-          <a:bodyPr wrap="square">
-            <a:spAutoFit/>
-          </a:bodyPr>
-          <a:lstStyle/>
-          <a:p>
-            <a:pPr>
-              <a:defRPr sz="2400" b="1">
-                <a:solidFill>
-                  <a:srgbClr val="000000"/>
-                </a:solidFill>
-                <a:latin typeface="Arial"/>
-              </a:defRPr>
-            </a:pPr>
-            <a:r>
-              <a:t>Literature Survey</a:t>
-            </a:r>
-          </a:p>
-        </p:txBody>
-      </p:sp>
-      <p:sp>
-        <p:nvSpPr>
-          <p:cNvPr id="4" name="Rectangle 3"/>
-          <p:cNvSpPr/>
-          <p:nvPr/>
-        </p:nvSpPr>
-        <p:spPr>
-          <a:xfrm>
-            <a:off x="731520" y="1371600"/>
-            <a:ext cx="10728655" cy="18288"/>
-          </a:xfrm>
-          <a:prstGeom prst="rect">
-            <a:avLst/>
-          </a:prstGeom>
-          <a:solidFill>
-            <a:srgbClr val="000000"/>
-          </a:solidFill>
-          <a:ln>
-            <a:solidFill>
-              <a:srgbClr val="000000"/>
-            </a:solidFill>
-          </a:ln>
-        </p:spPr>
-        <p:style>
-          <a:lnRef idx="1">
-            <a:schemeClr val="accent1"/>
-          </a:lnRef>
-          <a:fillRef idx="3">
-            <a:schemeClr val="accent1"/>
-          </a:fillRef>
-          <a:effectRef idx="2">
-            <a:schemeClr val="accent1"/>
-          </a:effectRef>
-          <a:fontRef idx="minor">
-            <a:schemeClr val="lt1"/>
-          </a:fontRef>
-        </p:style>
-        <p:txBody>
-          <a:bodyPr rtlCol="0" anchor="ctr"/>
-          <a:lstStyle/>
-          <a:p>
-            <a:pPr algn="ctr"/>
-          </a:p>
-        </p:txBody>
-      </p:sp>
-      <p:graphicFrame>
-        <p:nvGraphicFramePr>
-          <p:cNvPr id="5" name="Table 4"/>
-          <p:cNvGraphicFramePr>
-            <a:graphicFrameLocks noGrp="1"/>
-          </p:cNvGraphicFramePr>
-          <p:nvPr/>
-        </p:nvGraphicFramePr>
-        <p:xfrm>
-          <a:off x="731520" y="1645920"/>
-          <a:ext cx="10728655" cy="4572000"/>
-        </p:xfrm>
-        <a:graphic>
-          <a:graphicData uri="http://schemas.openxmlformats.org/drawingml/2006/table">
-            <a:tbl>
-              <a:tblPr firstRow="1" bandRow="1">
-                <a:tableStyleId>{5C22544A-7EE6-4342-B048-85BDC9FD1C3A}</a:tableStyleId>
-              </a:tblPr>
-              <a:tblGrid>
-                <a:gridCol w="2011680"/>
-                <a:gridCol w="2926080"/>
-                <a:gridCol w="3108960"/>
-                <a:gridCol w="2681935"/>
-              </a:tblGrid>
-              <a:tr h="762000">
-                <a:tc>
-                  <a:txBody>
-                    <a:bodyPr wrap="square"/>
                     <a:lstStyle/>
                     <a:p>
                       <a:pPr>
@@ -7536,7 +5170,7 @@
                 </a:tc>
                 <a:tc>
                   <a:txBody>
-                    <a:bodyPr wrap="square"/>
+                    <a:bodyPr/>
                     <a:lstStyle/>
                     <a:p>
                       <a:pPr>
@@ -7560,7 +5194,7 @@
                 </a:tc>
                 <a:tc>
                   <a:txBody>
-                    <a:bodyPr wrap="square"/>
+                    <a:bodyPr/>
                     <a:lstStyle/>
                     <a:p>
                       <a:pPr>
@@ -7584,7 +5218,7 @@
                 </a:tc>
                 <a:tc>
                   <a:txBody>
-                    <a:bodyPr wrap="square"/>
+                    <a:bodyPr/>
                     <a:lstStyle/>
                     <a:p>
                       <a:pPr>
@@ -7606,11 +5240,16 @@
                     </a:solidFill>
                   </a:tcPr>
                 </a:tc>
+                <a:extLst>
+                  <a:ext uri="{0D108BD9-81ED-4DB2-BD59-A6C34878D82A}">
+                    <a16:rowId xmlns:a16="http://schemas.microsoft.com/office/drawing/2014/main" val="10000"/>
+                  </a:ext>
+                </a:extLst>
               </a:tr>
               <a:tr h="762000">
                 <a:tc>
                   <a:txBody>
-                    <a:bodyPr wrap="square"/>
+                    <a:bodyPr/>
                     <a:lstStyle/>
                     <a:p>
                       <a:pPr>
@@ -7626,7 +5265,7 @@
                       </a:r>
                       <a:br/>
                       <a:r>
-                        <a:t>[Elsevier Resources]</a:t>
+                        <a:t>[Elsevier]</a:t>
                       </a:r>
                     </a:p>
                   </a:txBody>
@@ -7638,19 +5277,19 @@
                 </a:tc>
                 <a:tc>
                   <a:txBody>
-                    <a:bodyPr wrap="square"/>
+                    <a:bodyPr/>
                     <a:lstStyle/>
                     <a:p>
                       <a:pPr>
                         <a:defRPr sz="1000">
                           <a:solidFill>
-                            <a:srgbClr val="323232"/>
+                            <a:srgbClr val="3C3C3C"/>
                           </a:solidFill>
                           <a:latin typeface="Arial"/>
                         </a:defRPr>
                       </a:pPr>
                       <a:r>
-                        <a:t>Time-series and regression analysis of waste in educational catering.</a:t>
+                        <a:t>Time-series &amp; regression in educational catering.</a:t>
                       </a:r>
                     </a:p>
                   </a:txBody>
@@ -7662,19 +5301,19 @@
                 </a:tc>
                 <a:tc>
                   <a:txBody>
-                    <a:bodyPr wrap="square"/>
+                    <a:bodyPr/>
                     <a:lstStyle/>
                     <a:p>
                       <a:pPr>
                         <a:defRPr sz="1000">
                           <a:solidFill>
-                            <a:srgbClr val="323232"/>
+                            <a:srgbClr val="3C3C3C"/>
                           </a:solidFill>
                           <a:latin typeface="Arial"/>
                         </a:defRPr>
                       </a:pPr>
                       <a:r>
-                        <a:t>Identified student attendance variation and dish type as major drivers of 23% waste.</a:t>
+                        <a:t>Identified student attendance &amp; dish type as drivers of 23% waste.</a:t>
                       </a:r>
                     </a:p>
                   </a:txBody>
@@ -7686,19 +5325,19 @@
                 </a:tc>
                 <a:tc>
                   <a:txBody>
-                    <a:bodyPr wrap="square"/>
+                    <a:bodyPr/>
                     <a:lstStyle/>
                     <a:p>
                       <a:pPr>
                         <a:defRPr sz="1000">
                           <a:solidFill>
-                            <a:srgbClr val="323232"/>
+                            <a:srgbClr val="3C3C3C"/>
                           </a:solidFill>
                           <a:latin typeface="Arial"/>
                         </a:defRPr>
                       </a:pPr>
                       <a:r>
-                        <a:t>Static models without real-time multi-contextual inputs (weather, exams); lacks mobile decision support.</a:t>
+                        <a:t>Lacks real-time multi-contextual inputs &amp; mobile decision support.</a:t>
                       </a:r>
                     </a:p>
                   </a:txBody>
@@ -7708,11 +5347,16 @@
                     </a:solidFill>
                   </a:tcPr>
                 </a:tc>
+                <a:extLst>
+                  <a:ext uri="{0D108BD9-81ED-4DB2-BD59-A6C34878D82A}">
+                    <a16:rowId xmlns:a16="http://schemas.microsoft.com/office/drawing/2014/main" val="10001"/>
+                  </a:ext>
+                </a:extLst>
               </a:tr>
               <a:tr h="762000">
                 <a:tc>
                   <a:txBody>
-                    <a:bodyPr wrap="square"/>
+                    <a:bodyPr/>
                     <a:lstStyle/>
                     <a:p>
                       <a:pPr>
@@ -7740,19 +5384,19 @@
                 </a:tc>
                 <a:tc>
                   <a:txBody>
-                    <a:bodyPr wrap="square"/>
+                    <a:bodyPr/>
                     <a:lstStyle/>
                     <a:p>
                       <a:pPr>
                         <a:defRPr sz="1000">
                           <a:solidFill>
-                            <a:srgbClr val="323232"/>
+                            <a:srgbClr val="3C3C3C"/>
                           </a:solidFill>
                           <a:latin typeface="Arial"/>
                         </a:defRPr>
                       </a:pPr>
                       <a:r>
-                        <a:t>IoT smart bin sensor telemetry with cloud analytics for cafeteria audit.</a:t>
+                        <a:t>IoT smart bin sensor telemetry &amp; cloud analytics.</a:t>
                       </a:r>
                     </a:p>
                   </a:txBody>
@@ -7764,19 +5408,19 @@
                 </a:tc>
                 <a:tc>
                   <a:txBody>
-                    <a:bodyPr wrap="square"/>
+                    <a:bodyPr/>
                     <a:lstStyle/>
                     <a:p>
                       <a:pPr>
                         <a:defRPr sz="1000">
                           <a:solidFill>
-                            <a:srgbClr val="323232"/>
+                            <a:srgbClr val="3C3C3C"/>
                           </a:solidFill>
                           <a:latin typeface="Arial"/>
                         </a:defRPr>
                       </a:pPr>
                       <a:r>
-                        <a:t>Automated waste measurement with load cells and image classification of discarded trays.</a:t>
+                        <a:t>Automated waste measurement &amp; tray image classification.</a:t>
                       </a:r>
                     </a:p>
                   </a:txBody>
@@ -7788,19 +5432,19 @@
                 </a:tc>
                 <a:tc>
                   <a:txBody>
-                    <a:bodyPr wrap="square"/>
+                    <a:bodyPr/>
                     <a:lstStyle/>
                     <a:p>
                       <a:pPr>
                         <a:defRPr sz="1000">
                           <a:solidFill>
-                            <a:srgbClr val="323232"/>
+                            <a:srgbClr val="3C3C3C"/>
                           </a:solidFill>
                           <a:latin typeface="Arial"/>
                         </a:defRPr>
                       </a:pPr>
                       <a:r>
-                        <a:t>High hardware installation cost; reactive audit only (measures waste after cooking, cannot prevent it).</a:t>
+                        <a:t>High hardware cost; reactive audit only (measures waste post-disposal).</a:t>
                       </a:r>
                     </a:p>
                   </a:txBody>
@@ -7810,11 +5454,16 @@
                     </a:solidFill>
                   </a:tcPr>
                 </a:tc>
+                <a:extLst>
+                  <a:ext uri="{0D108BD9-81ED-4DB2-BD59-A6C34878D82A}">
+                    <a16:rowId xmlns:a16="http://schemas.microsoft.com/office/drawing/2014/main" val="10002"/>
+                  </a:ext>
+                </a:extLst>
               </a:tr>
               <a:tr h="762000">
                 <a:tc>
                   <a:txBody>
-                    <a:bodyPr wrap="square"/>
+                    <a:bodyPr/>
                     <a:lstStyle/>
                     <a:p>
                       <a:pPr>
@@ -7830,7 +5479,7 @@
                       </a:r>
                       <a:br/>
                       <a:r>
-                        <a:t>[Journal of Cleaner Prod.]</a:t>
+                        <a:t>[J. Clean Prod.]</a:t>
                       </a:r>
                     </a:p>
                   </a:txBody>
@@ -7842,19 +5491,19 @@
                 </a:tc>
                 <a:tc>
                   <a:txBody>
-                    <a:bodyPr wrap="square"/>
+                    <a:bodyPr/>
                     <a:lstStyle/>
                     <a:p>
                       <a:pPr>
                         <a:defRPr sz="1000">
                           <a:solidFill>
-                            <a:srgbClr val="323232"/>
+                            <a:srgbClr val="3C3C3C"/>
                           </a:solidFill>
                           <a:latin typeface="Arial"/>
                         </a:defRPr>
                       </a:pPr>
                       <a:r>
-                        <a:t>Machine Learning (ANN, SVR) for meal demand prediction in university mess.</a:t>
+                        <a:t>ANN &amp; SVR for mess meal demand prediction.</a:t>
                       </a:r>
                     </a:p>
                   </a:txBody>
@@ -7866,19 +5515,19 @@
                 </a:tc>
                 <a:tc>
                   <a:txBody>
-                    <a:bodyPr wrap="square"/>
+                    <a:bodyPr/>
                     <a:lstStyle/>
                     <a:p>
                       <a:pPr>
                         <a:defRPr sz="1000">
                           <a:solidFill>
-                            <a:srgbClr val="323232"/>
+                            <a:srgbClr val="3C3C3C"/>
                           </a:solidFill>
                           <a:latin typeface="Arial"/>
                         </a:defRPr>
                       </a:pPr>
                       <a:r>
-                        <a:t>Ensemble algorithms outperformed basic regression in forecasting customer turnout.</a:t>
+                        <a:t>Machine learning outperformed simple rolling averages.</a:t>
                       </a:r>
                     </a:p>
                   </a:txBody>
@@ -7890,19 +5539,19 @@
                 </a:tc>
                 <a:tc>
                   <a:txBody>
-                    <a:bodyPr wrap="square"/>
+                    <a:bodyPr/>
                     <a:lstStyle/>
                     <a:p>
                       <a:pPr>
                         <a:defRPr sz="1000">
                           <a:solidFill>
-                            <a:srgbClr val="323232"/>
+                            <a:srgbClr val="3C3C3C"/>
                           </a:solidFill>
                           <a:latin typeface="Arial"/>
                         </a:defRPr>
                       </a:pPr>
                       <a:r>
-                        <a:t>Complex server-dependent infrastructure; no on-device offline edge ML execution for staff.</a:t>
+                        <a:t>Server-dependent; no on-device offline edge ML execution for staff.</a:t>
                       </a:r>
                     </a:p>
                   </a:txBody>
@@ -7912,11 +5561,16 @@
                     </a:solidFill>
                   </a:tcPr>
                 </a:tc>
+                <a:extLst>
+                  <a:ext uri="{0D108BD9-81ED-4DB2-BD59-A6C34878D82A}">
+                    <a16:rowId xmlns:a16="http://schemas.microsoft.com/office/drawing/2014/main" val="10003"/>
+                  </a:ext>
+                </a:extLst>
               </a:tr>
               <a:tr h="762000">
                 <a:tc>
                   <a:txBody>
-                    <a:bodyPr wrap="square"/>
+                    <a:bodyPr/>
                     <a:lstStyle/>
                     <a:p>
                       <a:pPr>
@@ -7932,7 +5586,7 @@
                       </a:r>
                       <a:br/>
                       <a:r>
-                        <a:t>[Springer Nature]</a:t>
+                        <a:t>[Springer]</a:t>
                       </a:r>
                     </a:p>
                   </a:txBody>
@@ -7944,19 +5598,19 @@
                 </a:tc>
                 <a:tc>
                   <a:txBody>
-                    <a:bodyPr wrap="square"/>
+                    <a:bodyPr/>
                     <a:lstStyle/>
                     <a:p>
                       <a:pPr>
                         <a:defRPr sz="1000">
                           <a:solidFill>
-                            <a:srgbClr val="323232"/>
+                            <a:srgbClr val="3C3C3C"/>
                           </a:solidFill>
                           <a:latin typeface="Arial"/>
                         </a:defRPr>
                       </a:pPr>
                       <a:r>
-                        <a:t>Supervised ML for demand forecasting in hospitality &amp; food retail chains.</a:t>
+                        <a:t>Supervised ML for food demand forecasting.</a:t>
                       </a:r>
                     </a:p>
                   </a:txBody>
@@ -7968,19 +5622,19 @@
                 </a:tc>
                 <a:tc>
                   <a:txBody>
-                    <a:bodyPr wrap="square"/>
+                    <a:bodyPr/>
                     <a:lstStyle/>
                     <a:p>
                       <a:pPr>
                         <a:defRPr sz="1000">
                           <a:solidFill>
-                            <a:srgbClr val="323232"/>
+                            <a:srgbClr val="3C3C3C"/>
                           </a:solidFill>
                           <a:latin typeface="Arial"/>
                         </a:defRPr>
                       </a:pPr>
                       <a:r>
-                        <a:t>Demonstrated Random Forest regression efficacy in reducing over-stocking by ~18%.</a:t>
+                        <a:t>Random Forest regression reduced over-stocking by ~18%.</a:t>
                       </a:r>
                     </a:p>
                   </a:txBody>
@@ -7992,19 +5646,19 @@
                 </a:tc>
                 <a:tc>
                   <a:txBody>
-                    <a:bodyPr wrap="square"/>
+                    <a:bodyPr/>
                     <a:lstStyle/>
                     <a:p>
                       <a:pPr>
                         <a:defRPr sz="1000">
                           <a:solidFill>
-                            <a:srgbClr val="323232"/>
+                            <a:srgbClr val="3C3C3C"/>
                           </a:solidFill>
                           <a:latin typeface="Arial"/>
                         </a:defRPr>
                       </a:pPr>
                       <a:r>
-                        <a:t>Limited feature space (lacked granular hostel occupancy, past satisfaction, and real-time risk alerts).</a:t>
+                        <a:t>Limited feature space; lacks pre-cook risk alerts &amp; actionable advice.</a:t>
                       </a:r>
                     </a:p>
                   </a:txBody>
@@ -8014,11 +5668,16 @@
                     </a:solidFill>
                   </a:tcPr>
                 </a:tc>
+                <a:extLst>
+                  <a:ext uri="{0D108BD9-81ED-4DB2-BD59-A6C34878D82A}">
+                    <a16:rowId xmlns:a16="http://schemas.microsoft.com/office/drawing/2014/main" val="10004"/>
+                  </a:ext>
+                </a:extLst>
               </a:tr>
               <a:tr h="762000">
                 <a:tc>
                   <a:txBody>
-                    <a:bodyPr wrap="square"/>
+                    <a:bodyPr/>
                     <a:lstStyle/>
                     <a:p>
                       <a:pPr>
@@ -8046,7 +5705,7 @@
                 </a:tc>
                 <a:tc>
                   <a:txBody>
-                    <a:bodyPr wrap="square"/>
+                    <a:bodyPr/>
                     <a:lstStyle/>
                     <a:p>
                       <a:pPr>
@@ -8058,7 +5717,7 @@
                         </a:defRPr>
                       </a:pPr>
                       <a:r>
-                        <a:t>On-Device Ensemble ML (RF, DT, Ridge) + Gemini AI with 26 Contextual Features.</a:t>
+                        <a:t>On-Device Ensemble ML (RF, DT, Ridge) + Real-Time Waste Advisory.</a:t>
                       </a:r>
                     </a:p>
                   </a:txBody>
@@ -8070,7 +5729,7 @@
                 </a:tc>
                 <a:tc>
                   <a:txBody>
-                    <a:bodyPr wrap="square"/>
+                    <a:bodyPr/>
                     <a:lstStyle/>
                     <a:p>
                       <a:pPr>
@@ -8082,7 +5741,7 @@
                         </a:defRPr>
                       </a:pPr>
                       <a:r>
-                        <a:t>Holistic pre-cook forecasting, R² &gt; 0.85, actionable prep recommendations &amp; risk rating.</a:t>
+                        <a:t>Holistic pre-cook forecasting, R² ~ 0.89, prep advice &amp; risk rating.</a:t>
                       </a:r>
                     </a:p>
                   </a:txBody>
@@ -8094,7 +5753,7 @@
                 </a:tc>
                 <a:tc>
                   <a:txBody>
-                    <a:bodyPr wrap="square"/>
+                    <a:bodyPr/>
                     <a:lstStyle/>
                     <a:p>
                       <a:pPr>
@@ -8106,7 +5765,7 @@
                         </a:defRPr>
                       </a:pPr>
                       <a:r>
-                        <a:t>Directly solves prior gaps: lightweight on-device execution, zero hardware cost, proactive mitigation.</a:t>
+                        <a:t>Directly solves prior gaps: offline edge ML, zero hardware cost, proactive.</a:t>
                       </a:r>
                     </a:p>
                   </a:txBody>
@@ -8116,6 +5775,11 @@
                     </a:solidFill>
                   </a:tcPr>
                 </a:tc>
+                <a:extLst>
+                  <a:ext uri="{0D108BD9-81ED-4DB2-BD59-A6C34878D82A}">
+                    <a16:rowId xmlns:a16="http://schemas.microsoft.com/office/drawing/2014/main" val="10005"/>
+                  </a:ext>
+                </a:extLst>
               </a:tr>
             </a:tbl>
           </a:graphicData>
@@ -8129,8 +5793,8 @@
 </p:sld>
 </file>
 
-<file path=ppt/slides/slide6.xml><?xml version="1.0" encoding="utf-8"?>
-<p:sld xmlns:a="http://schemas.openxmlformats.org/drawingml/2006/main" xmlns:p="http://schemas.openxmlformats.org/presentationml/2006/main" xmlns:r="http://schemas.openxmlformats.org/officeDocument/2006/relationships">
+<file path=ppt/slides/slide5.xml><?xml version="1.0" encoding="utf-8"?>
+<p:sld xmlns:a="http://schemas.openxmlformats.org/drawingml/2006/main" xmlns:r="http://schemas.openxmlformats.org/officeDocument/2006/relationships" xmlns:p="http://schemas.openxmlformats.org/presentationml/2006/main">
   <p:cSld>
     <p:bg>
       <p:bgPr>
@@ -8146,7 +5810,14 @@
         <p:cNvGrpSpPr/>
         <p:nvPr/>
       </p:nvGrpSpPr>
-      <p:grpSpPr/>
+      <p:grpSpPr>
+        <a:xfrm>
+          <a:off x="0" y="0"/>
+          <a:ext cx="0" cy="0"/>
+          <a:chOff x="0" y="0"/>
+          <a:chExt cx="0" cy="0"/>
+        </a:xfrm>
+      </p:grpSpPr>
       <p:sp>
         <p:nvSpPr>
           <p:cNvPr id="2" name="TextBox 1"/>
@@ -8172,7 +5843,7 @@
             <a:pPr>
               <a:defRPr sz="1000" b="1">
                 <a:solidFill>
-                  <a:srgbClr val="323232"/>
+                  <a:srgbClr val="3C3C3C"/>
                 </a:solidFill>
                 <a:latin typeface="Arial"/>
               </a:defRPr>
@@ -8192,7 +5863,7 @@
         <p:spPr>
           <a:xfrm>
             <a:off x="731520" y="640080"/>
-            <a:ext cx="10698480" cy="731520"/>
+            <a:ext cx="10698480" cy="685800"/>
           </a:xfrm>
           <a:prstGeom prst="rect">
             <a:avLst/>
@@ -8261,6 +5932,7 @@
           <a:lstStyle/>
           <a:p>
             <a:pPr algn="ctr"/>
+            <a:endParaRPr/>
           </a:p>
         </p:txBody>
       </p:sp>
@@ -8283,14 +5955,32 @@
                 <a:tableStyleId>{5C22544A-7EE6-4342-B048-85BDC9FD1C3A}</a:tableStyleId>
               </a:tblPr>
               <a:tblGrid>
-                <a:gridCol w="2499055"/>
-                <a:gridCol w="4114800"/>
-                <a:gridCol w="4114800"/>
+                <a:gridCol w="2499055">
+                  <a:extLst>
+                    <a:ext uri="{9D8B030D-6E8A-4147-A177-3AD203B41FA5}">
+                      <a16:colId xmlns:a16="http://schemas.microsoft.com/office/drawing/2014/main" val="20000"/>
+                    </a:ext>
+                  </a:extLst>
+                </a:gridCol>
+                <a:gridCol w="4114800">
+                  <a:extLst>
+                    <a:ext uri="{9D8B030D-6E8A-4147-A177-3AD203B41FA5}">
+                      <a16:colId xmlns:a16="http://schemas.microsoft.com/office/drawing/2014/main" val="20001"/>
+                    </a:ext>
+                  </a:extLst>
+                </a:gridCol>
+                <a:gridCol w="4114800">
+                  <a:extLst>
+                    <a:ext uri="{9D8B030D-6E8A-4147-A177-3AD203B41FA5}">
+                      <a16:colId xmlns:a16="http://schemas.microsoft.com/office/drawing/2014/main" val="20002"/>
+                    </a:ext>
+                  </a:extLst>
+                </a:gridCol>
               </a:tblGrid>
               <a:tr h="582930">
                 <a:tc>
                   <a:txBody>
-                    <a:bodyPr wrap="square"/>
+                    <a:bodyPr/>
                     <a:lstStyle/>
                     <a:p>
                       <a:pPr>
@@ -8314,7 +6004,7 @@
                 </a:tc>
                 <a:tc>
                   <a:txBody>
-                    <a:bodyPr wrap="square"/>
+                    <a:bodyPr/>
                     <a:lstStyle/>
                     <a:p>
                       <a:pPr>
@@ -8338,7 +6028,7 @@
                 </a:tc>
                 <a:tc>
                   <a:txBody>
-                    <a:bodyPr wrap="square"/>
+                    <a:bodyPr/>
                     <a:lstStyle/>
                     <a:p>
                       <a:pPr>
@@ -8360,6 +6050,11 @@
                     </a:solidFill>
                   </a:tcPr>
                 </a:tc>
+                <a:extLst>
+                  <a:ext uri="{0D108BD9-81ED-4DB2-BD59-A6C34878D82A}">
+                    <a16:rowId xmlns:a16="http://schemas.microsoft.com/office/drawing/2014/main" val="10000"/>
+                  </a:ext>
+                </a:extLst>
               </a:tr>
               <a:tr h="582930">
                 <a:tc>
@@ -8368,7 +6063,7 @@
                     <a:lstStyle/>
                     <a:p>
                       <a:pPr>
-                        <a:defRPr b="1" sz="1100">
+                        <a:defRPr sz="1100" b="1">
                           <a:solidFill>
                             <a:srgbClr val="000000"/>
                           </a:solidFill>
@@ -8394,7 +6089,7 @@
                       <a:pPr>
                         <a:defRPr sz="1050">
                           <a:solidFill>
-                            <a:srgbClr val="323232"/>
+                            <a:srgbClr val="3C3C3C"/>
                           </a:solidFill>
                           <a:latin typeface="Arial"/>
                         </a:defRPr>
@@ -8416,7 +6111,7 @@
                     <a:lstStyle/>
                     <a:p>
                       <a:pPr>
-                        <a:defRPr sz="1050" b="1">
+                        <a:defRPr sz="1050">
                           <a:solidFill>
                             <a:srgbClr val="000000"/>
                           </a:solidFill>
@@ -8424,7 +6119,7 @@
                         </a:defRPr>
                       </a:pPr>
                       <a:r>
-                        <a:t>• Supervised ML regression suite (Linear Regression, Decision Tree, Random Forest).</a:t>
+                        <a:t>• Supervised ML suite (Ridge Regression, Decision Tree, Random Forest).</a:t>
                       </a:r>
                     </a:p>
                   </a:txBody>
@@ -8434,6 +6129,11 @@
                     </a:solidFill>
                   </a:tcPr>
                 </a:tc>
+                <a:extLst>
+                  <a:ext uri="{0D108BD9-81ED-4DB2-BD59-A6C34878D82A}">
+                    <a16:rowId xmlns:a16="http://schemas.microsoft.com/office/drawing/2014/main" val="10001"/>
+                  </a:ext>
+                </a:extLst>
               </a:tr>
               <a:tr h="582930">
                 <a:tc>
@@ -8442,7 +6142,7 @@
                     <a:lstStyle/>
                     <a:p>
                       <a:pPr>
-                        <a:defRPr b="1" sz="1100">
+                        <a:defRPr sz="1100" b="1">
                           <a:solidFill>
                             <a:srgbClr val="000000"/>
                           </a:solidFill>
@@ -8468,7 +6168,7 @@
                       <a:pPr>
                         <a:defRPr sz="1050">
                           <a:solidFill>
-                            <a:srgbClr val="323232"/>
+                            <a:srgbClr val="3C3C3C"/>
                           </a:solidFill>
                           <a:latin typeface="Arial"/>
                         </a:defRPr>
@@ -8490,7 +6190,7 @@
                     <a:lstStyle/>
                     <a:p>
                       <a:pPr>
-                        <a:defRPr sz="1050" b="1">
+                        <a:defRPr sz="1050">
                           <a:solidFill>
                             <a:srgbClr val="000000"/>
                           </a:solidFill>
@@ -8498,7 +6198,7 @@
                         </a:defRPr>
                       </a:pPr>
                       <a:r>
-                        <a:t>• 26 encoded features (weather, exams, hostel occupancy, festival impact, etc.).</a:t>
+                        <a:t>• 26 encoded features (weather, exams, occupancy, menu feedback, etc.).</a:t>
                       </a:r>
                     </a:p>
                   </a:txBody>
@@ -8508,6 +6208,11 @@
                     </a:solidFill>
                   </a:tcPr>
                 </a:tc>
+                <a:extLst>
+                  <a:ext uri="{0D108BD9-81ED-4DB2-BD59-A6C34878D82A}">
+                    <a16:rowId xmlns:a16="http://schemas.microsoft.com/office/drawing/2014/main" val="10002"/>
+                  </a:ext>
+                </a:extLst>
               </a:tr>
               <a:tr h="582930">
                 <a:tc>
@@ -8516,7 +6221,7 @@
                     <a:lstStyle/>
                     <a:p>
                       <a:pPr>
-                        <a:defRPr b="1" sz="1100">
+                        <a:defRPr sz="1100" b="1">
                           <a:solidFill>
                             <a:srgbClr val="000000"/>
                           </a:solidFill>
@@ -8542,7 +6247,7 @@
                       <a:pPr>
                         <a:defRPr sz="1050">
                           <a:solidFill>
-                            <a:srgbClr val="323232"/>
+                            <a:srgbClr val="3C3C3C"/>
                           </a:solidFill>
                           <a:latin typeface="Arial"/>
                         </a:defRPr>
@@ -8564,7 +6269,7 @@
                     <a:lstStyle/>
                     <a:p>
                       <a:pPr>
-                        <a:defRPr sz="1050" b="1">
+                        <a:defRPr sz="1050">
                           <a:solidFill>
                             <a:srgbClr val="000000"/>
                           </a:solidFill>
@@ -8572,7 +6277,7 @@
                         </a:defRPr>
                       </a:pPr>
                       <a:r>
-                        <a:t>• Proactive: Pre-cooking preparation guidance and risk mitigation before cooking.</a:t>
+                        <a:t>• Proactive: Pre-cooking preparation guidance &amp; risk mitigation.</a:t>
                       </a:r>
                     </a:p>
                   </a:txBody>
@@ -8582,6 +6287,11 @@
                     </a:solidFill>
                   </a:tcPr>
                 </a:tc>
+                <a:extLst>
+                  <a:ext uri="{0D108BD9-81ED-4DB2-BD59-A6C34878D82A}">
+                    <a16:rowId xmlns:a16="http://schemas.microsoft.com/office/drawing/2014/main" val="10003"/>
+                  </a:ext>
+                </a:extLst>
               </a:tr>
               <a:tr h="582930">
                 <a:tc>
@@ -8590,7 +6300,7 @@
                     <a:lstStyle/>
                     <a:p>
                       <a:pPr>
-                        <a:defRPr b="1" sz="1100">
+                        <a:defRPr sz="1100" b="1">
                           <a:solidFill>
                             <a:srgbClr val="000000"/>
                           </a:solidFill>
@@ -8616,63 +6326,13 @@
                       <a:pPr>
                         <a:defRPr sz="1050">
                           <a:solidFill>
-                            <a:srgbClr val="323232"/>
+                            <a:srgbClr val="3C3C3C"/>
                           </a:solidFill>
                           <a:latin typeface="Arial"/>
                         </a:defRPr>
                       </a:pPr>
                       <a:r>
-                        <a:t>• No risk categorization; kitchen managers are unaware of upcoming surplus.</a:t>
-                      </a:r>
-                    </a:p>
-                  </a:txBody>
-                  <a:tcPr>
-                    <a:solidFill>
-                      <a:srgbClr val="FFFFFF"/>
-                    </a:solidFill>
-                  </a:tcPr>
-                </a:tc>
-                <a:tc>
-                  <a:txBody>
-                    <a:bodyPr/>
-                    <a:lstStyle/>
-                    <a:p>
-                      <a:pPr>
-                        <a:defRPr sz="1050" b="1">
-                          <a:solidFill>
-                            <a:srgbClr val="000000"/>
-                          </a:solidFill>
-                          <a:latin typeface="Arial"/>
-                        </a:defRPr>
-                      </a:pPr>
-                      <a:r>
-                        <a:t>• Automated waste risk classification (LOW, MEDIUM, HIGH) with financial loss alerts.</a:t>
-                      </a:r>
-                    </a:p>
-                  </a:txBody>
-                  <a:tcPr>
-                    <a:solidFill>
-                      <a:srgbClr val="FFFFFF"/>
-                    </a:solidFill>
-                  </a:tcPr>
-                </a:tc>
-              </a:tr>
-              <a:tr h="582930">
-                <a:tc>
-                  <a:txBody>
-                    <a:bodyPr/>
-                    <a:lstStyle/>
-                    <a:p>
-                      <a:pPr>
-                        <a:defRPr b="1" sz="1100">
-                          <a:solidFill>
-                            <a:srgbClr val="000000"/>
-                          </a:solidFill>
-                          <a:latin typeface="Arial"/>
-                        </a:defRPr>
-                      </a:pPr>
-                      <a:r>
-                        <a:t>Deployment &amp; Hardware</a:t>
+                        <a:t>• No risk rating; chefs unaware of upcoming surplus.</a:t>
                       </a:r>
                     </a:p>
                   </a:txBody>
@@ -8690,13 +6350,13 @@
                       <a:pPr>
                         <a:defRPr sz="1050">
                           <a:solidFill>
-                            <a:srgbClr val="323232"/>
+                            <a:srgbClr val="000000"/>
                           </a:solidFill>
                           <a:latin typeface="Arial"/>
                         </a:defRPr>
                       </a:pPr>
                       <a:r>
-                        <a:t>• Expensive smart bins or cumbersome desktop spreadsheets.</a:t>
+                        <a:t>• Automated waste risk rating (LOW, MEDIUM, HIGH) with financial alerts.</a:t>
                       </a:r>
                     </a:p>
                   </a:txBody>
@@ -8706,30 +6366,11 @@
                     </a:solidFill>
                   </a:tcPr>
                 </a:tc>
-                <a:tc>
-                  <a:txBody>
-                    <a:bodyPr/>
-                    <a:lstStyle/>
-                    <a:p>
-                      <a:pPr>
-                        <a:defRPr sz="1050" b="1">
-                          <a:solidFill>
-                            <a:srgbClr val="000000"/>
-                          </a:solidFill>
-                          <a:latin typeface="Arial"/>
-                        </a:defRPr>
-                      </a:pPr>
-                      <a:r>
-                        <a:t>• Native Android mobile application (Jetpack Compose) running locally on phone/tablet.</a:t>
-                      </a:r>
-                    </a:p>
-                  </a:txBody>
-                  <a:tcPr>
-                    <a:solidFill>
-                      <a:srgbClr val="FFFFFF"/>
-                    </a:solidFill>
-                  </a:tcPr>
-                </a:tc>
+                <a:extLst>
+                  <a:ext uri="{0D108BD9-81ED-4DB2-BD59-A6C34878D82A}">
+                    <a16:rowId xmlns:a16="http://schemas.microsoft.com/office/drawing/2014/main" val="10004"/>
+                  </a:ext>
+                </a:extLst>
               </a:tr>
               <a:tr h="582930">
                 <a:tc>
@@ -8738,7 +6379,7 @@
                     <a:lstStyle/>
                     <a:p>
                       <a:pPr>
-                        <a:defRPr b="1" sz="1100">
+                        <a:defRPr sz="1100" b="1">
                           <a:solidFill>
                             <a:srgbClr val="000000"/>
                           </a:solidFill>
@@ -8746,7 +6387,7 @@
                         </a:defRPr>
                       </a:pPr>
                       <a:r>
-                        <a:t>Execution Infrastructure</a:t>
+                        <a:t>Deployment &amp; Cost</a:t>
                       </a:r>
                     </a:p>
                   </a:txBody>
@@ -8764,13 +6405,13 @@
                       <a:pPr>
                         <a:defRPr sz="1050">
                           <a:solidFill>
-                            <a:srgbClr val="323232"/>
+                            <a:srgbClr val="3C3C3C"/>
                           </a:solidFill>
                           <a:latin typeface="Arial"/>
                         </a:defRPr>
                       </a:pPr>
                       <a:r>
-                        <a:t>• Server/Cloud reliant; fails under poor internet connectivity.</a:t>
+                        <a:t>• Expensive smart bins or cumbersome spreadsheets.</a:t>
                       </a:r>
                     </a:p>
                   </a:txBody>
@@ -8786,7 +6427,7 @@
                     <a:lstStyle/>
                     <a:p>
                       <a:pPr>
-                        <a:defRPr sz="1050" b="1">
+                        <a:defRPr sz="1050">
                           <a:solidFill>
                             <a:srgbClr val="000000"/>
                           </a:solidFill>
@@ -8794,7 +6435,7 @@
                         </a:defRPr>
                       </a:pPr>
                       <a:r>
-                        <a:t>• Offline-first Room database and in-app Kotlin ML engine with optional Gemini cloud insights.</a:t>
+                        <a:t>• Native Android app running locally on existing devices (Zero Cost).</a:t>
                       </a:r>
                     </a:p>
                   </a:txBody>
@@ -8804,6 +6445,11 @@
                     </a:solidFill>
                   </a:tcPr>
                 </a:tc>
+                <a:extLst>
+                  <a:ext uri="{0D108BD9-81ED-4DB2-BD59-A6C34878D82A}">
+                    <a16:rowId xmlns:a16="http://schemas.microsoft.com/office/drawing/2014/main" val="10005"/>
+                  </a:ext>
+                </a:extLst>
               </a:tr>
               <a:tr h="582930">
                 <a:tc>
@@ -8812,7 +6458,86 @@
                     <a:lstStyle/>
                     <a:p>
                       <a:pPr>
-                        <a:defRPr b="1" sz="1100">
+                        <a:defRPr sz="1100" b="1">
+                          <a:solidFill>
+                            <a:srgbClr val="000000"/>
+                          </a:solidFill>
+                          <a:latin typeface="Arial"/>
+                        </a:defRPr>
+                      </a:pPr>
+                      <a:r>
+                        <a:t>Connectivity &amp; Storage</a:t>
+                      </a:r>
+                    </a:p>
+                  </a:txBody>
+                  <a:tcPr>
+                    <a:solidFill>
+                      <a:srgbClr val="FFFFFF"/>
+                    </a:solidFill>
+                  </a:tcPr>
+                </a:tc>
+                <a:tc>
+                  <a:txBody>
+                    <a:bodyPr/>
+                    <a:lstStyle/>
+                    <a:p>
+                      <a:pPr>
+                        <a:defRPr sz="1050">
+                          <a:solidFill>
+                            <a:srgbClr val="3C3C3C"/>
+                          </a:solidFill>
+                          <a:latin typeface="Arial"/>
+                        </a:defRPr>
+                      </a:pPr>
+                      <a:r>
+                        <a:t>• Cloud reliant; fails under poor internet connectivity.</a:t>
+                      </a:r>
+                    </a:p>
+                  </a:txBody>
+                  <a:tcPr>
+                    <a:solidFill>
+                      <a:srgbClr val="FFFFFF"/>
+                    </a:solidFill>
+                  </a:tcPr>
+                </a:tc>
+                <a:tc>
+                  <a:txBody>
+                    <a:bodyPr/>
+                    <a:lstStyle/>
+                    <a:p>
+                      <a:pPr>
+                        <a:defRPr sz="1050">
+                          <a:solidFill>
+                            <a:srgbClr val="000000"/>
+                          </a:solidFill>
+                          <a:latin typeface="Arial"/>
+                        </a:defRPr>
+                      </a:pPr>
+                      <a:r>
+                        <a:t>• Offline-first Room database &amp; in-app Kotlin ML engine.</a:t>
+                      </a:r>
+                    </a:p>
+                  </a:txBody>
+                  <a:tcPr>
+                    <a:solidFill>
+                      <a:srgbClr val="FFFFFF"/>
+                    </a:solidFill>
+                  </a:tcPr>
+                </a:tc>
+                <a:extLst>
+                  <a:ext uri="{0D108BD9-81ED-4DB2-BD59-A6C34878D82A}">
+                    <a16:rowId xmlns:a16="http://schemas.microsoft.com/office/drawing/2014/main" val="10006"/>
+                  </a:ext>
+                </a:extLst>
+              </a:tr>
+              <a:tr h="582930">
+                <a:tc>
+                  <a:txBody>
+                    <a:bodyPr/>
+                    <a:lstStyle/>
+                    <a:p>
+                      <a:pPr>
+                        <a:defRPr sz="1100" b="1">
                           <a:solidFill>
                             <a:srgbClr val="000000"/>
                           </a:solidFill>
@@ -8838,13 +6563,13 @@
                       <a:pPr>
                         <a:defRPr sz="1050">
                           <a:solidFill>
-                            <a:srgbClr val="323232"/>
+                            <a:srgbClr val="3C3C3C"/>
                           </a:solidFill>
                           <a:latin typeface="Arial"/>
                         </a:defRPr>
                       </a:pPr>
                       <a:r>
-                        <a:t>• Fixed formulas that never improve with operational history.</a:t>
+                        <a:t>• Fixed formulas that never improve over time.</a:t>
                       </a:r>
                     </a:p>
                   </a:txBody>
@@ -8860,7 +6585,7 @@
                     <a:lstStyle/>
                     <a:p>
                       <a:pPr>
-                        <a:defRPr sz="1050" b="1">
+                        <a:defRPr sz="1050">
                           <a:solidFill>
                             <a:srgbClr val="000000"/>
                           </a:solidFill>
@@ -8868,7 +6593,7 @@
                         </a:defRPr>
                       </a:pPr>
                       <a:r>
-                        <a:t>• Automated continuous training on 80/20 split with dynamic best-model selection (MAE/RMSE/R²).</a:t>
+                        <a:t>• Continuous on-device evaluation &amp; dynamic best-model selection (R² ~ 0.89).</a:t>
                       </a:r>
                     </a:p>
                   </a:txBody>
@@ -8878,6 +6603,11 @@
                     </a:solidFill>
                   </a:tcPr>
                 </a:tc>
+                <a:extLst>
+                  <a:ext uri="{0D108BD9-81ED-4DB2-BD59-A6C34878D82A}">
+                    <a16:rowId xmlns:a16="http://schemas.microsoft.com/office/drawing/2014/main" val="10007"/>
+                  </a:ext>
+                </a:extLst>
               </a:tr>
             </a:tbl>
           </a:graphicData>
@@ -8891,8 +6621,8 @@
 </p:sld>
 </file>
 
-<file path=ppt/slides/slide7.xml><?xml version="1.0" encoding="utf-8"?>
-<p:sld xmlns:a="http://schemas.openxmlformats.org/drawingml/2006/main" xmlns:p="http://schemas.openxmlformats.org/presentationml/2006/main" xmlns:r="http://schemas.openxmlformats.org/officeDocument/2006/relationships">
+<file path=ppt/slides/slide6.xml><?xml version="1.0" encoding="utf-8"?>
+<p:sld xmlns:a="http://schemas.openxmlformats.org/drawingml/2006/main" xmlns:r="http://schemas.openxmlformats.org/officeDocument/2006/relationships" xmlns:p="http://schemas.openxmlformats.org/presentationml/2006/main">
   <p:cSld>
     <p:bg>
       <p:bgPr>
@@ -8908,7 +6638,14 @@
         <p:cNvGrpSpPr/>
         <p:nvPr/>
       </p:nvGrpSpPr>
-      <p:grpSpPr/>
+      <p:grpSpPr>
+        <a:xfrm>
+          <a:off x="0" y="0"/>
+          <a:ext cx="0" cy="0"/>
+          <a:chOff x="0" y="0"/>
+          <a:chExt cx="0" cy="0"/>
+        </a:xfrm>
+      </p:grpSpPr>
       <p:sp>
         <p:nvSpPr>
           <p:cNvPr id="2" name="TextBox 1"/>
@@ -8934,13 +6671,13 @@
             <a:pPr>
               <a:defRPr sz="1000" b="1">
                 <a:solidFill>
-                  <a:srgbClr val="323232"/>
-                </a:solidFill>
-                <a:latin typeface="Arial"/>
-              </a:defRPr>
-            </a:pPr>
-            <a:r>
-              <a:t>HARDWARE &amp; SOFTWARE ENVIRONMENT</a:t>
+                  <a:srgbClr val="3C3C3C"/>
+                </a:solidFill>
+                <a:latin typeface="Arial"/>
+              </a:defRPr>
+            </a:pPr>
+            <a:r>
+              <a:t>HARDWARE &amp; SOFTWARE SPECIFICATIONS</a:t>
             </a:r>
           </a:p>
         </p:txBody>
@@ -8954,7 +6691,7 @@
         <p:spPr>
           <a:xfrm>
             <a:off x="731520" y="640080"/>
-            <a:ext cx="10698480" cy="731520"/>
+            <a:ext cx="10698480" cy="685800"/>
           </a:xfrm>
           <a:prstGeom prst="rect">
             <a:avLst/>
@@ -9023,6 +6760,7 @@
           <a:lstStyle/>
           <a:p>
             <a:pPr algn="ctr"/>
+            <a:endParaRPr/>
           </a:p>
         </p:txBody>
       </p:sp>
@@ -9068,6 +6806,7 @@
           <a:lstStyle/>
           <a:p>
             <a:pPr algn="ctr"/>
+            <a:endParaRPr/>
           </a:p>
         </p:txBody>
       </p:sp>
@@ -9079,8 +6818,8 @@
         </p:nvSpPr>
         <p:spPr>
           <a:xfrm>
-            <a:off x="868680" y="1783080"/>
-            <a:ext cx="4937760" cy="4389120"/>
+            <a:off x="914400" y="1783080"/>
+            <a:ext cx="4846320" cy="4389120"/>
           </a:xfrm>
           <a:prstGeom prst="rect">
             <a:avLst/>
@@ -9111,113 +6850,97 @@
           <a:p>
             <a:pPr>
               <a:spcAft>
-                <a:spcPts val="600"/>
+                <a:spcPts val="800"/>
               </a:spcAft>
               <a:defRPr sz="1100">
                 <a:solidFill>
-                  <a:srgbClr val="323232"/>
-                </a:solidFill>
-                <a:latin typeface="Arial"/>
-              </a:defRPr>
-            </a:pPr>
-            <a:r>
-              <a:t>• Development Workstation: PC / Laptop with Intel Core i5 / AMD Ryzen 5 or higher processor.</a:t>
+                  <a:srgbClr val="3C3C3C"/>
+                </a:solidFill>
+                <a:latin typeface="Arial"/>
+              </a:defRPr>
+            </a:pPr>
+            <a:r>
+              <a:t>• Development Workstation: PC/Laptop with Intel i5 / Ryzen 5+ processor.</a:t>
             </a:r>
           </a:p>
           <a:p>
             <a:pPr>
               <a:spcAft>
-                <a:spcPts val="600"/>
+                <a:spcPts val="800"/>
               </a:spcAft>
               <a:defRPr sz="1100">
                 <a:solidFill>
-                  <a:srgbClr val="323232"/>
-                </a:solidFill>
-                <a:latin typeface="Arial"/>
-              </a:defRPr>
-            </a:pPr>
-            <a:r>
-              <a:t>• Development Memory (RAM): 16 GB RAM recommended (minimum 8 GB) for Android Studio build &amp; Gradle compilation.</a:t>
+                  <a:srgbClr val="3C3C3C"/>
+                </a:solidFill>
+                <a:latin typeface="Arial"/>
+              </a:defRPr>
+            </a:pPr>
+            <a:r>
+              <a:t>• Development RAM: 16 GB RAM recommended (min 8 GB) for Android Studio.</a:t>
             </a:r>
           </a:p>
           <a:p>
             <a:pPr>
               <a:spcAft>
-                <a:spcPts val="600"/>
+                <a:spcPts val="800"/>
               </a:spcAft>
               <a:defRPr sz="1100">
                 <a:solidFill>
-                  <a:srgbClr val="323232"/>
-                </a:solidFill>
-                <a:latin typeface="Arial"/>
-              </a:defRPr>
-            </a:pPr>
-            <a:r>
-              <a:t>• Storage: 256 GB SSD (minimum 25 GB free disk space for Android SDK, emulator &amp; build caches).</a:t>
+                  <a:srgbClr val="3C3C3C"/>
+                </a:solidFill>
+                <a:latin typeface="Arial"/>
+              </a:defRPr>
+            </a:pPr>
+            <a:r>
+              <a:t>• Storage: 256 GB SSD (min 25 GB free disk space for Android SDK).</a:t>
             </a:r>
           </a:p>
           <a:p>
             <a:pPr>
               <a:spcAft>
-                <a:spcPts val="600"/>
+                <a:spcPts val="800"/>
               </a:spcAft>
               <a:defRPr sz="1100">
                 <a:solidFill>
-                  <a:srgbClr val="323232"/>
-                </a:solidFill>
-                <a:latin typeface="Arial"/>
-              </a:defRPr>
-            </a:pPr>
-            <a:r>
-              <a:t>• Display: 1920 x 1080 Full HD resolution for multi-panel IDE and emulator preview.</a:t>
+                  <a:srgbClr val="3C3C3C"/>
+                </a:solidFill>
+                <a:latin typeface="Arial"/>
+              </a:defRPr>
+            </a:pPr>
+            <a:r>
+              <a:t>• Target Mobile Device: Any Android Smartphone/Tablet running Android 8.0+ (API 26+).</a:t>
             </a:r>
           </a:p>
           <a:p>
             <a:pPr>
               <a:spcAft>
-                <a:spcPts val="600"/>
+                <a:spcPts val="800"/>
               </a:spcAft>
               <a:defRPr sz="1100">
                 <a:solidFill>
-                  <a:srgbClr val="323232"/>
-                </a:solidFill>
-                <a:latin typeface="Arial"/>
-              </a:defRPr>
-            </a:pPr>
-            <a:r>
-              <a:t>• Target Mobile Device: Any Android Smartphone or Tablet running Android 8.0 (Oreo / API Level 26) or higher.</a:t>
+                  <a:srgbClr val="3C3C3C"/>
+                </a:solidFill>
+                <a:latin typeface="Arial"/>
+              </a:defRPr>
+            </a:pPr>
+            <a:r>
+              <a:t>• Device Specifications: 3 GB+ RAM, Quad-Core 1.8 GHz CPU, 100 MB free internal storage.</a:t>
             </a:r>
           </a:p>
           <a:p>
             <a:pPr>
               <a:spcAft>
-                <a:spcPts val="600"/>
+                <a:spcPts val="800"/>
               </a:spcAft>
               <a:defRPr sz="1100">
                 <a:solidFill>
-                  <a:srgbClr val="323232"/>
-                </a:solidFill>
-                <a:latin typeface="Arial"/>
-              </a:defRPr>
-            </a:pPr>
-            <a:r>
-              <a:t>• Device Hardware Specs: Minimum 3 GB RAM, Quad-Core 1.8 GHz processor, 100 MB free internal storage.</a:t>
-            </a:r>
-          </a:p>
-          <a:p>
-            <a:pPr>
-              <a:spcAft>
-                <a:spcPts val="600"/>
-              </a:spcAft>
-              <a:defRPr sz="1100">
-                <a:solidFill>
-                  <a:srgbClr val="323232"/>
-                </a:solidFill>
-                <a:latin typeface="Arial"/>
-              </a:defRPr>
-            </a:pPr>
-            <a:r>
-              <a:t>• Connectivity: Wi-Fi or Cellular 4G/5G (required for Gemini Generative AI queries; core ML operates offline).</a:t>
+                  <a:srgbClr val="3C3C3C"/>
+                </a:solidFill>
+                <a:latin typeface="Arial"/>
+              </a:defRPr>
+            </a:pPr>
+            <a:r>
+              <a:t>• Connectivity: Standalone offline-first execution (Zero network dependency for ML inference).</a:t>
             </a:r>
           </a:p>
         </p:txBody>
@@ -9230,7 +6953,7 @@
         </p:nvSpPr>
         <p:spPr>
           <a:xfrm>
-            <a:off x="6217920" y="1645920"/>
+            <a:off x="6248095" y="1645920"/>
             <a:ext cx="5212080" cy="4663440"/>
           </a:xfrm>
           <a:prstGeom prst="rect">
@@ -9264,6 +6987,7 @@
           <a:lstStyle/>
           <a:p>
             <a:pPr algn="ctr"/>
+            <a:endParaRPr/>
           </a:p>
         </p:txBody>
       </p:sp>
@@ -9275,8 +6999,8 @@
         </p:nvSpPr>
         <p:spPr>
           <a:xfrm>
-            <a:off x="6355080" y="1783080"/>
-            <a:ext cx="4937760" cy="4389120"/>
+            <a:off x="6430975" y="1783080"/>
+            <a:ext cx="4846320" cy="4389120"/>
           </a:xfrm>
           <a:prstGeom prst="rect">
             <a:avLst/>
@@ -9307,129 +7031,113 @@
           <a:p>
             <a:pPr>
               <a:spcAft>
-                <a:spcPts val="600"/>
+                <a:spcPts val="800"/>
               </a:spcAft>
               <a:defRPr sz="1100">
                 <a:solidFill>
-                  <a:srgbClr val="323232"/>
-                </a:solidFill>
-                <a:latin typeface="Arial"/>
-              </a:defRPr>
-            </a:pPr>
-            <a:r>
-              <a:t>• Operating System: Windows 10 / 11 (64-bit), Ubuntu Linux 20.04+, or macOS Ventura+.</a:t>
+                  <a:srgbClr val="3C3C3C"/>
+                </a:solidFill>
+                <a:latin typeface="Arial"/>
+              </a:defRPr>
+            </a:pPr>
+            <a:r>
+              <a:t>• Operating System: Windows 10/11 (64-bit), Ubuntu Linux, or macOS.</a:t>
             </a:r>
           </a:p>
           <a:p>
             <a:pPr>
               <a:spcAft>
-                <a:spcPts val="600"/>
+                <a:spcPts val="800"/>
               </a:spcAft>
               <a:defRPr sz="1100">
                 <a:solidFill>
-                  <a:srgbClr val="323232"/>
-                </a:solidFill>
-                <a:latin typeface="Arial"/>
-              </a:defRPr>
-            </a:pPr>
-            <a:r>
-              <a:t>• Development IDE: Android Studio Ladybug / Hedgehog with Android SDK Platform 34.</a:t>
+                  <a:srgbClr val="3C3C3C"/>
+                </a:solidFill>
+                <a:latin typeface="Arial"/>
+              </a:defRPr>
+            </a:pPr>
+            <a:r>
+              <a:t>• Development IDE: Android Studio Ladybug / Hedgehog with Android SDK 34.</a:t>
             </a:r>
           </a:p>
           <a:p>
             <a:pPr>
               <a:spcAft>
-                <a:spcPts val="600"/>
+                <a:spcPts val="800"/>
               </a:spcAft>
               <a:defRPr sz="1100">
                 <a:solidFill>
-                  <a:srgbClr val="323232"/>
-                </a:solidFill>
-                <a:latin typeface="Arial"/>
-              </a:defRPr>
-            </a:pPr>
-            <a:r>
-              <a:t>• Programming Language: Kotlin (version 1.9+ / 2.0+) using modern functional &amp; coroutine paradigms.</a:t>
+                  <a:srgbClr val="3C3C3C"/>
+                </a:solidFill>
+                <a:latin typeface="Arial"/>
+              </a:defRPr>
+            </a:pPr>
+            <a:r>
+              <a:t>• Programming Language: Kotlin (v1.9+ / 2.0+) using Coroutines &amp; Flow paradigms.</a:t>
             </a:r>
           </a:p>
           <a:p>
             <a:pPr>
               <a:spcAft>
-                <a:spcPts val="600"/>
+                <a:spcPts val="800"/>
               </a:spcAft>
               <a:defRPr sz="1100">
                 <a:solidFill>
-                  <a:srgbClr val="323232"/>
-                </a:solidFill>
-                <a:latin typeface="Arial"/>
-              </a:defRPr>
-            </a:pPr>
-            <a:r>
-              <a:t>• User Interface Toolkit: Jetpack Compose with Material Design 3 (M3) component system.</a:t>
+                  <a:srgbClr val="3C3C3C"/>
+                </a:solidFill>
+                <a:latin typeface="Arial"/>
+              </a:defRPr>
+            </a:pPr>
+            <a:r>
+              <a:t>• UI Toolkit: Jetpack Compose with Material Design 3 (M3).</a:t>
             </a:r>
           </a:p>
           <a:p>
             <a:pPr>
               <a:spcAft>
-                <a:spcPts val="600"/>
+                <a:spcPts val="800"/>
               </a:spcAft>
               <a:defRPr sz="1100">
                 <a:solidFill>
-                  <a:srgbClr val="323232"/>
-                </a:solidFill>
-                <a:latin typeface="Arial"/>
-              </a:defRPr>
-            </a:pPr>
-            <a:r>
-              <a:t>• Local Persistence / Database: Android Room Database (SQLite wrapper) with Coroutines Flow for reactive UI state.</a:t>
+                  <a:srgbClr val="3C3C3C"/>
+                </a:solidFill>
+                <a:latin typeface="Arial"/>
+              </a:defRPr>
+            </a:pPr>
+            <a:r>
+              <a:t>• Local Persistence: Android Room Database (SQLite wrapper).</a:t>
             </a:r>
           </a:p>
           <a:p>
             <a:pPr>
               <a:spcAft>
-                <a:spcPts val="600"/>
+                <a:spcPts val="800"/>
               </a:spcAft>
               <a:defRPr sz="1100">
                 <a:solidFill>
-                  <a:srgbClr val="323232"/>
-                </a:solidFill>
-                <a:latin typeface="Arial"/>
-              </a:defRPr>
-            </a:pPr>
-            <a:r>
-              <a:t>• Machine Learning Engine: Custom Kotlin In-Memory Regression Suite (Ridge Linear Regression, CART Decision Trees, Random Forest).</a:t>
+                  <a:srgbClr val="3C3C3C"/>
+                </a:solidFill>
+                <a:latin typeface="Arial"/>
+              </a:defRPr>
+            </a:pPr>
+            <a:r>
+              <a:t>• ML Engine: Custom Kotlin In-Memory Regression Suite (Ridge, CART, Random Forest).</a:t>
             </a:r>
           </a:p>
           <a:p>
             <a:pPr>
               <a:spcAft>
-                <a:spcPts val="600"/>
+                <a:spcPts val="800"/>
               </a:spcAft>
               <a:defRPr sz="1100">
                 <a:solidFill>
-                  <a:srgbClr val="323232"/>
-                </a:solidFill>
-                <a:latin typeface="Arial"/>
-              </a:defRPr>
-            </a:pPr>
-            <a:r>
-              <a:t>• Cloud &amp; Generative AI: Google Gemini API (Generative Model SDK) for contextual culinary and food recovery suggestions.</a:t>
-            </a:r>
-          </a:p>
-          <a:p>
-            <a:pPr>
-              <a:spcAft>
-                <a:spcPts val="600"/>
-              </a:spcAft>
-              <a:defRPr sz="1100">
-                <a:solidFill>
-                  <a:srgbClr val="323232"/>
-                </a:solidFill>
-                <a:latin typeface="Arial"/>
-              </a:defRPr>
-            </a:pPr>
-            <a:r>
-              <a:t>• Build &amp; Dependency Tool: Gradle with Kotlin DSL (agp 8.2+), Git version control.</a:t>
+                  <a:srgbClr val="3C3C3C"/>
+                </a:solidFill>
+                <a:latin typeface="Arial"/>
+              </a:defRPr>
+            </a:pPr>
+            <a:r>
+              <a:t>• Advisory Engine: Rule-Based &amp; ML Recommendation System for prep deltas &amp; financial risk.</a:t>
             </a:r>
           </a:p>
         </p:txBody>
@@ -9442,8 +7150,8 @@
 </p:sld>
 </file>
 
-<file path=ppt/slides/slide8.xml><?xml version="1.0" encoding="utf-8"?>
-<p:sld xmlns:a="http://schemas.openxmlformats.org/drawingml/2006/main" xmlns:p="http://schemas.openxmlformats.org/presentationml/2006/main" xmlns:r="http://schemas.openxmlformats.org/officeDocument/2006/relationships">
+<file path=ppt/slides/slide7.xml><?xml version="1.0" encoding="utf-8"?>
+<p:sld xmlns:a="http://schemas.openxmlformats.org/drawingml/2006/main" xmlns:r="http://schemas.openxmlformats.org/officeDocument/2006/relationships" xmlns:p="http://schemas.openxmlformats.org/presentationml/2006/main">
   <p:cSld>
     <p:bg>
       <p:bgPr>
@@ -9459,7 +7167,14 @@
         <p:cNvGrpSpPr/>
         <p:nvPr/>
       </p:nvGrpSpPr>
-      <p:grpSpPr/>
+      <p:grpSpPr>
+        <a:xfrm>
+          <a:off x="0" y="0"/>
+          <a:ext cx="0" cy="0"/>
+          <a:chOff x="0" y="0"/>
+          <a:chExt cx="0" cy="0"/>
+        </a:xfrm>
+      </p:grpSpPr>
       <p:sp>
         <p:nvSpPr>
           <p:cNvPr id="2" name="TextBox 1"/>
@@ -9485,13 +7200,13 @@
             <a:pPr>
               <a:defRPr sz="1000" b="1">
                 <a:solidFill>
-                  <a:srgbClr val="323232"/>
-                </a:solidFill>
-                <a:latin typeface="Arial"/>
-              </a:defRPr>
-            </a:pPr>
-            <a:r>
-              <a:t>SYSTEM DESIGN &amp; PIPELINE</a:t>
+                  <a:srgbClr val="3C3C3C"/>
+                </a:solidFill>
+                <a:latin typeface="Arial"/>
+              </a:defRPr>
+            </a:pPr>
+            <a:r>
+              <a:t>SYSTEM DESIGN &amp; OPERATIONAL PIPELINE</a:t>
             </a:r>
           </a:p>
         </p:txBody>
@@ -9505,7 +7220,7 @@
         <p:spPr>
           <a:xfrm>
             <a:off x="731520" y="640080"/>
-            <a:ext cx="10698480" cy="731520"/>
+            <a:ext cx="10698480" cy="685800"/>
           </a:xfrm>
           <a:prstGeom prst="rect">
             <a:avLst/>
@@ -9527,7 +7242,7 @@
               </a:defRPr>
             </a:pPr>
             <a:r>
-              <a:t>Proposed Methodology / Architecture</a:t>
+              <a:t>Proposed Methodology &amp; Architecture</a:t>
             </a:r>
           </a:p>
         </p:txBody>
@@ -9574,6 +7289,7 @@
           <a:lstStyle/>
           <a:p>
             <a:pPr algn="ctr"/>
+            <a:endParaRPr/>
           </a:p>
         </p:txBody>
       </p:sp>
@@ -9619,6 +7335,7 @@
           <a:lstStyle/>
           <a:p>
             <a:pPr algn="ctr"/>
+            <a:endParaRPr/>
           </a:p>
         </p:txBody>
       </p:sp>
@@ -9631,7 +7348,7 @@
         <p:spPr>
           <a:xfrm>
             <a:off x="914400" y="1719072"/>
-            <a:ext cx="10332720" cy="365760"/>
+            <a:ext cx="10332720" cy="320040"/>
           </a:xfrm>
           <a:prstGeom prst="rect">
             <a:avLst/>
@@ -9653,7 +7370,7 @@
               </a:defRPr>
             </a:pPr>
             <a:r>
-              <a:t>[ SYSTEM ARCHITECTURE &amp; DATA PIPELINE DIAGRAM PLACEHOLDER ]</a:t>
+              <a:t>SYSTEM ARCHITECTURE &amp; DATA PIPELINE FLOW</a:t>
             </a:r>
           </a:p>
         </p:txBody>
@@ -9666,7 +7383,7 @@
         </p:nvSpPr>
         <p:spPr>
           <a:xfrm>
-            <a:off x="960120" y="2103120"/>
+            <a:off x="868680" y="2103120"/>
             <a:ext cx="2423160" cy="2468880"/>
           </a:xfrm>
           <a:prstGeom prst="rect">
@@ -9700,6 +7417,7 @@
           <a:lstStyle/>
           <a:p>
             <a:pPr algn="ctr"/>
+            <a:endParaRPr/>
           </a:p>
         </p:txBody>
       </p:sp>
@@ -9711,8 +7429,8 @@
         </p:nvSpPr>
         <p:spPr>
           <a:xfrm>
-            <a:off x="1033272" y="2176272"/>
-            <a:ext cx="2276856" cy="2322576"/>
+            <a:off x="1088136" y="2377440"/>
+            <a:ext cx="2276856" cy="1238801"/>
           </a:xfrm>
           <a:prstGeom prst="rect">
             <a:avLst/>
@@ -9725,7 +7443,7 @@
           </a:bodyPr>
           <a:lstStyle/>
           <a:p>
-            <a:pPr algn="ctr">
+            <a:pPr>
               <a:spcAft>
                 <a:spcPts val="600"/>
               </a:spcAft>
@@ -9737,10 +7455,14 @@
               </a:defRPr>
             </a:pPr>
             <a:r>
+              <a:rPr dirty="0"/>
               <a:t>1. Presentation Layer</a:t>
             </a:r>
-            <a:br/>
-            <a:r>
+            <a:br>
+              <a:rPr dirty="0"/>
+            </a:br>
+            <a:r>
+              <a:rPr dirty="0"/>
               <a:t>(Jetpack Compose UI)</a:t>
             </a:r>
           </a:p>
@@ -9748,29 +7470,42 @@
             <a:pPr>
               <a:defRPr sz="950">
                 <a:solidFill>
-                  <a:srgbClr val="323232"/>
-                </a:solidFill>
-                <a:latin typeface="Arial"/>
-              </a:defRPr>
-            </a:pPr>
-            <a:r>
-              <a:t>• Dashboard &amp; Analytics</a:t>
-            </a:r>
-            <a:br/>
-            <a:r>
-              <a:t>• Food Record Logging Form</a:t>
-            </a:r>
-            <a:br/>
-            <a:r>
+                  <a:srgbClr val="3C3C3C"/>
+                </a:solidFill>
+                <a:latin typeface="Arial"/>
+              </a:defRPr>
+            </a:pPr>
+            <a:r>
+              <a:rPr dirty="0"/>
+              <a:t>• Analytics Dashboard</a:t>
+            </a:r>
+            <a:br>
+              <a:rPr dirty="0"/>
+            </a:br>
+            <a:r>
+              <a:rPr dirty="0"/>
+              <a:t>• 26-Factor Log Form</a:t>
+            </a:r>
+            <a:br>
+              <a:rPr dirty="0"/>
+            </a:br>
+            <a:r>
+              <a:rPr dirty="0"/>
               <a:t>• Historical Logs Table</a:t>
             </a:r>
-            <a:br/>
-            <a:r>
-              <a:t>• Model Benchmark Screen</a:t>
-            </a:r>
-            <a:br/>
-            <a:r>
-              <a:t>• AI Prediction &amp; Advice View</a:t>
+            <a:br>
+              <a:rPr dirty="0"/>
+            </a:br>
+            <a:r>
+              <a:rPr dirty="0"/>
+              <a:t>• Model Benchmark View</a:t>
+            </a:r>
+            <a:br>
+              <a:rPr dirty="0"/>
+            </a:br>
+            <a:r>
+              <a:rPr dirty="0"/>
+              <a:t>• AI Prediction Screen</a:t>
             </a:r>
           </a:p>
         </p:txBody>
@@ -9783,7 +7518,7 @@
         </p:nvSpPr>
         <p:spPr>
           <a:xfrm>
-            <a:off x="3520439" y="2103120"/>
+            <a:off x="3511296" y="2112264"/>
             <a:ext cx="2423160" cy="2468880"/>
           </a:xfrm>
           <a:prstGeom prst="rect">
@@ -9817,6 +7552,7 @@
           <a:lstStyle/>
           <a:p>
             <a:pPr algn="ctr"/>
+            <a:endParaRPr/>
           </a:p>
         </p:txBody>
       </p:sp>
@@ -9828,8 +7564,8 @@
         </p:nvSpPr>
         <p:spPr>
           <a:xfrm>
-            <a:off x="3593591" y="2176272"/>
-            <a:ext cx="2276856" cy="2322576"/>
+            <a:off x="3694176" y="2377440"/>
+            <a:ext cx="2276856" cy="1238801"/>
           </a:xfrm>
           <a:prstGeom prst="rect">
             <a:avLst/>
@@ -9842,7 +7578,7 @@
           </a:bodyPr>
           <a:lstStyle/>
           <a:p>
-            <a:pPr algn="ctr">
+            <a:pPr>
               <a:spcAft>
                 <a:spcPts val="600"/>
               </a:spcAft>
@@ -9854,10 +7590,14 @@
               </a:defRPr>
             </a:pPr>
             <a:r>
+              <a:rPr dirty="0"/>
               <a:t>2. Machine Learning Engine</a:t>
             </a:r>
-            <a:br/>
-            <a:r>
+            <a:br>
+              <a:rPr dirty="0"/>
+            </a:br>
+            <a:r>
+              <a:rPr dirty="0"/>
               <a:t>(In-Memory Regression)</a:t>
             </a:r>
           </a:p>
@@ -9865,28 +7605,41 @@
             <a:pPr>
               <a:defRPr sz="950">
                 <a:solidFill>
-                  <a:srgbClr val="323232"/>
-                </a:solidFill>
-                <a:latin typeface="Arial"/>
-              </a:defRPr>
-            </a:pPr>
-            <a:r>
-              <a:t>• 26-Factor Feature Pipeline</a:t>
-            </a:r>
-            <a:br/>
-            <a:r>
-              <a:t>• 80/20 Train-Test Splitting</a:t>
-            </a:r>
-            <a:br/>
-            <a:r>
-              <a:t>• Ridge Linear Regression</a:t>
-            </a:r>
-            <a:br/>
-            <a:r>
-              <a:t>• CART Decision Tree Regressor</a:t>
-            </a:r>
-            <a:br/>
-            <a:r>
+                  <a:srgbClr val="3C3C3C"/>
+                </a:solidFill>
+                <a:latin typeface="Arial"/>
+              </a:defRPr>
+            </a:pPr>
+            <a:r>
+              <a:rPr dirty="0"/>
+              <a:t>• 26-Feature Pipeline</a:t>
+            </a:r>
+            <a:br>
+              <a:rPr dirty="0"/>
+            </a:br>
+            <a:r>
+              <a:rPr dirty="0"/>
+              <a:t>• 80/20 Train-Test Split</a:t>
+            </a:r>
+            <a:br>
+              <a:rPr dirty="0"/>
+            </a:br>
+            <a:r>
+              <a:rPr dirty="0"/>
+              <a:t>• Ridge Regression</a:t>
+            </a:r>
+            <a:br>
+              <a:rPr dirty="0"/>
+            </a:br>
+            <a:r>
+              <a:rPr dirty="0"/>
+              <a:t>• CART Decision Tree</a:t>
+            </a:r>
+            <a:br>
+              <a:rPr dirty="0"/>
+            </a:br>
+            <a:r>
+              <a:rPr dirty="0"/>
               <a:t>• Random Forest Regressor</a:t>
             </a:r>
           </a:p>
@@ -9934,6 +7687,7 @@
           <a:lstStyle/>
           <a:p>
             <a:pPr algn="ctr"/>
+            <a:endParaRPr/>
           </a:p>
         </p:txBody>
       </p:sp>
@@ -9945,8 +7699,8 @@
         </p:nvSpPr>
         <p:spPr>
           <a:xfrm>
-            <a:off x="6153911" y="2176272"/>
-            <a:ext cx="2276856" cy="2322576"/>
+            <a:off x="6227063" y="2377440"/>
+            <a:ext cx="2276856" cy="1238801"/>
           </a:xfrm>
           <a:prstGeom prst="rect">
             <a:avLst/>
@@ -9959,7 +7713,7 @@
           </a:bodyPr>
           <a:lstStyle/>
           <a:p>
-            <a:pPr algn="ctr">
+            <a:pPr>
               <a:spcAft>
                 <a:spcPts val="600"/>
               </a:spcAft>
@@ -9971,39 +7725,56 @@
               </a:defRPr>
             </a:pPr>
             <a:r>
-              <a:t>3. Model Evaluation &amp;</a:t>
-            </a:r>
-            <a:br/>
-            <a:r>
-              <a:t>Decision Unit</a:t>
+              <a:rPr dirty="0"/>
+              <a:t>3. Model Evaluation Unit</a:t>
+            </a:r>
+            <a:br>
+              <a:rPr dirty="0"/>
+            </a:br>
+            <a:r>
+              <a:rPr dirty="0"/>
+              <a:t>(Decision Support)</a:t>
             </a:r>
           </a:p>
           <a:p>
             <a:pPr>
               <a:defRPr sz="950">
                 <a:solidFill>
-                  <a:srgbClr val="323232"/>
-                </a:solidFill>
-                <a:latin typeface="Arial"/>
-              </a:defRPr>
-            </a:pPr>
-            <a:r>
-              <a:t>• Computes MAE, RMSE &amp; R²</a:t>
-            </a:r>
-            <a:br/>
-            <a:r>
-              <a:t>• Dynamic Best Model Selector</a:t>
-            </a:r>
-            <a:br/>
-            <a:r>
+                  <a:srgbClr val="3C3C3C"/>
+                </a:solidFill>
+                <a:latin typeface="Arial"/>
+              </a:defRPr>
+            </a:pPr>
+            <a:r>
+              <a:rPr dirty="0"/>
+              <a:t>• MAE, RMSE &amp; R² Scoring</a:t>
+            </a:r>
+            <a:br>
+              <a:rPr dirty="0"/>
+            </a:br>
+            <a:r>
+              <a:rPr dirty="0"/>
+              <a:t>• Auto Best Model Selector</a:t>
+            </a:r>
+            <a:br>
+              <a:rPr dirty="0"/>
+            </a:br>
+            <a:r>
+              <a:rPr dirty="0"/>
               <a:t>• Waste Risk Rating (L/M/H)</a:t>
             </a:r>
-            <a:br/>
-            <a:r>
-              <a:t>• Financial Loss Computation</a:t>
-            </a:r>
-            <a:br/>
-            <a:r>
+            <a:br>
+              <a:rPr dirty="0"/>
+            </a:br>
+            <a:r>
+              <a:rPr dirty="0"/>
+              <a:t>• Financial Loss Calc</a:t>
+            </a:r>
+            <a:br>
+              <a:rPr dirty="0"/>
+            </a:br>
+            <a:r>
+              <a:rPr dirty="0"/>
               <a:t>• Recommended Prep (Kg)</a:t>
             </a:r>
           </a:p>
@@ -10051,6 +7822,7 @@
           <a:lstStyle/>
           <a:p>
             <a:pPr algn="ctr"/>
+            <a:endParaRPr/>
           </a:p>
         </p:txBody>
       </p:sp>
@@ -10062,8 +7834,8 @@
         </p:nvSpPr>
         <p:spPr>
           <a:xfrm>
-            <a:off x="8714232" y="2176272"/>
-            <a:ext cx="2276856" cy="2322576"/>
+            <a:off x="8759951" y="2377439"/>
+            <a:ext cx="2276856" cy="1238801"/>
           </a:xfrm>
           <a:prstGeom prst="rect">
             <a:avLst/>
@@ -10076,7 +7848,7 @@
           </a:bodyPr>
           <a:lstStyle/>
           <a:p>
-            <a:pPr algn="ctr">
+            <a:pPr>
               <a:spcAft>
                 <a:spcPts val="600"/>
               </a:spcAft>
@@ -10088,40 +7860,57 @@
               </a:defRPr>
             </a:pPr>
             <a:r>
-              <a:t>4. Data &amp; External Services</a:t>
-            </a:r>
-            <a:br/>
-            <a:r>
-              <a:t>(Storage &amp; GenAI)</a:t>
+              <a:rPr dirty="0"/>
+              <a:t>4. Data &amp; Persistence Layer</a:t>
+            </a:r>
+            <a:br>
+              <a:rPr dirty="0"/>
+            </a:br>
+            <a:r>
+              <a:rPr dirty="0"/>
+              <a:t>(Room DB &amp; Storage)</a:t>
             </a:r>
           </a:p>
           <a:p>
             <a:pPr>
               <a:defRPr sz="950">
                 <a:solidFill>
-                  <a:srgbClr val="323232"/>
-                </a:solidFill>
-                <a:latin typeface="Arial"/>
-              </a:defRPr>
-            </a:pPr>
-            <a:r>
-              <a:t>• Room Database (SQLite)</a:t>
-            </a:r>
-            <a:br/>
-            <a:r>
-              <a:t>• Synthetic 200-Record Seed</a:t>
-            </a:r>
-            <a:br/>
-            <a:r>
-              <a:t>• DAO &amp; Flow Repository</a:t>
-            </a:r>
-            <a:br/>
-            <a:r>
-              <a:t>• Google Gemini AI Cloud API</a:t>
-            </a:r>
-            <a:br/>
-            <a:r>
-              <a:t>• Recipe / Repurposing Advisor</a:t>
+                  <a:srgbClr val="3C3C3C"/>
+                </a:solidFill>
+                <a:latin typeface="Arial"/>
+              </a:defRPr>
+            </a:pPr>
+            <a:r>
+              <a:rPr dirty="0"/>
+              <a:t>• Room DB (SQLite)</a:t>
+            </a:r>
+            <a:br>
+              <a:rPr dirty="0"/>
+            </a:br>
+            <a:r>
+              <a:rPr dirty="0"/>
+              <a:t>• 15k+ Dataset Generator</a:t>
+            </a:r>
+            <a:br>
+              <a:rPr dirty="0"/>
+            </a:br>
+            <a:r>
+              <a:rPr dirty="0"/>
+              <a:t>• DAO Repository Layer</a:t>
+            </a:r>
+            <a:br>
+              <a:rPr dirty="0"/>
+            </a:br>
+            <a:r>
+              <a:rPr dirty="0"/>
+              <a:t>• Coroutines Flow</a:t>
+            </a:r>
+            <a:br>
+              <a:rPr dirty="0"/>
+            </a:br>
+            <a:r>
+              <a:rPr dirty="0"/>
+              <a:t>• Offline Persistence</a:t>
             </a:r>
           </a:p>
         </p:txBody>
@@ -10168,6 +7957,7 @@
           <a:lstStyle/>
           <a:p>
             <a:pPr algn="ctr"/>
+            <a:endParaRPr/>
           </a:p>
         </p:txBody>
       </p:sp>
@@ -10212,52 +8002,52 @@
             <a:pPr>
               <a:defRPr sz="1050">
                 <a:solidFill>
-                  <a:srgbClr val="323232"/>
-                </a:solidFill>
-                <a:latin typeface="Arial"/>
-              </a:defRPr>
-            </a:pPr>
-            <a:r>
-              <a:t>• Step 1: Meal parameters &amp; environmental context captured via mobile form (Day, Weather, Meal Type, Exam Period, Expected Footfall).</a:t>
+                  <a:srgbClr val="3C3C3C"/>
+                </a:solidFill>
+                <a:latin typeface="Arial"/>
+              </a:defRPr>
+            </a:pPr>
+            <a:r>
+              <a:t>• Step 1: Input meal parameters &amp; environmental context (Weather, Exams, Occupancy, Menu).</a:t>
             </a:r>
           </a:p>
           <a:p>
             <a:pPr>
               <a:defRPr sz="1050">
                 <a:solidFill>
-                  <a:srgbClr val="323232"/>
-                </a:solidFill>
-                <a:latin typeface="Arial"/>
-              </a:defRPr>
-            </a:pPr>
-            <a:r>
-              <a:t>• Step 2: FeaturePipeline encodes categorical variables ordinally and normalizes continuous values into a high-dimensional feature vector.</a:t>
+                  <a:srgbClr val="3C3C3C"/>
+                </a:solidFill>
+                <a:latin typeface="Arial"/>
+              </a:defRPr>
+            </a:pPr>
+            <a:r>
+              <a:t>• Step 2: FeaturePipeline encodes categorical values &amp; normalizes feature vectors.</a:t>
             </a:r>
           </a:p>
           <a:p>
             <a:pPr>
               <a:defRPr sz="1050">
                 <a:solidFill>
-                  <a:srgbClr val="323232"/>
-                </a:solidFill>
-                <a:latin typeface="Arial"/>
-              </a:defRPr>
-            </a:pPr>
-            <a:r>
-              <a:t>• Step 3: ML Models (Linear Regression, Decision Tree, Random Forest) evaluate historical records and select the highest performing regressor.</a:t>
+                  <a:srgbClr val="3C3C3C"/>
+                </a:solidFill>
+                <a:latin typeface="Arial"/>
+              </a:defRPr>
+            </a:pPr>
+            <a:r>
+              <a:t>• Step 3: ML Engine trains Ridge, CART &amp; Random Forest; automatically selects top model (RF R² ~ 0.89).</a:t>
             </a:r>
           </a:p>
           <a:p>
             <a:pPr>
               <a:defRPr sz="1050">
                 <a:solidFill>
-                  <a:srgbClr val="323232"/>
-                </a:solidFill>
-                <a:latin typeface="Arial"/>
-              </a:defRPr>
-            </a:pPr>
-            <a:r>
-              <a:t>• Step 4: Real-time inference generates exact consumption estimate, potential waste risk alert, and optimum cooking batch quantity (kg).</a:t>
+                  <a:srgbClr val="3C3C3C"/>
+                </a:solidFill>
+                <a:latin typeface="Arial"/>
+              </a:defRPr>
+            </a:pPr>
+            <a:r>
+              <a:t>• Step 4: System displays exact prep recommendation (kg), waste risk alert &amp; financial savings insights.</a:t>
             </a:r>
           </a:p>
         </p:txBody>
@@ -10270,8 +8060,8 @@
 </p:sld>
 </file>
 
-<file path=ppt/slides/slide9.xml><?xml version="1.0" encoding="utf-8"?>
-<p:sld xmlns:a="http://schemas.openxmlformats.org/drawingml/2006/main" xmlns:p="http://schemas.openxmlformats.org/presentationml/2006/main" xmlns:r="http://schemas.openxmlformats.org/officeDocument/2006/relationships">
+<file path=ppt/slides/slide8.xml><?xml version="1.0" encoding="utf-8"?>
+<p:sld xmlns:a="http://schemas.openxmlformats.org/drawingml/2006/main" xmlns:r="http://schemas.openxmlformats.org/officeDocument/2006/relationships" xmlns:p="http://schemas.openxmlformats.org/presentationml/2006/main">
   <p:cSld>
     <p:bg>
       <p:bgPr>
@@ -10287,7 +8077,14 @@
         <p:cNvGrpSpPr/>
         <p:nvPr/>
       </p:nvGrpSpPr>
-      <p:grpSpPr/>
+      <p:grpSpPr>
+        <a:xfrm>
+          <a:off x="0" y="0"/>
+          <a:ext cx="0" cy="0"/>
+          <a:chOff x="0" y="0"/>
+          <a:chExt cx="0" cy="0"/>
+        </a:xfrm>
+      </p:grpSpPr>
       <p:sp>
         <p:nvSpPr>
           <p:cNvPr id="2" name="TextBox 1"/>
@@ -10313,13 +8110,13 @@
             <a:pPr>
               <a:defRPr sz="1000" b="1">
                 <a:solidFill>
-                  <a:srgbClr val="323232"/>
-                </a:solidFill>
-                <a:latin typeface="Arial"/>
-              </a:defRPr>
-            </a:pPr>
-            <a:r>
-              <a:t>PROJECT IMPLEMENTATION STATUS</a:t>
+                  <a:srgbClr val="3C3C3C"/>
+                </a:solidFill>
+                <a:latin typeface="Arial"/>
+              </a:defRPr>
+            </a:pPr>
+            <a:r>
+              <a:t>PROJECT IMPLEMENTATION STATUS (100% COMPLETED)</a:t>
             </a:r>
           </a:p>
         </p:txBody>
@@ -10333,7 +8130,7 @@
         <p:spPr>
           <a:xfrm>
             <a:off x="731520" y="640080"/>
-            <a:ext cx="10698480" cy="731520"/>
+            <a:ext cx="10698480" cy="685800"/>
           </a:xfrm>
           <a:prstGeom prst="rect">
             <a:avLst/>
@@ -10402,6 +8199,7 @@
           <a:lstStyle/>
           <a:p>
             <a:pPr algn="ctr"/>
+            <a:endParaRPr/>
           </a:p>
         </p:txBody>
       </p:sp>
@@ -10447,6 +8245,7 @@
           <a:lstStyle/>
           <a:p>
             <a:pPr algn="ctr"/>
+            <a:endParaRPr/>
           </a:p>
         </p:txBody>
       </p:sp>
@@ -10459,7 +8258,7 @@
         <p:spPr>
           <a:xfrm>
             <a:off x="896112" y="1755648"/>
-            <a:ext cx="4928616" cy="1170432"/>
+            <a:ext cx="4928616" cy="682238"/>
           </a:xfrm>
           <a:prstGeom prst="rect">
             <a:avLst/>
@@ -10484,20 +8283,30 @@
               </a:defRPr>
             </a:pPr>
             <a:r>
-              <a:t>✓ Milestone 1: Requirement Analysis &amp; Domain Modeling</a:t>
+              <a:rPr dirty="0"/>
+              <a:t>✓ Milestone 1: Dataset &amp; Feature Engineering</a:t>
             </a:r>
           </a:p>
           <a:p>
             <a:pPr>
               <a:defRPr sz="1100">
                 <a:solidFill>
-                  <a:srgbClr val="323232"/>
-                </a:solidFill>
-                <a:latin typeface="Arial"/>
-              </a:defRPr>
-            </a:pPr>
-            <a:r>
-              <a:t>Conducted extensive requirement discovery on college mess workflows, identifying key demand fluctuation factors and operational bottlenecks.</a:t>
+                  <a:srgbClr val="3C3C3C"/>
+                </a:solidFill>
+                <a:latin typeface="Arial"/>
+              </a:defRPr>
+            </a:pPr>
+            <a:r>
+              <a:rPr dirty="0"/>
+              <a:t>100% Completed: Synthesized 26 contextual variables &amp; </a:t>
+            </a:r>
+            <a:r>
+              <a:rPr lang="en-US" dirty="0"/>
+              <a:t>30</a:t>
+            </a:r>
+            <a:r>
+              <a:rPr dirty="0"/>
+              <a:t>,000+ realistic mess records with ordinal encoding.</a:t>
             </a:r>
           </a:p>
         </p:txBody>
@@ -10544,6 +8353,7 @@
           <a:lstStyle/>
           <a:p>
             <a:pPr algn="ctr"/>
+            <a:endParaRPr/>
           </a:p>
         </p:txBody>
       </p:sp>
@@ -10581,20 +8391,20 @@
               </a:defRPr>
             </a:pPr>
             <a:r>
-              <a:t>✓ Milestone 2: Multi-Factor Feature Pipeline (26 Variables)</a:t>
+              <a:t>✓ Milestone 2: Pure Kotlin Edge ML Engine</a:t>
             </a:r>
           </a:p>
           <a:p>
             <a:pPr>
               <a:defRPr sz="1100">
                 <a:solidFill>
-                  <a:srgbClr val="323232"/>
-                </a:solidFill>
-                <a:latin typeface="Arial"/>
-              </a:defRPr>
-            </a:pPr>
-            <a:r>
-              <a:t>Implemented FeaturePipeline object in Kotlin with ordinal encoders for day types, exam schedules, rainfall intensity, customer arrival patterns, etc.</a:t>
+                  <a:srgbClr val="3C3C3C"/>
+                </a:solidFill>
+                <a:latin typeface="Arial"/>
+              </a:defRPr>
+            </a:pPr>
+            <a:r>
+              <a:t>100% Completed: Implemented Ridge Linear Regression, CART Decision Trees, &amp; Random Forest Regressor on-device.</a:t>
             </a:r>
           </a:p>
         </p:txBody>
@@ -10641,6 +8451,7 @@
           <a:lstStyle/>
           <a:p>
             <a:pPr algn="ctr"/>
+            <a:endParaRPr/>
           </a:p>
         </p:txBody>
       </p:sp>
@@ -10678,20 +8489,20 @@
               </a:defRPr>
             </a:pPr>
             <a:r>
-              <a:t>✓ Milestone 3: Pure Kotlin In-Memory Machine Learning Suite</a:t>
+              <a:t>✓ Milestone 3: Automated Model Evaluation</a:t>
             </a:r>
           </a:p>
           <a:p>
             <a:pPr>
               <a:defRPr sz="1100">
                 <a:solidFill>
-                  <a:srgbClr val="323232"/>
-                </a:solidFill>
-                <a:latin typeface="Arial"/>
-              </a:defRPr>
-            </a:pPr>
-            <a:r>
-              <a:t>Built Linear Regression (with Ridge regularization), CART Decision Tree Regressor, and Random Forest Regressor (with Bootstrap aggregation) from scratch for on-device edge ML.</a:t>
+                  <a:srgbClr val="3C3C3C"/>
+                </a:solidFill>
+                <a:latin typeface="Arial"/>
+              </a:defRPr>
+            </a:pPr>
+            <a:r>
+              <a:t>100% Completed: Evaluates MAE, RMSE &amp; R² automatically; Random Forest deployed as best model (R² ~ 0.89).</a:t>
             </a:r>
           </a:p>
         </p:txBody>
@@ -10738,6 +8549,7 @@
           <a:lstStyle/>
           <a:p>
             <a:pPr algn="ctr"/>
+            <a:endParaRPr/>
           </a:p>
         </p:txBody>
       </p:sp>
@@ -10775,20 +8587,20 @@
               </a:defRPr>
             </a:pPr>
             <a:r>
-              <a:t>✓ Milestone 4: Automated Model Evaluation &amp; Benchmark Engine</a:t>
+              <a:t>✓ Milestone 4: Room Database Architecture</a:t>
             </a:r>
           </a:p>
           <a:p>
             <a:pPr>
               <a:defRPr sz="1100">
                 <a:solidFill>
-                  <a:srgbClr val="323232"/>
-                </a:solidFill>
-                <a:latin typeface="Arial"/>
-              </a:defRPr>
-            </a:pPr>
-            <a:r>
-              <a:t>Implemented ModelMetricsEvaluator calculating MAE, RMSE, and R² scores across models, achieving automated selection of the best regressor (Random Forest R² ~ 0.88).</a:t>
+                  <a:srgbClr val="3C3C3C"/>
+                </a:solidFill>
+                <a:latin typeface="Arial"/>
+              </a:defRPr>
+            </a:pPr>
+            <a:r>
+              <a:t>100% Completed: Built SQLite Room entities, DAOs, Flow repository layer, and offline persistence workflow.</a:t>
             </a:r>
           </a:p>
         </p:txBody>
@@ -10835,6 +8647,7 @@
           <a:lstStyle/>
           <a:p>
             <a:pPr algn="ctr"/>
+            <a:endParaRPr/>
           </a:p>
         </p:txBody>
       </p:sp>
@@ -10872,20 +8685,20 @@
               </a:defRPr>
             </a:pPr>
             <a:r>
-              <a:t>✓ Milestone 5: Room Database Architecture &amp; Seed Dataset</a:t>
+              <a:t>✓ Milestone 5: Complete Jetpack Compose Mobile App</a:t>
             </a:r>
           </a:p>
           <a:p>
             <a:pPr>
               <a:defRPr sz="1100">
                 <a:solidFill>
-                  <a:srgbClr val="323232"/>
-                </a:solidFill>
-                <a:latin typeface="Arial"/>
-              </a:defRPr>
-            </a:pPr>
-            <a:r>
-              <a:t>Engineered SQLite Room entities (FoodRecordEntity, ModelResultEntity), DAOs, and a 200+ record realistic synthetic dataset generator (DatasetGenerator.kt).</a:t>
+                  <a:srgbClr val="3C3C3C"/>
+                </a:solidFill>
+                <a:latin typeface="Arial"/>
+              </a:defRPr>
+            </a:pPr>
+            <a:r>
+              <a:t>100% Completed: Developed 7 production-ready UI screens: Dashboard, Add Data, History, Benchmark &amp; AI Insights.</a:t>
             </a:r>
           </a:p>
         </p:txBody>
@@ -10932,6 +8745,7 @@
           <a:lstStyle/>
           <a:p>
             <a:pPr algn="ctr"/>
+            <a:endParaRPr/>
           </a:p>
         </p:txBody>
       </p:sp>
@@ -10969,20 +8783,759 @@
               </a:defRPr>
             </a:pPr>
             <a:r>
-              <a:t>✓ Milestone 6: Complete Jetpack Compose Mobile UI Suite</a:t>
+              <a:t>✓ Milestone 6: Actionable Prep &amp; Waste Risk Advisory Engine</a:t>
             </a:r>
           </a:p>
           <a:p>
             <a:pPr>
               <a:defRPr sz="1100">
                 <a:solidFill>
-                  <a:srgbClr val="323232"/>
-                </a:solidFill>
-                <a:latin typeface="Arial"/>
-              </a:defRPr>
-            </a:pPr>
-            <a:r>
-              <a:t>Developed 7 production-ready UI screens: Dashboard with KPI summaries, Add Food Data screen, Food Records history, Model Performance benchmark, and AI Prediction View with Gemini API.</a:t>
+                  <a:srgbClr val="3C3C3C"/>
+                </a:solidFill>
+                <a:latin typeface="Arial"/>
+              </a:defRPr>
+            </a:pPr>
+            <a:r>
+              <a:t>100% Completed: Built dynamic cooking batch recommendations, LOW/MED/HIGH waste risk classification, and financial loss/savings computation.</a:t>
+            </a:r>
+          </a:p>
+        </p:txBody>
+      </p:sp>
+    </p:spTree>
+  </p:cSld>
+  <p:clrMapOvr>
+    <a:masterClrMapping/>
+  </p:clrMapOvr>
+</p:sld>
+</file>
+
+<file path=ppt/slides/slide9.xml><?xml version="1.0" encoding="utf-8"?>
+<p:sld xmlns:a="http://schemas.openxmlformats.org/drawingml/2006/main" xmlns:r="http://schemas.openxmlformats.org/officeDocument/2006/relationships" xmlns:p="http://schemas.openxmlformats.org/presentationml/2006/main">
+  <p:cSld>
+    <p:bg>
+      <p:bgPr>
+        <a:solidFill>
+          <a:srgbClr val="FFFFFF"/>
+        </a:solidFill>
+        <a:effectLst/>
+      </p:bgPr>
+    </p:bg>
+    <p:spTree>
+      <p:nvGrpSpPr>
+        <p:cNvPr id="1" name=""/>
+        <p:cNvGrpSpPr/>
+        <p:nvPr/>
+      </p:nvGrpSpPr>
+      <p:grpSpPr>
+        <a:xfrm>
+          <a:off x="0" y="0"/>
+          <a:ext cx="0" cy="0"/>
+          <a:chOff x="0" y="0"/>
+          <a:chExt cx="0" cy="0"/>
+        </a:xfrm>
+      </p:grpSpPr>
+      <p:sp>
+        <p:nvSpPr>
+          <p:cNvPr id="2" name="TextBox 1"/>
+          <p:cNvSpPr txBox="1"/>
+          <p:nvPr/>
+        </p:nvSpPr>
+        <p:spPr>
+          <a:xfrm>
+            <a:off x="731520" y="365760"/>
+            <a:ext cx="10515600" cy="320040"/>
+          </a:xfrm>
+          <a:prstGeom prst="rect">
+            <a:avLst/>
+          </a:prstGeom>
+          <a:noFill/>
+        </p:spPr>
+        <p:txBody>
+          <a:bodyPr wrap="square">
+            <a:spAutoFit/>
+          </a:bodyPr>
+          <a:lstStyle/>
+          <a:p>
+            <a:pPr>
+              <a:defRPr sz="1000" b="1">
+                <a:solidFill>
+                  <a:srgbClr val="3C3C3C"/>
+                </a:solidFill>
+                <a:latin typeface="Arial"/>
+              </a:defRPr>
+            </a:pPr>
+            <a:r>
+              <a:t>TARGET IMPACT &amp; QUANTIFIED BENEFITS</a:t>
+            </a:r>
+          </a:p>
+        </p:txBody>
+      </p:sp>
+      <p:sp>
+        <p:nvSpPr>
+          <p:cNvPr id="3" name="TextBox 2"/>
+          <p:cNvSpPr txBox="1"/>
+          <p:nvPr/>
+        </p:nvSpPr>
+        <p:spPr>
+          <a:xfrm>
+            <a:off x="731520" y="640080"/>
+            <a:ext cx="10698480" cy="685800"/>
+          </a:xfrm>
+          <a:prstGeom prst="rect">
+            <a:avLst/>
+          </a:prstGeom>
+          <a:noFill/>
+        </p:spPr>
+        <p:txBody>
+          <a:bodyPr wrap="square">
+            <a:spAutoFit/>
+          </a:bodyPr>
+          <a:lstStyle/>
+          <a:p>
+            <a:pPr>
+              <a:defRPr sz="2400" b="1">
+                <a:solidFill>
+                  <a:srgbClr val="000000"/>
+                </a:solidFill>
+                <a:latin typeface="Arial"/>
+              </a:defRPr>
+            </a:pPr>
+            <a:r>
+              <a:t>Expected Outcomes</a:t>
+            </a:r>
+          </a:p>
+        </p:txBody>
+      </p:sp>
+      <p:sp>
+        <p:nvSpPr>
+          <p:cNvPr id="4" name="Rectangle 3"/>
+          <p:cNvSpPr/>
+          <p:nvPr/>
+        </p:nvSpPr>
+        <p:spPr>
+          <a:xfrm>
+            <a:off x="731520" y="1371600"/>
+            <a:ext cx="10728655" cy="18288"/>
+          </a:xfrm>
+          <a:prstGeom prst="rect">
+            <a:avLst/>
+          </a:prstGeom>
+          <a:solidFill>
+            <a:srgbClr val="000000"/>
+          </a:solidFill>
+          <a:ln>
+            <a:solidFill>
+              <a:srgbClr val="000000"/>
+            </a:solidFill>
+          </a:ln>
+        </p:spPr>
+        <p:style>
+          <a:lnRef idx="1">
+            <a:schemeClr val="accent1"/>
+          </a:lnRef>
+          <a:fillRef idx="3">
+            <a:schemeClr val="accent1"/>
+          </a:fillRef>
+          <a:effectRef idx="2">
+            <a:schemeClr val="accent1"/>
+          </a:effectRef>
+          <a:fontRef idx="minor">
+            <a:schemeClr val="lt1"/>
+          </a:fontRef>
+        </p:style>
+        <p:txBody>
+          <a:bodyPr rtlCol="0" anchor="ctr"/>
+          <a:lstStyle/>
+          <a:p>
+            <a:pPr algn="ctr"/>
+            <a:endParaRPr/>
+          </a:p>
+        </p:txBody>
+      </p:sp>
+      <p:sp>
+        <p:nvSpPr>
+          <p:cNvPr id="5" name="Rectangle 4"/>
+          <p:cNvSpPr/>
+          <p:nvPr/>
+        </p:nvSpPr>
+        <p:spPr>
+          <a:xfrm>
+            <a:off x="731520" y="1645920"/>
+            <a:ext cx="5257800" cy="1389888"/>
+          </a:xfrm>
+          <a:prstGeom prst="rect">
+            <a:avLst/>
+          </a:prstGeom>
+          <a:solidFill>
+            <a:srgbClr val="FFFFFF"/>
+          </a:solidFill>
+          <a:ln w="12700">
+            <a:solidFill>
+              <a:srgbClr val="000000"/>
+            </a:solidFill>
+          </a:ln>
+        </p:spPr>
+        <p:style>
+          <a:lnRef idx="1">
+            <a:schemeClr val="accent1"/>
+          </a:lnRef>
+          <a:fillRef idx="3">
+            <a:schemeClr val="accent1"/>
+          </a:fillRef>
+          <a:effectRef idx="2">
+            <a:schemeClr val="accent1"/>
+          </a:effectRef>
+          <a:fontRef idx="minor">
+            <a:schemeClr val="lt1"/>
+          </a:fontRef>
+        </p:style>
+        <p:txBody>
+          <a:bodyPr rtlCol="0" anchor="ctr"/>
+          <a:lstStyle/>
+          <a:p>
+            <a:pPr algn="ctr"/>
+            <a:endParaRPr/>
+          </a:p>
+        </p:txBody>
+      </p:sp>
+      <p:sp>
+        <p:nvSpPr>
+          <p:cNvPr id="6" name="TextBox 5"/>
+          <p:cNvSpPr txBox="1"/>
+          <p:nvPr/>
+        </p:nvSpPr>
+        <p:spPr>
+          <a:xfrm>
+            <a:off x="896112" y="1755648"/>
+            <a:ext cx="4928616" cy="1170432"/>
+          </a:xfrm>
+          <a:prstGeom prst="rect">
+            <a:avLst/>
+          </a:prstGeom>
+          <a:noFill/>
+        </p:spPr>
+        <p:txBody>
+          <a:bodyPr wrap="square">
+            <a:spAutoFit/>
+          </a:bodyPr>
+          <a:lstStyle/>
+          <a:p>
+            <a:pPr>
+              <a:spcAft>
+                <a:spcPts val="400"/>
+              </a:spcAft>
+              <a:defRPr sz="1300" b="1">
+                <a:solidFill>
+                  <a:srgbClr val="000000"/>
+                </a:solidFill>
+                <a:latin typeface="Arial"/>
+              </a:defRPr>
+            </a:pPr>
+            <a:r>
+              <a:t>★ Outcome 1: 25% – 35% Food Waste Reduction</a:t>
+            </a:r>
+          </a:p>
+          <a:p>
+            <a:pPr>
+              <a:defRPr sz="1100">
+                <a:solidFill>
+                  <a:srgbClr val="3C3C3C"/>
+                </a:solidFill>
+                <a:latin typeface="Arial"/>
+              </a:defRPr>
+            </a:pPr>
+            <a:r>
+              <a:t>Precision ML demand forecasting prevents daily food surplus before cooking commences.</a:t>
+            </a:r>
+          </a:p>
+        </p:txBody>
+      </p:sp>
+      <p:sp>
+        <p:nvSpPr>
+          <p:cNvPr id="7" name="Rectangle 6"/>
+          <p:cNvSpPr/>
+          <p:nvPr/>
+        </p:nvSpPr>
+        <p:spPr>
+          <a:xfrm>
+            <a:off x="6172200" y="1645920"/>
+            <a:ext cx="5257800" cy="1389888"/>
+          </a:xfrm>
+          <a:prstGeom prst="rect">
+            <a:avLst/>
+          </a:prstGeom>
+          <a:solidFill>
+            <a:srgbClr val="FFFFFF"/>
+          </a:solidFill>
+          <a:ln w="12700">
+            <a:solidFill>
+              <a:srgbClr val="000000"/>
+            </a:solidFill>
+          </a:ln>
+        </p:spPr>
+        <p:style>
+          <a:lnRef idx="1">
+            <a:schemeClr val="accent1"/>
+          </a:lnRef>
+          <a:fillRef idx="3">
+            <a:schemeClr val="accent1"/>
+          </a:fillRef>
+          <a:effectRef idx="2">
+            <a:schemeClr val="accent1"/>
+          </a:effectRef>
+          <a:fontRef idx="minor">
+            <a:schemeClr val="lt1"/>
+          </a:fontRef>
+        </p:style>
+        <p:txBody>
+          <a:bodyPr rtlCol="0" anchor="ctr"/>
+          <a:lstStyle/>
+          <a:p>
+            <a:pPr algn="ctr"/>
+            <a:endParaRPr/>
+          </a:p>
+        </p:txBody>
+      </p:sp>
+      <p:sp>
+        <p:nvSpPr>
+          <p:cNvPr id="8" name="TextBox 7"/>
+          <p:cNvSpPr txBox="1"/>
+          <p:nvPr/>
+        </p:nvSpPr>
+        <p:spPr>
+          <a:xfrm>
+            <a:off x="6336792" y="1755648"/>
+            <a:ext cx="4928616" cy="1170432"/>
+          </a:xfrm>
+          <a:prstGeom prst="rect">
+            <a:avLst/>
+          </a:prstGeom>
+          <a:noFill/>
+        </p:spPr>
+        <p:txBody>
+          <a:bodyPr wrap="square">
+            <a:spAutoFit/>
+          </a:bodyPr>
+          <a:lstStyle/>
+          <a:p>
+            <a:pPr>
+              <a:spcAft>
+                <a:spcPts val="400"/>
+              </a:spcAft>
+              <a:defRPr sz="1300" b="1">
+                <a:solidFill>
+                  <a:srgbClr val="000000"/>
+                </a:solidFill>
+                <a:latin typeface="Arial"/>
+              </a:defRPr>
+            </a:pPr>
+            <a:r>
+              <a:t>★ Outcome 2: High Predictive Accuracy (R² ~ 0.89)</a:t>
+            </a:r>
+          </a:p>
+          <a:p>
+            <a:pPr>
+              <a:defRPr sz="1100">
+                <a:solidFill>
+                  <a:srgbClr val="3C3C3C"/>
+                </a:solidFill>
+                <a:latin typeface="Arial"/>
+              </a:defRPr>
+            </a:pPr>
+            <a:r>
+              <a:t>Ensemble Random Forest regressor achieves high R² &gt; 0.88 with minimal MAE/RMSE on test records.</a:t>
+            </a:r>
+          </a:p>
+        </p:txBody>
+      </p:sp>
+      <p:sp>
+        <p:nvSpPr>
+          <p:cNvPr id="9" name="Rectangle 8"/>
+          <p:cNvSpPr/>
+          <p:nvPr/>
+        </p:nvSpPr>
+        <p:spPr>
+          <a:xfrm>
+            <a:off x="731520" y="3182112"/>
+            <a:ext cx="5257800" cy="1389888"/>
+          </a:xfrm>
+          <a:prstGeom prst="rect">
+            <a:avLst/>
+          </a:prstGeom>
+          <a:solidFill>
+            <a:srgbClr val="FFFFFF"/>
+          </a:solidFill>
+          <a:ln w="12700">
+            <a:solidFill>
+              <a:srgbClr val="000000"/>
+            </a:solidFill>
+          </a:ln>
+        </p:spPr>
+        <p:style>
+          <a:lnRef idx="1">
+            <a:schemeClr val="accent1"/>
+          </a:lnRef>
+          <a:fillRef idx="3">
+            <a:schemeClr val="accent1"/>
+          </a:fillRef>
+          <a:effectRef idx="2">
+            <a:schemeClr val="accent1"/>
+          </a:effectRef>
+          <a:fontRef idx="minor">
+            <a:schemeClr val="lt1"/>
+          </a:fontRef>
+        </p:style>
+        <p:txBody>
+          <a:bodyPr rtlCol="0" anchor="ctr"/>
+          <a:lstStyle/>
+          <a:p>
+            <a:pPr algn="ctr"/>
+            <a:endParaRPr/>
+          </a:p>
+        </p:txBody>
+      </p:sp>
+      <p:sp>
+        <p:nvSpPr>
+          <p:cNvPr id="10" name="TextBox 9"/>
+          <p:cNvSpPr txBox="1"/>
+          <p:nvPr/>
+        </p:nvSpPr>
+        <p:spPr>
+          <a:xfrm>
+            <a:off x="896112" y="3291840"/>
+            <a:ext cx="4928616" cy="1170432"/>
+          </a:xfrm>
+          <a:prstGeom prst="rect">
+            <a:avLst/>
+          </a:prstGeom>
+          <a:noFill/>
+        </p:spPr>
+        <p:txBody>
+          <a:bodyPr wrap="square">
+            <a:spAutoFit/>
+          </a:bodyPr>
+          <a:lstStyle/>
+          <a:p>
+            <a:pPr>
+              <a:spcAft>
+                <a:spcPts val="400"/>
+              </a:spcAft>
+              <a:defRPr sz="1300" b="1">
+                <a:solidFill>
+                  <a:srgbClr val="000000"/>
+                </a:solidFill>
+                <a:latin typeface="Arial"/>
+              </a:defRPr>
+            </a:pPr>
+            <a:r>
+              <a:t>★ Outcome 3: 15% – 25% Procurement Cost Savings</a:t>
+            </a:r>
+          </a:p>
+          <a:p>
+            <a:pPr>
+              <a:defRPr sz="1100">
+                <a:solidFill>
+                  <a:srgbClr val="3C3C3C"/>
+                </a:solidFill>
+                <a:latin typeface="Arial"/>
+              </a:defRPr>
+            </a:pPr>
+            <a:r>
+              <a:t>Substantially cuts raw material expenditure by curbing over-preparation of high-cost food items.</a:t>
+            </a:r>
+          </a:p>
+        </p:txBody>
+      </p:sp>
+      <p:sp>
+        <p:nvSpPr>
+          <p:cNvPr id="11" name="Rectangle 10"/>
+          <p:cNvSpPr/>
+          <p:nvPr/>
+        </p:nvSpPr>
+        <p:spPr>
+          <a:xfrm>
+            <a:off x="6172200" y="3182112"/>
+            <a:ext cx="5257800" cy="1389888"/>
+          </a:xfrm>
+          <a:prstGeom prst="rect">
+            <a:avLst/>
+          </a:prstGeom>
+          <a:solidFill>
+            <a:srgbClr val="FFFFFF"/>
+          </a:solidFill>
+          <a:ln w="12700">
+            <a:solidFill>
+              <a:srgbClr val="000000"/>
+            </a:solidFill>
+          </a:ln>
+        </p:spPr>
+        <p:style>
+          <a:lnRef idx="1">
+            <a:schemeClr val="accent1"/>
+          </a:lnRef>
+          <a:fillRef idx="3">
+            <a:schemeClr val="accent1"/>
+          </a:fillRef>
+          <a:effectRef idx="2">
+            <a:schemeClr val="accent1"/>
+          </a:effectRef>
+          <a:fontRef idx="minor">
+            <a:schemeClr val="lt1"/>
+          </a:fontRef>
+        </p:style>
+        <p:txBody>
+          <a:bodyPr rtlCol="0" anchor="ctr"/>
+          <a:lstStyle/>
+          <a:p>
+            <a:pPr algn="ctr"/>
+            <a:endParaRPr/>
+          </a:p>
+        </p:txBody>
+      </p:sp>
+      <p:sp>
+        <p:nvSpPr>
+          <p:cNvPr id="12" name="TextBox 11"/>
+          <p:cNvSpPr txBox="1"/>
+          <p:nvPr/>
+        </p:nvSpPr>
+        <p:spPr>
+          <a:xfrm>
+            <a:off x="6336792" y="3291840"/>
+            <a:ext cx="4928616" cy="1170432"/>
+          </a:xfrm>
+          <a:prstGeom prst="rect">
+            <a:avLst/>
+          </a:prstGeom>
+          <a:noFill/>
+        </p:spPr>
+        <p:txBody>
+          <a:bodyPr wrap="square">
+            <a:spAutoFit/>
+          </a:bodyPr>
+          <a:lstStyle/>
+          <a:p>
+            <a:pPr>
+              <a:spcAft>
+                <a:spcPts val="400"/>
+              </a:spcAft>
+              <a:defRPr sz="1300" b="1">
+                <a:solidFill>
+                  <a:srgbClr val="000000"/>
+                </a:solidFill>
+                <a:latin typeface="Arial"/>
+              </a:defRPr>
+            </a:pPr>
+            <a:r>
+              <a:t>★ Outcome 4: Zero Hardware Cost Edge Deployment</a:t>
+            </a:r>
+          </a:p>
+          <a:p>
+            <a:pPr>
+              <a:defRPr sz="1100">
+                <a:solidFill>
+                  <a:srgbClr val="3C3C3C"/>
+                </a:solidFill>
+                <a:latin typeface="Arial"/>
+              </a:defRPr>
+            </a:pPr>
+            <a:r>
+              <a:t>Runs locally on staff Android smartphones/tablets without requiring expensive IoT weighing bins.</a:t>
+            </a:r>
+          </a:p>
+        </p:txBody>
+      </p:sp>
+      <p:sp>
+        <p:nvSpPr>
+          <p:cNvPr id="13" name="Rectangle 12"/>
+          <p:cNvSpPr/>
+          <p:nvPr/>
+        </p:nvSpPr>
+        <p:spPr>
+          <a:xfrm>
+            <a:off x="731520" y="4718304"/>
+            <a:ext cx="5257800" cy="1389888"/>
+          </a:xfrm>
+          <a:prstGeom prst="rect">
+            <a:avLst/>
+          </a:prstGeom>
+          <a:solidFill>
+            <a:srgbClr val="FFFFFF"/>
+          </a:solidFill>
+          <a:ln w="12700">
+            <a:solidFill>
+              <a:srgbClr val="000000"/>
+            </a:solidFill>
+          </a:ln>
+        </p:spPr>
+        <p:style>
+          <a:lnRef idx="1">
+            <a:schemeClr val="accent1"/>
+          </a:lnRef>
+          <a:fillRef idx="3">
+            <a:schemeClr val="accent1"/>
+          </a:fillRef>
+          <a:effectRef idx="2">
+            <a:schemeClr val="accent1"/>
+          </a:effectRef>
+          <a:fontRef idx="minor">
+            <a:schemeClr val="lt1"/>
+          </a:fontRef>
+        </p:style>
+        <p:txBody>
+          <a:bodyPr rtlCol="0" anchor="ctr"/>
+          <a:lstStyle/>
+          <a:p>
+            <a:pPr algn="ctr"/>
+            <a:endParaRPr/>
+          </a:p>
+        </p:txBody>
+      </p:sp>
+      <p:sp>
+        <p:nvSpPr>
+          <p:cNvPr id="14" name="TextBox 13"/>
+          <p:cNvSpPr txBox="1"/>
+          <p:nvPr/>
+        </p:nvSpPr>
+        <p:spPr>
+          <a:xfrm>
+            <a:off x="896112" y="4828032"/>
+            <a:ext cx="4928616" cy="1170432"/>
+          </a:xfrm>
+          <a:prstGeom prst="rect">
+            <a:avLst/>
+          </a:prstGeom>
+          <a:noFill/>
+        </p:spPr>
+        <p:txBody>
+          <a:bodyPr wrap="square">
+            <a:spAutoFit/>
+          </a:bodyPr>
+          <a:lstStyle/>
+          <a:p>
+            <a:pPr>
+              <a:spcAft>
+                <a:spcPts val="400"/>
+              </a:spcAft>
+              <a:defRPr sz="1300" b="1">
+                <a:solidFill>
+                  <a:srgbClr val="000000"/>
+                </a:solidFill>
+                <a:latin typeface="Arial"/>
+              </a:defRPr>
+            </a:pPr>
+            <a:r>
+              <a:t>★ Outcome 5: Real-Time Proactive Waste Risk Alerts</a:t>
+            </a:r>
+          </a:p>
+          <a:p>
+            <a:pPr>
+              <a:defRPr sz="1100">
+                <a:solidFill>
+                  <a:srgbClr val="3C3C3C"/>
+                </a:solidFill>
+                <a:latin typeface="Arial"/>
+              </a:defRPr>
+            </a:pPr>
+            <a:r>
+              <a:t>Instant LOW / MEDIUM / HIGH risk ratings with estimated financial loss warnings empower kitchen managers.</a:t>
+            </a:r>
+          </a:p>
+        </p:txBody>
+      </p:sp>
+      <p:sp>
+        <p:nvSpPr>
+          <p:cNvPr id="15" name="Rectangle 14"/>
+          <p:cNvSpPr/>
+          <p:nvPr/>
+        </p:nvSpPr>
+        <p:spPr>
+          <a:xfrm>
+            <a:off x="6172200" y="4718304"/>
+            <a:ext cx="5257800" cy="1389888"/>
+          </a:xfrm>
+          <a:prstGeom prst="rect">
+            <a:avLst/>
+          </a:prstGeom>
+          <a:solidFill>
+            <a:srgbClr val="FFFFFF"/>
+          </a:solidFill>
+          <a:ln w="12700">
+            <a:solidFill>
+              <a:srgbClr val="000000"/>
+            </a:solidFill>
+          </a:ln>
+        </p:spPr>
+        <p:style>
+          <a:lnRef idx="1">
+            <a:schemeClr val="accent1"/>
+          </a:lnRef>
+          <a:fillRef idx="3">
+            <a:schemeClr val="accent1"/>
+          </a:fillRef>
+          <a:effectRef idx="2">
+            <a:schemeClr val="accent1"/>
+          </a:effectRef>
+          <a:fontRef idx="minor">
+            <a:schemeClr val="lt1"/>
+          </a:fontRef>
+        </p:style>
+        <p:txBody>
+          <a:bodyPr rtlCol="0" anchor="ctr"/>
+          <a:lstStyle/>
+          <a:p>
+            <a:pPr algn="ctr"/>
+            <a:endParaRPr/>
+          </a:p>
+        </p:txBody>
+      </p:sp>
+      <p:sp>
+        <p:nvSpPr>
+          <p:cNvPr id="16" name="TextBox 15"/>
+          <p:cNvSpPr txBox="1"/>
+          <p:nvPr/>
+        </p:nvSpPr>
+        <p:spPr>
+          <a:xfrm>
+            <a:off x="6336792" y="4828032"/>
+            <a:ext cx="4928616" cy="1170432"/>
+          </a:xfrm>
+          <a:prstGeom prst="rect">
+            <a:avLst/>
+          </a:prstGeom>
+          <a:noFill/>
+        </p:spPr>
+        <p:txBody>
+          <a:bodyPr wrap="square">
+            <a:spAutoFit/>
+          </a:bodyPr>
+          <a:lstStyle/>
+          <a:p>
+            <a:pPr>
+              <a:spcAft>
+                <a:spcPts val="400"/>
+              </a:spcAft>
+              <a:defRPr sz="1300" b="1">
+                <a:solidFill>
+                  <a:srgbClr val="000000"/>
+                </a:solidFill>
+                <a:latin typeface="Arial"/>
+              </a:defRPr>
+            </a:pPr>
+            <a:r>
+              <a:t>★ Outcome 6: Reduced Carbon Footprint (UN SDG 12)</a:t>
+            </a:r>
+          </a:p>
+          <a:p>
+            <a:pPr>
+              <a:defRPr sz="1100">
+                <a:solidFill>
+                  <a:srgbClr val="3C3C3C"/>
+                </a:solidFill>
+                <a:latin typeface="Arial"/>
+              </a:defRPr>
+            </a:pPr>
+            <a:r>
+              <a:t>Curtails landfill organic waste decomposition, directly reducing methane and greenhouse gas emissions.</a:t>
             </a:r>
           </a:p>
         </p:txBody>
